--- a/02_EDA/Project_Speed_Dating/projet_speed_dating.pptx
+++ b/02_EDA/Project_Speed_Dating/projet_speed_dating.pptx
@@ -5,7 +5,7 @@
     <p:sldMasterId id="2147483660" r:id="rId1"/>
   </p:sldMasterIdLst>
   <p:notesMasterIdLst>
-    <p:notesMasterId r:id="rId12"/>
+    <p:notesMasterId r:id="rId13"/>
   </p:notesMasterIdLst>
   <p:sldIdLst>
     <p:sldId id="256" r:id="rId2"/>
@@ -14,10 +14,11 @@
     <p:sldId id="257" r:id="rId5"/>
     <p:sldId id="263" r:id="rId6"/>
     <p:sldId id="262" r:id="rId7"/>
-    <p:sldId id="264" r:id="rId8"/>
-    <p:sldId id="265" r:id="rId9"/>
-    <p:sldId id="259" r:id="rId10"/>
-    <p:sldId id="260" r:id="rId11"/>
+    <p:sldId id="266" r:id="rId8"/>
+    <p:sldId id="264" r:id="rId9"/>
+    <p:sldId id="265" r:id="rId10"/>
+    <p:sldId id="259" r:id="rId11"/>
+    <p:sldId id="260" r:id="rId12"/>
   </p:sldIdLst>
   <p:sldSz cx="12192000" cy="6858000"/>
   <p:notesSz cx="6858000" cy="9144000"/>
@@ -127,7 +128,7 @@
 <file path=ppt/revisionInfo.xml><?xml version="1.0" encoding="utf-8"?>
 <p1510:revInfo xmlns:a="http://schemas.openxmlformats.org/drawingml/2006/main" xmlns:r="http://schemas.openxmlformats.org/officeDocument/2006/relationships" xmlns:p1510="http://schemas.microsoft.com/office/powerpoint/2015/10/main">
   <p1510:revLst>
-    <p1510:client id="{2898B226-D44E-43DD-8DC2-A739B3EEA534}" v="49" dt="2024-03-26T13:59:09.004"/>
+    <p1510:client id="{2898B226-D44E-43DD-8DC2-A739B3EEA534}" v="53" dt="2024-03-27T06:38:41.508"/>
   </p1510:revLst>
 </p1510:revInfo>
 </file>
@@ -137,7 +138,7 @@
   <pc:docChgLst>
     <pc:chgData name="Philippe Baucour" userId="5102170ae7533958" providerId="LiveId" clId="{2898B226-D44E-43DD-8DC2-A739B3EEA534}"/>
     <pc:docChg chg="undo custSel addSld modSld sldOrd">
-      <pc:chgData name="Philippe Baucour" userId="5102170ae7533958" providerId="LiveId" clId="{2898B226-D44E-43DD-8DC2-A739B3EEA534}" dt="2024-03-26T16:35:35.582" v="2928" actId="20577"/>
+      <pc:chgData name="Philippe Baucour" userId="5102170ae7533958" providerId="LiveId" clId="{2898B226-D44E-43DD-8DC2-A739B3EEA534}" dt="2024-03-27T06:39:27.078" v="2976" actId="6549"/>
       <pc:docMkLst>
         <pc:docMk/>
       </pc:docMkLst>
@@ -823,8 +824,8 @@
           </ac:spMkLst>
         </pc:spChg>
       </pc:sldChg>
-      <pc:sldChg chg="modSp new mod">
-        <pc:chgData name="Philippe Baucour" userId="5102170ae7533958" providerId="LiveId" clId="{2898B226-D44E-43DD-8DC2-A739B3EEA534}" dt="2024-03-26T06:33:55.935" v="2032" actId="20577"/>
+      <pc:sldChg chg="addSp delSp modSp new mod">
+        <pc:chgData name="Philippe Baucour" userId="5102170ae7533958" providerId="LiveId" clId="{2898B226-D44E-43DD-8DC2-A739B3EEA534}" dt="2024-03-27T06:38:14.413" v="2930" actId="478"/>
         <pc:sldMkLst>
           <pc:docMk/>
           <pc:sldMk cId="3350399466" sldId="262"/>
@@ -843,6 +844,14 @@
             <pc:docMk/>
             <pc:sldMk cId="3350399466" sldId="262"/>
             <ac:spMk id="3" creationId="{FDBB58AD-A9B2-CF45-0FF6-ADABB49A672E}"/>
+          </ac:spMkLst>
+        </pc:spChg>
+        <pc:spChg chg="add del">
+          <ac:chgData name="Philippe Baucour" userId="5102170ae7533958" providerId="LiveId" clId="{2898B226-D44E-43DD-8DC2-A739B3EEA534}" dt="2024-03-27T06:38:14.413" v="2930" actId="478"/>
+          <ac:spMkLst>
+            <pc:docMk/>
+            <pc:sldMk cId="3350399466" sldId="262"/>
+            <ac:spMk id="4" creationId="{5B97D3FB-6638-A96D-98B1-9A8BFE5D5852}"/>
           </ac:spMkLst>
         </pc:spChg>
       </pc:sldChg>
@@ -1019,12 +1028,873 @@
           </ac:graphicFrameMkLst>
         </pc:graphicFrameChg>
       </pc:sldChg>
+      <pc:sldChg chg="delSp modSp add mod">
+        <pc:chgData name="Philippe Baucour" userId="5102170ae7533958" providerId="LiveId" clId="{2898B226-D44E-43DD-8DC2-A739B3EEA534}" dt="2024-03-27T06:39:27.078" v="2976" actId="6549"/>
+        <pc:sldMkLst>
+          <pc:docMk/>
+          <pc:sldMk cId="747625521" sldId="266"/>
+        </pc:sldMkLst>
+        <pc:spChg chg="mod">
+          <ac:chgData name="Philippe Baucour" userId="5102170ae7533958" providerId="LiveId" clId="{2898B226-D44E-43DD-8DC2-A739B3EEA534}" dt="2024-03-27T06:39:27.078" v="2976" actId="6549"/>
+          <ac:spMkLst>
+            <pc:docMk/>
+            <pc:sldMk cId="747625521" sldId="266"/>
+            <ac:spMk id="2" creationId="{A252341B-7A2D-75F7-2C2D-EED801A5D175}"/>
+          </ac:spMkLst>
+        </pc:spChg>
+        <pc:spChg chg="mod">
+          <ac:chgData name="Philippe Baucour" userId="5102170ae7533958" providerId="LiveId" clId="{2898B226-D44E-43DD-8DC2-A739B3EEA534}" dt="2024-03-27T06:39:09.702" v="2954" actId="1076"/>
+          <ac:spMkLst>
+            <pc:docMk/>
+            <pc:sldMk cId="747625521" sldId="266"/>
+            <ac:spMk id="15" creationId="{7FBC7647-AEBB-C182-B4C1-F0D59229BC54}"/>
+          </ac:spMkLst>
+        </pc:spChg>
+        <pc:grpChg chg="mod">
+          <ac:chgData name="Philippe Baucour" userId="5102170ae7533958" providerId="LiveId" clId="{2898B226-D44E-43DD-8DC2-A739B3EEA534}" dt="2024-03-27T06:39:09.702" v="2954" actId="1076"/>
+          <ac:grpSpMkLst>
+            <pc:docMk/>
+            <pc:sldMk cId="747625521" sldId="266"/>
+            <ac:grpSpMk id="5" creationId="{0BE0D992-8549-9A8A-AD05-EEA702837F8D}"/>
+          </ac:grpSpMkLst>
+        </pc:grpChg>
+        <pc:grpChg chg="mod">
+          <ac:chgData name="Philippe Baucour" userId="5102170ae7533958" providerId="LiveId" clId="{2898B226-D44E-43DD-8DC2-A739B3EEA534}" dt="2024-03-27T06:39:09.702" v="2954" actId="1076"/>
+          <ac:grpSpMkLst>
+            <pc:docMk/>
+            <pc:sldMk cId="747625521" sldId="266"/>
+            <ac:grpSpMk id="13" creationId="{929D4B47-F956-A3BD-CF7A-B31A89C74FD6}"/>
+          </ac:grpSpMkLst>
+        </pc:grpChg>
+        <pc:grpChg chg="mod">
+          <ac:chgData name="Philippe Baucour" userId="5102170ae7533958" providerId="LiveId" clId="{2898B226-D44E-43DD-8DC2-A739B3EEA534}" dt="2024-03-27T06:39:09.702" v="2954" actId="1076"/>
+          <ac:grpSpMkLst>
+            <pc:docMk/>
+            <pc:sldMk cId="747625521" sldId="266"/>
+            <ac:grpSpMk id="14" creationId="{750F5C85-4BDA-3BD0-AE8F-33297B726DBC}"/>
+          </ac:grpSpMkLst>
+        </pc:grpChg>
+        <pc:grpChg chg="mod">
+          <ac:chgData name="Philippe Baucour" userId="5102170ae7533958" providerId="LiveId" clId="{2898B226-D44E-43DD-8DC2-A739B3EEA534}" dt="2024-03-27T06:39:09.702" v="2954" actId="1076"/>
+          <ac:grpSpMkLst>
+            <pc:docMk/>
+            <pc:sldMk cId="747625521" sldId="266"/>
+            <ac:grpSpMk id="22" creationId="{93F441C8-C321-F6E5-D0C1-3DFADDBE7D35}"/>
+          </ac:grpSpMkLst>
+        </pc:grpChg>
+        <pc:graphicFrameChg chg="mod">
+          <ac:chgData name="Philippe Baucour" userId="5102170ae7533958" providerId="LiveId" clId="{2898B226-D44E-43DD-8DC2-A739B3EEA534}" dt="2024-03-27T06:39:09.702" v="2954" actId="1076"/>
+          <ac:graphicFrameMkLst>
+            <pc:docMk/>
+            <pc:sldMk cId="747625521" sldId="266"/>
+            <ac:graphicFrameMk id="4" creationId="{93EF82BD-25BA-73B5-101E-C7AF47FEF4D2}"/>
+          </ac:graphicFrameMkLst>
+        </pc:graphicFrameChg>
+        <pc:picChg chg="mod">
+          <ac:chgData name="Philippe Baucour" userId="5102170ae7533958" providerId="LiveId" clId="{2898B226-D44E-43DD-8DC2-A739B3EEA534}" dt="2024-03-27T06:39:09.702" v="2954" actId="1076"/>
+          <ac:picMkLst>
+            <pc:docMk/>
+            <pc:sldMk cId="747625521" sldId="266"/>
+            <ac:picMk id="6" creationId="{B6E74B60-254A-8FDD-59B9-4840940558C1}"/>
+          </ac:picMkLst>
+        </pc:picChg>
+        <pc:picChg chg="del">
+          <ac:chgData name="Philippe Baucour" userId="5102170ae7533958" providerId="LiveId" clId="{2898B226-D44E-43DD-8DC2-A739B3EEA534}" dt="2024-03-27T06:38:41.508" v="2932" actId="478"/>
+          <ac:picMkLst>
+            <pc:docMk/>
+            <pc:sldMk cId="747625521" sldId="266"/>
+            <ac:picMk id="7170" creationId="{B2627452-6804-5B6D-B13D-A310FB9C2836}"/>
+          </ac:picMkLst>
+        </pc:picChg>
+      </pc:sldChg>
     </pc:docChg>
   </pc:docChgLst>
 </pc:chgInfo>
 </file>
 
 <file path=ppt/diagrams/colors1.xml><?xml version="1.0" encoding="utf-8"?>
+<dgm:colorsDef xmlns:dgm="http://schemas.openxmlformats.org/drawingml/2006/diagram" xmlns:a="http://schemas.openxmlformats.org/drawingml/2006/main" uniqueId="urn:microsoft.com/office/officeart/2005/8/colors/colorful5">
+  <dgm:title val=""/>
+  <dgm:desc val=""/>
+  <dgm:catLst>
+    <dgm:cat type="colorful" pri="10500"/>
+  </dgm:catLst>
+  <dgm:styleLbl name="node0">
+    <dgm:fillClrLst meth="repeat">
+      <a:schemeClr val="accent4"/>
+    </dgm:fillClrLst>
+    <dgm:linClrLst meth="repeat">
+      <a:schemeClr val="lt1"/>
+    </dgm:linClrLst>
+    <dgm:effectClrLst/>
+    <dgm:txLinClrLst/>
+    <dgm:txFillClrLst/>
+    <dgm:txEffectClrLst/>
+  </dgm:styleLbl>
+  <dgm:styleLbl name="node1">
+    <dgm:fillClrLst>
+      <a:schemeClr val="accent5"/>
+      <a:schemeClr val="accent6"/>
+    </dgm:fillClrLst>
+    <dgm:linClrLst meth="repeat">
+      <a:schemeClr val="lt1"/>
+    </dgm:linClrLst>
+    <dgm:effectClrLst/>
+    <dgm:txLinClrLst/>
+    <dgm:txFillClrLst/>
+    <dgm:txEffectClrLst/>
+  </dgm:styleLbl>
+  <dgm:styleLbl name="alignNode1">
+    <dgm:fillClrLst>
+      <a:schemeClr val="accent5"/>
+      <a:schemeClr val="accent6"/>
+    </dgm:fillClrLst>
+    <dgm:linClrLst>
+      <a:schemeClr val="accent5"/>
+      <a:schemeClr val="accent6"/>
+    </dgm:linClrLst>
+    <dgm:effectClrLst/>
+    <dgm:txLinClrLst/>
+    <dgm:txFillClrLst/>
+    <dgm:txEffectClrLst/>
+  </dgm:styleLbl>
+  <dgm:styleLbl name="lnNode1">
+    <dgm:fillClrLst>
+      <a:schemeClr val="accent5"/>
+      <a:schemeClr val="accent6"/>
+    </dgm:fillClrLst>
+    <dgm:linClrLst meth="repeat">
+      <a:schemeClr val="lt1"/>
+    </dgm:linClrLst>
+    <dgm:effectClrLst/>
+    <dgm:txLinClrLst/>
+    <dgm:txFillClrLst/>
+    <dgm:txEffectClrLst/>
+  </dgm:styleLbl>
+  <dgm:styleLbl name="vennNode1">
+    <dgm:fillClrLst>
+      <a:schemeClr val="accent5">
+        <a:alpha val="50000"/>
+      </a:schemeClr>
+      <a:schemeClr val="accent6">
+        <a:alpha val="50000"/>
+      </a:schemeClr>
+    </dgm:fillClrLst>
+    <dgm:linClrLst meth="repeat">
+      <a:schemeClr val="lt1"/>
+    </dgm:linClrLst>
+    <dgm:effectClrLst/>
+    <dgm:txLinClrLst/>
+    <dgm:txFillClrLst/>
+    <dgm:txEffectClrLst/>
+  </dgm:styleLbl>
+  <dgm:styleLbl name="node2">
+    <dgm:fillClrLst>
+      <a:schemeClr val="accent6"/>
+    </dgm:fillClrLst>
+    <dgm:linClrLst meth="repeat">
+      <a:schemeClr val="lt1"/>
+    </dgm:linClrLst>
+    <dgm:effectClrLst/>
+    <dgm:txLinClrLst/>
+    <dgm:txFillClrLst/>
+    <dgm:txEffectClrLst/>
+  </dgm:styleLbl>
+  <dgm:styleLbl name="node3">
+    <dgm:fillClrLst>
+      <a:schemeClr val="accent1"/>
+    </dgm:fillClrLst>
+    <dgm:linClrLst meth="repeat">
+      <a:schemeClr val="lt1"/>
+    </dgm:linClrLst>
+    <dgm:effectClrLst/>
+    <dgm:txLinClrLst/>
+    <dgm:txFillClrLst/>
+    <dgm:txEffectClrLst/>
+  </dgm:styleLbl>
+  <dgm:styleLbl name="node4">
+    <dgm:fillClrLst>
+      <a:schemeClr val="accent2"/>
+    </dgm:fillClrLst>
+    <dgm:linClrLst meth="repeat">
+      <a:schemeClr val="lt1"/>
+    </dgm:linClrLst>
+    <dgm:effectClrLst/>
+    <dgm:txLinClrLst/>
+    <dgm:txFillClrLst/>
+    <dgm:txEffectClrLst/>
+  </dgm:styleLbl>
+  <dgm:styleLbl name="fgImgPlace1">
+    <dgm:fillClrLst>
+      <a:schemeClr val="accent5">
+        <a:tint val="50000"/>
+      </a:schemeClr>
+      <a:schemeClr val="accent6">
+        <a:tint val="50000"/>
+      </a:schemeClr>
+    </dgm:fillClrLst>
+    <dgm:linClrLst meth="repeat">
+      <a:schemeClr val="lt1"/>
+    </dgm:linClrLst>
+    <dgm:effectClrLst/>
+    <dgm:txLinClrLst/>
+    <dgm:txFillClrLst meth="repeat">
+      <a:schemeClr val="lt1"/>
+    </dgm:txFillClrLst>
+    <dgm:txEffectClrLst/>
+  </dgm:styleLbl>
+  <dgm:styleLbl name="alignImgPlace1">
+    <dgm:fillClrLst>
+      <a:schemeClr val="accent5">
+        <a:tint val="50000"/>
+      </a:schemeClr>
+      <a:schemeClr val="accent6">
+        <a:tint val="20000"/>
+      </a:schemeClr>
+    </dgm:fillClrLst>
+    <dgm:linClrLst meth="repeat">
+      <a:schemeClr val="lt1"/>
+    </dgm:linClrLst>
+    <dgm:effectClrLst/>
+    <dgm:txLinClrLst/>
+    <dgm:txFillClrLst meth="repeat">
+      <a:schemeClr val="lt1"/>
+    </dgm:txFillClrLst>
+    <dgm:txEffectClrLst/>
+  </dgm:styleLbl>
+  <dgm:styleLbl name="bgImgPlace1">
+    <dgm:fillClrLst>
+      <a:schemeClr val="accent5">
+        <a:tint val="50000"/>
+      </a:schemeClr>
+      <a:schemeClr val="accent6">
+        <a:tint val="20000"/>
+      </a:schemeClr>
+    </dgm:fillClrLst>
+    <dgm:linClrLst meth="repeat">
+      <a:schemeClr val="lt1"/>
+    </dgm:linClrLst>
+    <dgm:effectClrLst/>
+    <dgm:txLinClrLst/>
+    <dgm:txFillClrLst meth="repeat">
+      <a:schemeClr val="lt1"/>
+    </dgm:txFillClrLst>
+    <dgm:txEffectClrLst/>
+  </dgm:styleLbl>
+  <dgm:styleLbl name="sibTrans2D1">
+    <dgm:fillClrLst>
+      <a:schemeClr val="accent5"/>
+      <a:schemeClr val="accent6"/>
+    </dgm:fillClrLst>
+    <dgm:linClrLst meth="repeat">
+      <a:schemeClr val="lt1"/>
+    </dgm:linClrLst>
+    <dgm:effectClrLst/>
+    <dgm:txLinClrLst/>
+    <dgm:txFillClrLst/>
+    <dgm:txEffectClrLst/>
+  </dgm:styleLbl>
+  <dgm:styleLbl name="fgSibTrans2D1">
+    <dgm:fillClrLst>
+      <a:schemeClr val="accent5"/>
+      <a:schemeClr val="accent6"/>
+    </dgm:fillClrLst>
+    <dgm:linClrLst meth="repeat">
+      <a:schemeClr val="lt1"/>
+    </dgm:linClrLst>
+    <dgm:effectClrLst/>
+    <dgm:txLinClrLst/>
+    <dgm:txFillClrLst meth="repeat">
+      <a:schemeClr val="lt1"/>
+    </dgm:txFillClrLst>
+    <dgm:txEffectClrLst/>
+  </dgm:styleLbl>
+  <dgm:styleLbl name="bgSibTrans2D1">
+    <dgm:fillClrLst>
+      <a:schemeClr val="accent5"/>
+      <a:schemeClr val="accent6"/>
+    </dgm:fillClrLst>
+    <dgm:linClrLst meth="repeat">
+      <a:schemeClr val="lt1"/>
+    </dgm:linClrLst>
+    <dgm:effectClrLst/>
+    <dgm:txLinClrLst/>
+    <dgm:txFillClrLst meth="repeat">
+      <a:schemeClr val="lt1"/>
+    </dgm:txFillClrLst>
+    <dgm:txEffectClrLst/>
+  </dgm:styleLbl>
+  <dgm:styleLbl name="sibTrans1D1">
+    <dgm:fillClrLst/>
+    <dgm:linClrLst>
+      <a:schemeClr val="accent5"/>
+      <a:schemeClr val="accent6"/>
+    </dgm:linClrLst>
+    <dgm:effectClrLst/>
+    <dgm:txLinClrLst/>
+    <dgm:txFillClrLst meth="repeat">
+      <a:schemeClr val="tx1"/>
+    </dgm:txFillClrLst>
+    <dgm:txEffectClrLst/>
+  </dgm:styleLbl>
+  <dgm:styleLbl name="callout">
+    <dgm:fillClrLst meth="repeat">
+      <a:schemeClr val="accent5"/>
+    </dgm:fillClrLst>
+    <dgm:linClrLst meth="repeat">
+      <a:schemeClr val="accent5">
+        <a:tint val="50000"/>
+      </a:schemeClr>
+    </dgm:linClrLst>
+    <dgm:effectClrLst/>
+    <dgm:txLinClrLst/>
+    <dgm:txFillClrLst meth="repeat">
+      <a:schemeClr val="tx1"/>
+    </dgm:txFillClrLst>
+    <dgm:txEffectClrLst/>
+  </dgm:styleLbl>
+  <dgm:styleLbl name="asst0">
+    <dgm:fillClrLst meth="repeat">
+      <a:schemeClr val="accent5"/>
+    </dgm:fillClrLst>
+    <dgm:linClrLst meth="repeat">
+      <a:schemeClr val="lt1">
+        <a:shade val="80000"/>
+      </a:schemeClr>
+    </dgm:linClrLst>
+    <dgm:effectClrLst/>
+    <dgm:txLinClrLst/>
+    <dgm:txFillClrLst/>
+    <dgm:txEffectClrLst/>
+  </dgm:styleLbl>
+  <dgm:styleLbl name="asst1">
+    <dgm:fillClrLst meth="repeat">
+      <a:schemeClr val="accent6"/>
+    </dgm:fillClrLst>
+    <dgm:linClrLst meth="repeat">
+      <a:schemeClr val="lt1">
+        <a:shade val="80000"/>
+      </a:schemeClr>
+    </dgm:linClrLst>
+    <dgm:effectClrLst/>
+    <dgm:txLinClrLst/>
+    <dgm:txFillClrLst/>
+    <dgm:txEffectClrLst/>
+  </dgm:styleLbl>
+  <dgm:styleLbl name="asst2">
+    <dgm:fillClrLst>
+      <a:schemeClr val="accent1"/>
+    </dgm:fillClrLst>
+    <dgm:linClrLst meth="repeat">
+      <a:schemeClr val="lt1"/>
+    </dgm:linClrLst>
+    <dgm:effectClrLst/>
+    <dgm:txLinClrLst/>
+    <dgm:txFillClrLst/>
+    <dgm:txEffectClrLst/>
+  </dgm:styleLbl>
+  <dgm:styleLbl name="asst3">
+    <dgm:fillClrLst>
+      <a:schemeClr val="accent2"/>
+    </dgm:fillClrLst>
+    <dgm:linClrLst meth="repeat">
+      <a:schemeClr val="lt1"/>
+    </dgm:linClrLst>
+    <dgm:effectClrLst/>
+    <dgm:txLinClrLst/>
+    <dgm:txFillClrLst/>
+    <dgm:txEffectClrLst/>
+  </dgm:styleLbl>
+  <dgm:styleLbl name="asst4">
+    <dgm:fillClrLst>
+      <a:schemeClr val="accent3"/>
+    </dgm:fillClrLst>
+    <dgm:linClrLst meth="repeat">
+      <a:schemeClr val="lt1"/>
+    </dgm:linClrLst>
+    <dgm:effectClrLst/>
+    <dgm:txLinClrLst/>
+    <dgm:txFillClrLst/>
+    <dgm:txEffectClrLst/>
+  </dgm:styleLbl>
+  <dgm:styleLbl name="parChTrans2D1">
+    <dgm:fillClrLst meth="repeat">
+      <a:schemeClr val="accent5"/>
+    </dgm:fillClrLst>
+    <dgm:linClrLst meth="repeat">
+      <a:schemeClr val="lt1"/>
+    </dgm:linClrLst>
+    <dgm:effectClrLst/>
+    <dgm:txLinClrLst/>
+    <dgm:txFillClrLst meth="repeat">
+      <a:schemeClr val="lt1"/>
+    </dgm:txFillClrLst>
+    <dgm:txEffectClrLst/>
+  </dgm:styleLbl>
+  <dgm:styleLbl name="parChTrans2D2">
+    <dgm:fillClrLst meth="repeat">
+      <a:schemeClr val="accent6"/>
+    </dgm:fillClrLst>
+    <dgm:linClrLst meth="repeat">
+      <a:schemeClr val="lt1"/>
+    </dgm:linClrLst>
+    <dgm:effectClrLst/>
+    <dgm:txLinClrLst/>
+    <dgm:txFillClrLst/>
+    <dgm:txEffectClrLst/>
+  </dgm:styleLbl>
+  <dgm:styleLbl name="parChTrans2D3">
+    <dgm:fillClrLst meth="repeat">
+      <a:schemeClr val="accent6"/>
+    </dgm:fillClrLst>
+    <dgm:linClrLst meth="repeat">
+      <a:schemeClr val="lt1"/>
+    </dgm:linClrLst>
+    <dgm:effectClrLst/>
+    <dgm:txLinClrLst/>
+    <dgm:txFillClrLst/>
+    <dgm:txEffectClrLst/>
+  </dgm:styleLbl>
+  <dgm:styleLbl name="parChTrans2D4">
+    <dgm:fillClrLst meth="repeat">
+      <a:schemeClr val="accent1"/>
+    </dgm:fillClrLst>
+    <dgm:linClrLst meth="repeat">
+      <a:schemeClr val="lt1"/>
+    </dgm:linClrLst>
+    <dgm:effectClrLst/>
+    <dgm:txLinClrLst/>
+    <dgm:txFillClrLst meth="repeat">
+      <a:schemeClr val="lt1"/>
+    </dgm:txFillClrLst>
+    <dgm:txEffectClrLst/>
+  </dgm:styleLbl>
+  <dgm:styleLbl name="parChTrans1D1">
+    <dgm:fillClrLst meth="repeat">
+      <a:schemeClr val="accent5"/>
+    </dgm:fillClrLst>
+    <dgm:linClrLst meth="repeat">
+      <a:schemeClr val="accent5"/>
+    </dgm:linClrLst>
+    <dgm:effectClrLst/>
+    <dgm:txLinClrLst/>
+    <dgm:txFillClrLst meth="repeat">
+      <a:schemeClr val="tx1"/>
+    </dgm:txFillClrLst>
+    <dgm:txEffectClrLst/>
+  </dgm:styleLbl>
+  <dgm:styleLbl name="parChTrans1D2">
+    <dgm:fillClrLst meth="repeat">
+      <a:schemeClr val="accent6">
+        <a:tint val="90000"/>
+      </a:schemeClr>
+    </dgm:fillClrLst>
+    <dgm:linClrLst meth="repeat">
+      <a:schemeClr val="accent6"/>
+    </dgm:linClrLst>
+    <dgm:effectClrLst/>
+    <dgm:txLinClrLst/>
+    <dgm:txFillClrLst meth="repeat">
+      <a:schemeClr val="tx1"/>
+    </dgm:txFillClrLst>
+    <dgm:txEffectClrLst/>
+  </dgm:styleLbl>
+  <dgm:styleLbl name="parChTrans1D3">
+    <dgm:fillClrLst meth="repeat">
+      <a:schemeClr val="accent6">
+        <a:tint val="70000"/>
+      </a:schemeClr>
+    </dgm:fillClrLst>
+    <dgm:linClrLst meth="repeat">
+      <a:schemeClr val="accent1"/>
+    </dgm:linClrLst>
+    <dgm:effectClrLst/>
+    <dgm:txLinClrLst/>
+    <dgm:txFillClrLst meth="repeat">
+      <a:schemeClr val="tx1"/>
+    </dgm:txFillClrLst>
+    <dgm:txEffectClrLst/>
+  </dgm:styleLbl>
+  <dgm:styleLbl name="parChTrans1D4">
+    <dgm:fillClrLst meth="repeat">
+      <a:schemeClr val="accent6">
+        <a:tint val="50000"/>
+      </a:schemeClr>
+    </dgm:fillClrLst>
+    <dgm:linClrLst meth="repeat">
+      <a:schemeClr val="accent2"/>
+    </dgm:linClrLst>
+    <dgm:effectClrLst/>
+    <dgm:txLinClrLst/>
+    <dgm:txFillClrLst meth="repeat">
+      <a:schemeClr val="tx1"/>
+    </dgm:txFillClrLst>
+    <dgm:txEffectClrLst/>
+  </dgm:styleLbl>
+  <dgm:styleLbl name="fgAcc1">
+    <dgm:fillClrLst meth="repeat">
+      <a:schemeClr val="lt1">
+        <a:alpha val="90000"/>
+      </a:schemeClr>
+    </dgm:fillClrLst>
+    <dgm:linClrLst>
+      <a:schemeClr val="accent5"/>
+      <a:schemeClr val="accent6"/>
+    </dgm:linClrLst>
+    <dgm:effectClrLst/>
+    <dgm:txLinClrLst/>
+    <dgm:txFillClrLst meth="repeat">
+      <a:schemeClr val="dk1"/>
+    </dgm:txFillClrLst>
+    <dgm:txEffectClrLst/>
+  </dgm:styleLbl>
+  <dgm:styleLbl name="conFgAcc1">
+    <dgm:fillClrLst meth="repeat">
+      <a:schemeClr val="lt1">
+        <a:alpha val="90000"/>
+      </a:schemeClr>
+    </dgm:fillClrLst>
+    <dgm:linClrLst>
+      <a:schemeClr val="accent5"/>
+      <a:schemeClr val="accent6"/>
+    </dgm:linClrLst>
+    <dgm:effectClrLst/>
+    <dgm:txLinClrLst/>
+    <dgm:txFillClrLst meth="repeat">
+      <a:schemeClr val="dk1"/>
+    </dgm:txFillClrLst>
+    <dgm:txEffectClrLst/>
+  </dgm:styleLbl>
+  <dgm:styleLbl name="alignAcc1">
+    <dgm:fillClrLst meth="repeat">
+      <a:schemeClr val="lt1">
+        <a:alpha val="90000"/>
+      </a:schemeClr>
+    </dgm:fillClrLst>
+    <dgm:linClrLst>
+      <a:schemeClr val="accent5"/>
+      <a:schemeClr val="accent6"/>
+    </dgm:linClrLst>
+    <dgm:effectClrLst/>
+    <dgm:txLinClrLst/>
+    <dgm:txFillClrLst meth="repeat">
+      <a:schemeClr val="dk1"/>
+    </dgm:txFillClrLst>
+    <dgm:txEffectClrLst/>
+  </dgm:styleLbl>
+  <dgm:styleLbl name="trAlignAcc1">
+    <dgm:fillClrLst meth="repeat">
+      <a:schemeClr val="lt1">
+        <a:alpha val="40000"/>
+      </a:schemeClr>
+    </dgm:fillClrLst>
+    <dgm:linClrLst meth="repeat">
+      <a:schemeClr val="accent5"/>
+    </dgm:linClrLst>
+    <dgm:effectClrLst/>
+    <dgm:txLinClrLst/>
+    <dgm:txFillClrLst meth="repeat">
+      <a:schemeClr val="dk1"/>
+    </dgm:txFillClrLst>
+    <dgm:txEffectClrLst/>
+  </dgm:styleLbl>
+  <dgm:styleLbl name="bgAcc1">
+    <dgm:fillClrLst meth="repeat">
+      <a:schemeClr val="lt1">
+        <a:alpha val="90000"/>
+      </a:schemeClr>
+    </dgm:fillClrLst>
+    <dgm:linClrLst>
+      <a:schemeClr val="accent5"/>
+      <a:schemeClr val="accent6"/>
+    </dgm:linClrLst>
+    <dgm:effectClrLst/>
+    <dgm:txLinClrLst/>
+    <dgm:txFillClrLst meth="repeat">
+      <a:schemeClr val="dk1"/>
+    </dgm:txFillClrLst>
+    <dgm:txEffectClrLst/>
+  </dgm:styleLbl>
+  <dgm:styleLbl name="solidFgAcc1">
+    <dgm:fillClrLst meth="repeat">
+      <a:schemeClr val="lt1"/>
+    </dgm:fillClrLst>
+    <dgm:linClrLst>
+      <a:schemeClr val="accent5"/>
+      <a:schemeClr val="accent6"/>
+    </dgm:linClrLst>
+    <dgm:effectClrLst/>
+    <dgm:txLinClrLst/>
+    <dgm:txFillClrLst meth="repeat">
+      <a:schemeClr val="dk1"/>
+    </dgm:txFillClrLst>
+    <dgm:txEffectClrLst/>
+  </dgm:styleLbl>
+  <dgm:styleLbl name="solidAlignAcc1">
+    <dgm:fillClrLst meth="repeat">
+      <a:schemeClr val="lt1"/>
+    </dgm:fillClrLst>
+    <dgm:linClrLst>
+      <a:schemeClr val="accent5"/>
+      <a:schemeClr val="accent6"/>
+    </dgm:linClrLst>
+    <dgm:effectClrLst/>
+    <dgm:txLinClrLst/>
+    <dgm:txFillClrLst meth="repeat">
+      <a:schemeClr val="dk1"/>
+    </dgm:txFillClrLst>
+    <dgm:txEffectClrLst/>
+  </dgm:styleLbl>
+  <dgm:styleLbl name="solidBgAcc1">
+    <dgm:fillClrLst meth="repeat">
+      <a:schemeClr val="lt1"/>
+    </dgm:fillClrLst>
+    <dgm:linClrLst>
+      <a:schemeClr val="accent5"/>
+      <a:schemeClr val="accent6"/>
+    </dgm:linClrLst>
+    <dgm:effectClrLst/>
+    <dgm:txLinClrLst/>
+    <dgm:txFillClrLst meth="repeat">
+      <a:schemeClr val="dk1"/>
+    </dgm:txFillClrLst>
+    <dgm:txEffectClrLst/>
+  </dgm:styleLbl>
+  <dgm:styleLbl name="fgAccFollowNode1">
+    <dgm:fillClrLst>
+      <a:schemeClr val="accent5">
+        <a:tint val="40000"/>
+        <a:alpha val="90000"/>
+      </a:schemeClr>
+      <a:schemeClr val="accent6">
+        <a:tint val="40000"/>
+        <a:alpha val="90000"/>
+      </a:schemeClr>
+    </dgm:fillClrLst>
+    <dgm:linClrLst>
+      <a:schemeClr val="accent5">
+        <a:tint val="40000"/>
+        <a:alpha val="90000"/>
+      </a:schemeClr>
+      <a:schemeClr val="accent5">
+        <a:tint val="40000"/>
+        <a:alpha val="90000"/>
+      </a:schemeClr>
+    </dgm:linClrLst>
+    <dgm:effectClrLst/>
+    <dgm:txLinClrLst/>
+    <dgm:txFillClrLst meth="repeat">
+      <a:schemeClr val="dk1"/>
+    </dgm:txFillClrLst>
+    <dgm:txEffectClrLst/>
+  </dgm:styleLbl>
+  <dgm:styleLbl name="alignAccFollowNode1">
+    <dgm:fillClrLst>
+      <a:schemeClr val="accent5">
+        <a:tint val="40000"/>
+        <a:alpha val="90000"/>
+      </a:schemeClr>
+      <a:schemeClr val="accent6">
+        <a:tint val="40000"/>
+        <a:alpha val="90000"/>
+      </a:schemeClr>
+    </dgm:fillClrLst>
+    <dgm:linClrLst>
+      <a:schemeClr val="accent5">
+        <a:tint val="40000"/>
+        <a:alpha val="90000"/>
+      </a:schemeClr>
+      <a:schemeClr val="accent6">
+        <a:tint val="40000"/>
+        <a:alpha val="90000"/>
+      </a:schemeClr>
+    </dgm:linClrLst>
+    <dgm:effectClrLst/>
+    <dgm:txLinClrLst/>
+    <dgm:txFillClrLst meth="repeat">
+      <a:schemeClr val="dk1"/>
+    </dgm:txFillClrLst>
+    <dgm:txEffectClrLst/>
+  </dgm:styleLbl>
+  <dgm:styleLbl name="bgAccFollowNode1">
+    <dgm:fillClrLst>
+      <a:schemeClr val="accent5">
+        <a:tint val="40000"/>
+        <a:alpha val="90000"/>
+      </a:schemeClr>
+      <a:schemeClr val="accent6">
+        <a:tint val="40000"/>
+        <a:alpha val="90000"/>
+      </a:schemeClr>
+    </dgm:fillClrLst>
+    <dgm:linClrLst>
+      <a:schemeClr val="accent5">
+        <a:tint val="40000"/>
+        <a:alpha val="90000"/>
+      </a:schemeClr>
+      <a:schemeClr val="accent6">
+        <a:tint val="40000"/>
+        <a:alpha val="90000"/>
+      </a:schemeClr>
+    </dgm:linClrLst>
+    <dgm:effectClrLst/>
+    <dgm:txLinClrLst/>
+    <dgm:txFillClrLst meth="repeat">
+      <a:schemeClr val="dk1"/>
+    </dgm:txFillClrLst>
+    <dgm:txEffectClrLst/>
+  </dgm:styleLbl>
+  <dgm:styleLbl name="fgAcc0">
+    <dgm:fillClrLst meth="repeat">
+      <a:schemeClr val="lt1">
+        <a:alpha val="90000"/>
+      </a:schemeClr>
+    </dgm:fillClrLst>
+    <dgm:linClrLst>
+      <a:schemeClr val="accent4"/>
+    </dgm:linClrLst>
+    <dgm:effectClrLst/>
+    <dgm:txLinClrLst/>
+    <dgm:txFillClrLst meth="repeat">
+      <a:schemeClr val="dk1"/>
+    </dgm:txFillClrLst>
+    <dgm:txEffectClrLst/>
+  </dgm:styleLbl>
+  <dgm:styleLbl name="fgAcc2">
+    <dgm:fillClrLst meth="repeat">
+      <a:schemeClr val="lt1">
+        <a:alpha val="90000"/>
+      </a:schemeClr>
+    </dgm:fillClrLst>
+    <dgm:linClrLst>
+      <a:schemeClr val="accent6"/>
+    </dgm:linClrLst>
+    <dgm:effectClrLst/>
+    <dgm:txLinClrLst/>
+    <dgm:txFillClrLst meth="repeat">
+      <a:schemeClr val="dk1"/>
+    </dgm:txFillClrLst>
+    <dgm:txEffectClrLst/>
+  </dgm:styleLbl>
+  <dgm:styleLbl name="fgAcc3">
+    <dgm:fillClrLst meth="repeat">
+      <a:schemeClr val="lt1">
+        <a:alpha val="90000"/>
+      </a:schemeClr>
+    </dgm:fillClrLst>
+    <dgm:linClrLst>
+      <a:schemeClr val="accent1"/>
+    </dgm:linClrLst>
+    <dgm:effectClrLst/>
+    <dgm:txLinClrLst/>
+    <dgm:txFillClrLst meth="repeat">
+      <a:schemeClr val="dk1"/>
+    </dgm:txFillClrLst>
+    <dgm:txEffectClrLst/>
+  </dgm:styleLbl>
+  <dgm:styleLbl name="fgAcc4">
+    <dgm:fillClrLst meth="repeat">
+      <a:schemeClr val="lt1">
+        <a:alpha val="90000"/>
+      </a:schemeClr>
+    </dgm:fillClrLst>
+    <dgm:linClrLst>
+      <a:schemeClr val="accent2"/>
+    </dgm:linClrLst>
+    <dgm:effectClrLst/>
+    <dgm:txLinClrLst/>
+    <dgm:txFillClrLst meth="repeat">
+      <a:schemeClr val="dk1"/>
+    </dgm:txFillClrLst>
+    <dgm:txEffectClrLst/>
+  </dgm:styleLbl>
+  <dgm:styleLbl name="bgShp">
+    <dgm:fillClrLst meth="repeat">
+      <a:schemeClr val="accent5">
+        <a:tint val="40000"/>
+      </a:schemeClr>
+    </dgm:fillClrLst>
+    <dgm:linClrLst meth="repeat">
+      <a:schemeClr val="dk1"/>
+    </dgm:linClrLst>
+    <dgm:effectClrLst/>
+    <dgm:txLinClrLst/>
+    <dgm:txFillClrLst meth="repeat">
+      <a:schemeClr val="dk1"/>
+    </dgm:txFillClrLst>
+    <dgm:txEffectClrLst/>
+  </dgm:styleLbl>
+  <dgm:styleLbl name="dkBgShp">
+    <dgm:fillClrLst meth="repeat">
+      <a:schemeClr val="accent5">
+        <a:shade val="90000"/>
+      </a:schemeClr>
+    </dgm:fillClrLst>
+    <dgm:linClrLst meth="repeat">
+      <a:schemeClr val="dk1"/>
+    </dgm:linClrLst>
+    <dgm:effectClrLst/>
+    <dgm:txLinClrLst/>
+    <dgm:txFillClrLst meth="repeat">
+      <a:schemeClr val="lt1"/>
+    </dgm:txFillClrLst>
+    <dgm:txEffectClrLst/>
+  </dgm:styleLbl>
+  <dgm:styleLbl name="trBgShp">
+    <dgm:fillClrLst meth="repeat">
+      <a:schemeClr val="accent5">
+        <a:tint val="50000"/>
+        <a:alpha val="40000"/>
+      </a:schemeClr>
+    </dgm:fillClrLst>
+    <dgm:linClrLst meth="repeat">
+      <a:schemeClr val="accent5"/>
+    </dgm:linClrLst>
+    <dgm:effectClrLst/>
+    <dgm:txLinClrLst/>
+    <dgm:txFillClrLst meth="repeat">
+      <a:schemeClr val="lt1"/>
+    </dgm:txFillClrLst>
+    <dgm:txEffectClrLst/>
+  </dgm:styleLbl>
+  <dgm:styleLbl name="fgShp">
+    <dgm:fillClrLst meth="repeat">
+      <a:schemeClr val="accent5">
+        <a:tint val="40000"/>
+      </a:schemeClr>
+    </dgm:fillClrLst>
+    <dgm:linClrLst meth="repeat">
+      <a:schemeClr val="lt1"/>
+    </dgm:linClrLst>
+    <dgm:effectClrLst/>
+    <dgm:txLinClrLst/>
+    <dgm:txFillClrLst meth="repeat">
+      <a:schemeClr val="dk1"/>
+    </dgm:txFillClrLst>
+    <dgm:txEffectClrLst/>
+  </dgm:styleLbl>
+  <dgm:styleLbl name="revTx">
+    <dgm:fillClrLst meth="repeat">
+      <a:schemeClr val="lt1">
+        <a:alpha val="0"/>
+      </a:schemeClr>
+    </dgm:fillClrLst>
+    <dgm:linClrLst meth="repeat">
+      <a:schemeClr val="dk1">
+        <a:alpha val="0"/>
+      </a:schemeClr>
+    </dgm:linClrLst>
+    <dgm:effectClrLst/>
+    <dgm:txLinClrLst/>
+    <dgm:txFillClrLst meth="repeat">
+      <a:schemeClr val="tx1"/>
+    </dgm:txFillClrLst>
+    <dgm:txEffectClrLst/>
+  </dgm:styleLbl>
+</dgm:colorsDef>
+</file>
+
+<file path=ppt/diagrams/colors2.xml><?xml version="1.0" encoding="utf-8"?>
 <dgm:colorsDef xmlns:dgm="http://schemas.openxmlformats.org/drawingml/2006/diagram" xmlns:a="http://schemas.openxmlformats.org/drawingml/2006/main" uniqueId="urn:microsoft.com/office/officeart/2005/8/colors/accent1_2">
   <dgm:title val=""/>
   <dgm:desc val=""/>
@@ -1772,6 +2642,871 @@
 </file>
 
 <file path=ppt/diagrams/data1.xml><?xml version="1.0" encoding="utf-8"?>
+<dgm:dataModel xmlns:dgm="http://schemas.openxmlformats.org/drawingml/2006/diagram" xmlns:a="http://schemas.openxmlformats.org/drawingml/2006/main">
+  <dgm:ptLst>
+    <dgm:pt modelId="{0B2884A8-C61A-47E0-88A0-4B991582B611}" type="doc">
+      <dgm:prSet loTypeId="urn:microsoft.com/office/officeart/2005/8/layout/chevron1" loCatId="process" qsTypeId="urn:microsoft.com/office/officeart/2005/8/quickstyle/simple1" qsCatId="simple" csTypeId="urn:microsoft.com/office/officeart/2005/8/colors/colorful5" csCatId="colorful" phldr="1"/>
+      <dgm:spPr/>
+    </dgm:pt>
+    <dgm:pt modelId="{0469192A-6BB4-43FF-ABAD-AECC7A555A59}">
+      <dgm:prSet phldrT="[Texte]"/>
+      <dgm:spPr/>
+      <dgm:t>
+        <a:bodyPr/>
+        <a:lstStyle/>
+        <a:p>
+          <a:r>
+            <a:rPr lang="fr-FR" dirty="0" err="1"/>
+            <a:t>Collecting</a:t>
+          </a:r>
+          <a:endParaRPr lang="fr-FR" dirty="0"/>
+        </a:p>
+      </dgm:t>
+    </dgm:pt>
+    <dgm:pt modelId="{62C49693-A8A9-4E4A-9AF1-30DFB784115D}" type="parTrans" cxnId="{9A002231-5F20-4E6A-A938-25DD2B2E372F}">
+      <dgm:prSet/>
+      <dgm:spPr/>
+      <dgm:t>
+        <a:bodyPr/>
+        <a:lstStyle/>
+        <a:p>
+          <a:endParaRPr lang="fr-FR"/>
+        </a:p>
+      </dgm:t>
+    </dgm:pt>
+    <dgm:pt modelId="{4C557C1E-EBD2-4E39-AA1A-AA26769CEC3F}" type="sibTrans" cxnId="{9A002231-5F20-4E6A-A938-25DD2B2E372F}">
+      <dgm:prSet/>
+      <dgm:spPr/>
+      <dgm:t>
+        <a:bodyPr/>
+        <a:lstStyle/>
+        <a:p>
+          <a:endParaRPr lang="fr-FR"/>
+        </a:p>
+      </dgm:t>
+    </dgm:pt>
+    <dgm:pt modelId="{B2010812-3CC0-4CD4-8F83-87CA8F2F7BDD}">
+      <dgm:prSet phldrT="[Texte]"/>
+      <dgm:spPr/>
+      <dgm:t>
+        <a:bodyPr/>
+        <a:lstStyle/>
+        <a:p>
+          <a:r>
+            <a:rPr lang="fr-FR" dirty="0" err="1"/>
+            <a:t>Preprocessing</a:t>
+          </a:r>
+          <a:endParaRPr lang="fr-FR" dirty="0"/>
+        </a:p>
+      </dgm:t>
+    </dgm:pt>
+    <dgm:pt modelId="{A067CC6F-6678-406F-941D-9CCFD1CAB818}" type="parTrans" cxnId="{0E2002B6-1FE9-49D9-8754-B366D3A20265}">
+      <dgm:prSet/>
+      <dgm:spPr/>
+      <dgm:t>
+        <a:bodyPr/>
+        <a:lstStyle/>
+        <a:p>
+          <a:endParaRPr lang="fr-FR"/>
+        </a:p>
+      </dgm:t>
+    </dgm:pt>
+    <dgm:pt modelId="{E3ECF18C-5EFB-4850-B5B9-1BBCB877A2B7}" type="sibTrans" cxnId="{0E2002B6-1FE9-49D9-8754-B366D3A20265}">
+      <dgm:prSet/>
+      <dgm:spPr/>
+      <dgm:t>
+        <a:bodyPr/>
+        <a:lstStyle/>
+        <a:p>
+          <a:endParaRPr lang="fr-FR"/>
+        </a:p>
+      </dgm:t>
+    </dgm:pt>
+    <dgm:pt modelId="{2A38525C-7F37-4518-8BA5-C09B709FFF33}">
+      <dgm:prSet phldrT="[Texte]"/>
+      <dgm:spPr/>
+      <dgm:t>
+        <a:bodyPr/>
+        <a:lstStyle/>
+        <a:p>
+          <a:r>
+            <a:rPr lang="fr-FR" dirty="0"/>
+            <a:t>Exploration</a:t>
+          </a:r>
+        </a:p>
+      </dgm:t>
+    </dgm:pt>
+    <dgm:pt modelId="{207359FE-7FA6-42ED-8BEE-B78F61401ABC}" type="parTrans" cxnId="{F2456052-7D9C-4AA3-8AD2-C244AABB0140}">
+      <dgm:prSet/>
+      <dgm:spPr/>
+      <dgm:t>
+        <a:bodyPr/>
+        <a:lstStyle/>
+        <a:p>
+          <a:endParaRPr lang="fr-FR"/>
+        </a:p>
+      </dgm:t>
+    </dgm:pt>
+    <dgm:pt modelId="{B05C062E-C9B5-4284-B2AA-35E0C99B8478}" type="sibTrans" cxnId="{F2456052-7D9C-4AA3-8AD2-C244AABB0140}">
+      <dgm:prSet/>
+      <dgm:spPr/>
+      <dgm:t>
+        <a:bodyPr/>
+        <a:lstStyle/>
+        <a:p>
+          <a:endParaRPr lang="fr-FR"/>
+        </a:p>
+      </dgm:t>
+    </dgm:pt>
+    <dgm:pt modelId="{A29A1F2B-2871-4D83-8915-B48E7F70EBC9}">
+      <dgm:prSet phldrT="[Texte]"/>
+      <dgm:spPr/>
+      <dgm:t>
+        <a:bodyPr/>
+        <a:lstStyle/>
+        <a:p>
+          <a:r>
+            <a:rPr lang="fr-FR" dirty="0" err="1"/>
+            <a:t>Modelisation</a:t>
+          </a:r>
+          <a:endParaRPr lang="fr-FR" dirty="0"/>
+        </a:p>
+      </dgm:t>
+    </dgm:pt>
+    <dgm:pt modelId="{7843552D-BB74-4C2F-A8E8-462258E9545D}" type="parTrans" cxnId="{E674EB49-8F6E-4641-BFAE-B2DE1302C651}">
+      <dgm:prSet/>
+      <dgm:spPr/>
+      <dgm:t>
+        <a:bodyPr/>
+        <a:lstStyle/>
+        <a:p>
+          <a:endParaRPr lang="fr-FR"/>
+        </a:p>
+      </dgm:t>
+    </dgm:pt>
+    <dgm:pt modelId="{9A2E621D-850A-4753-B4E2-57C804F869B5}" type="sibTrans" cxnId="{E674EB49-8F6E-4641-BFAE-B2DE1302C651}">
+      <dgm:prSet/>
+      <dgm:spPr/>
+      <dgm:t>
+        <a:bodyPr/>
+        <a:lstStyle/>
+        <a:p>
+          <a:endParaRPr lang="fr-FR"/>
+        </a:p>
+      </dgm:t>
+    </dgm:pt>
+    <dgm:pt modelId="{3B5E53A2-2252-4B41-B676-2B5D0024BBC3}">
+      <dgm:prSet phldrT="[Texte]"/>
+      <dgm:spPr/>
+      <dgm:t>
+        <a:bodyPr/>
+        <a:lstStyle/>
+        <a:p>
+          <a:r>
+            <a:rPr lang="fr-FR" dirty="0" err="1"/>
+            <a:t>Linear</a:t>
+          </a:r>
+          <a:r>
+            <a:rPr lang="fr-FR" dirty="0"/>
+            <a:t> </a:t>
+          </a:r>
+          <a:r>
+            <a:rPr lang="fr-FR" dirty="0" err="1"/>
+            <a:t>Regression</a:t>
+          </a:r>
+          <a:endParaRPr lang="fr-FR" dirty="0"/>
+        </a:p>
+      </dgm:t>
+    </dgm:pt>
+    <dgm:pt modelId="{E1E66497-E8E2-4D55-90FC-C9DDDD98564C}" type="parTrans" cxnId="{A5C1531D-E04A-4611-9483-BDE46BD0843B}">
+      <dgm:prSet/>
+      <dgm:spPr/>
+      <dgm:t>
+        <a:bodyPr/>
+        <a:lstStyle/>
+        <a:p>
+          <a:endParaRPr lang="fr-FR"/>
+        </a:p>
+      </dgm:t>
+    </dgm:pt>
+    <dgm:pt modelId="{5736680B-9395-4B0A-87B7-8FE588CB4156}" type="sibTrans" cxnId="{A5C1531D-E04A-4611-9483-BDE46BD0843B}">
+      <dgm:prSet/>
+      <dgm:spPr/>
+      <dgm:t>
+        <a:bodyPr/>
+        <a:lstStyle/>
+        <a:p>
+          <a:endParaRPr lang="fr-FR"/>
+        </a:p>
+      </dgm:t>
+    </dgm:pt>
+    <dgm:pt modelId="{684E4FCB-BA2C-43FB-971E-E63B8187774A}">
+      <dgm:prSet phldrT="[Texte]"/>
+      <dgm:spPr/>
+      <dgm:t>
+        <a:bodyPr/>
+        <a:lstStyle/>
+        <a:p>
+          <a:r>
+            <a:rPr lang="fr-FR" dirty="0" err="1"/>
+            <a:t>What</a:t>
+          </a:r>
+          <a:r>
+            <a:rPr lang="fr-FR" dirty="0"/>
+            <a:t> </a:t>
+          </a:r>
+          <a:r>
+            <a:rPr lang="fr-FR" dirty="0" err="1"/>
+            <a:t>is</a:t>
+          </a:r>
+          <a:r>
+            <a:rPr lang="fr-FR" dirty="0"/>
+            <a:t> </a:t>
+          </a:r>
+          <a:r>
+            <a:rPr lang="fr-FR" dirty="0" err="1"/>
+            <a:t>available</a:t>
+          </a:r>
+          <a:r>
+            <a:rPr lang="fr-FR" dirty="0"/>
+            <a:t>?</a:t>
+          </a:r>
+        </a:p>
+      </dgm:t>
+    </dgm:pt>
+    <dgm:pt modelId="{461FAA88-ACA5-454D-AB7B-29EE1D731915}" type="parTrans" cxnId="{B34B3674-48FC-4D3A-B395-4893E06C0302}">
+      <dgm:prSet/>
+      <dgm:spPr/>
+      <dgm:t>
+        <a:bodyPr/>
+        <a:lstStyle/>
+        <a:p>
+          <a:endParaRPr lang="fr-FR"/>
+        </a:p>
+      </dgm:t>
+    </dgm:pt>
+    <dgm:pt modelId="{D6321424-4208-4CDA-9F35-7CC7C5002458}" type="sibTrans" cxnId="{B34B3674-48FC-4D3A-B395-4893E06C0302}">
+      <dgm:prSet/>
+      <dgm:spPr/>
+      <dgm:t>
+        <a:bodyPr/>
+        <a:lstStyle/>
+        <a:p>
+          <a:endParaRPr lang="fr-FR"/>
+        </a:p>
+      </dgm:t>
+    </dgm:pt>
+    <dgm:pt modelId="{4E02CEC6-83E0-4132-AA9A-93B404AE4A0F}">
+      <dgm:prSet phldrT="[Texte]"/>
+      <dgm:spPr/>
+      <dgm:t>
+        <a:bodyPr/>
+        <a:lstStyle/>
+        <a:p>
+          <a:r>
+            <a:rPr lang="fr-FR" dirty="0"/>
+            <a:t>Conclusion</a:t>
+          </a:r>
+        </a:p>
+      </dgm:t>
+    </dgm:pt>
+    <dgm:pt modelId="{FA8DF389-F70B-44FC-8522-FB13FA82E6AE}" type="parTrans" cxnId="{9B65FBA1-8D1C-465D-878E-6C085BA31AFB}">
+      <dgm:prSet/>
+      <dgm:spPr/>
+      <dgm:t>
+        <a:bodyPr/>
+        <a:lstStyle/>
+        <a:p>
+          <a:endParaRPr lang="fr-FR"/>
+        </a:p>
+      </dgm:t>
+    </dgm:pt>
+    <dgm:pt modelId="{94EBF6ED-5218-4CCE-95C4-640A039B50D5}" type="sibTrans" cxnId="{9B65FBA1-8D1C-465D-878E-6C085BA31AFB}">
+      <dgm:prSet/>
+      <dgm:spPr/>
+      <dgm:t>
+        <a:bodyPr/>
+        <a:lstStyle/>
+        <a:p>
+          <a:endParaRPr lang="fr-FR"/>
+        </a:p>
+      </dgm:t>
+    </dgm:pt>
+    <dgm:pt modelId="{0FAECC72-DE13-47F7-9479-7A2C4C508070}">
+      <dgm:prSet phldrT="[Texte]"/>
+      <dgm:spPr/>
+      <dgm:t>
+        <a:bodyPr/>
+        <a:lstStyle/>
+        <a:p>
+          <a:r>
+            <a:rPr lang="fr-FR" dirty="0" err="1"/>
+            <a:t>Cleaning</a:t>
+          </a:r>
+          <a:endParaRPr lang="fr-FR" dirty="0"/>
+        </a:p>
+      </dgm:t>
+    </dgm:pt>
+    <dgm:pt modelId="{9F15E4E1-4BD6-43F9-BAED-F83765E107B1}" type="parTrans" cxnId="{92190E8A-86E9-4E6F-895C-7E8C74FBC841}">
+      <dgm:prSet/>
+      <dgm:spPr/>
+      <dgm:t>
+        <a:bodyPr/>
+        <a:lstStyle/>
+        <a:p>
+          <a:endParaRPr lang="fr-FR"/>
+        </a:p>
+      </dgm:t>
+    </dgm:pt>
+    <dgm:pt modelId="{F92B907B-F5E0-493A-A493-E94455E068ED}" type="sibTrans" cxnId="{92190E8A-86E9-4E6F-895C-7E8C74FBC841}">
+      <dgm:prSet/>
+      <dgm:spPr/>
+      <dgm:t>
+        <a:bodyPr/>
+        <a:lstStyle/>
+        <a:p>
+          <a:endParaRPr lang="fr-FR"/>
+        </a:p>
+      </dgm:t>
+    </dgm:pt>
+    <dgm:pt modelId="{4507F6C0-302D-433C-8F0A-097805E7893A}">
+      <dgm:prSet phldrT="[Texte]"/>
+      <dgm:spPr/>
+      <dgm:t>
+        <a:bodyPr/>
+        <a:lstStyle/>
+        <a:p>
+          <a:r>
+            <a:rPr lang="fr-FR" dirty="0" err="1"/>
+            <a:t>Merging</a:t>
+          </a:r>
+          <a:endParaRPr lang="fr-FR" dirty="0"/>
+        </a:p>
+      </dgm:t>
+    </dgm:pt>
+    <dgm:pt modelId="{B8D9E2BF-5FF7-4113-BE81-1BF912736F26}" type="parTrans" cxnId="{F4AC1447-FA2B-41B2-AF5A-8D8EA139C89A}">
+      <dgm:prSet/>
+      <dgm:spPr/>
+      <dgm:t>
+        <a:bodyPr/>
+        <a:lstStyle/>
+        <a:p>
+          <a:endParaRPr lang="fr-FR"/>
+        </a:p>
+      </dgm:t>
+    </dgm:pt>
+    <dgm:pt modelId="{1C92349F-4256-435E-B92D-C2D8DEBB84ED}" type="sibTrans" cxnId="{F4AC1447-FA2B-41B2-AF5A-8D8EA139C89A}">
+      <dgm:prSet/>
+      <dgm:spPr/>
+      <dgm:t>
+        <a:bodyPr/>
+        <a:lstStyle/>
+        <a:p>
+          <a:endParaRPr lang="fr-FR"/>
+        </a:p>
+      </dgm:t>
+    </dgm:pt>
+    <dgm:pt modelId="{BB89F4A7-B439-4CB2-8612-999849DFDAF7}">
+      <dgm:prSet phldrT="[Texte]"/>
+      <dgm:spPr/>
+      <dgm:t>
+        <a:bodyPr/>
+        <a:lstStyle/>
+        <a:p>
+          <a:endParaRPr lang="fr-FR" dirty="0"/>
+        </a:p>
+      </dgm:t>
+    </dgm:pt>
+    <dgm:pt modelId="{B6A99A1A-B90D-4921-8390-842F1420DD03}" type="parTrans" cxnId="{DD868377-0B75-4329-84B4-3E831F8F0431}">
+      <dgm:prSet/>
+      <dgm:spPr/>
+      <dgm:t>
+        <a:bodyPr/>
+        <a:lstStyle/>
+        <a:p>
+          <a:endParaRPr lang="fr-FR"/>
+        </a:p>
+      </dgm:t>
+    </dgm:pt>
+    <dgm:pt modelId="{11463A23-5111-4D40-B577-6724BB4FF59D}" type="sibTrans" cxnId="{DD868377-0B75-4329-84B4-3E831F8F0431}">
+      <dgm:prSet/>
+      <dgm:spPr/>
+      <dgm:t>
+        <a:bodyPr/>
+        <a:lstStyle/>
+        <a:p>
+          <a:endParaRPr lang="fr-FR"/>
+        </a:p>
+      </dgm:t>
+    </dgm:pt>
+    <dgm:pt modelId="{CCEE202A-9C66-4B5B-9289-426BBFC462D0}">
+      <dgm:prSet phldrT="[Texte]"/>
+      <dgm:spPr/>
+      <dgm:t>
+        <a:bodyPr/>
+        <a:lstStyle/>
+        <a:p>
+          <a:r>
+            <a:rPr lang="fr-FR" dirty="0"/>
+            <a:t>Display Target</a:t>
+          </a:r>
+        </a:p>
+      </dgm:t>
+    </dgm:pt>
+    <dgm:pt modelId="{EF321253-5E6C-4880-A721-E67A72FBF07D}" type="parTrans" cxnId="{E0E0DAF5-0ADA-4A7F-8BFE-8D69E970BFCA}">
+      <dgm:prSet/>
+      <dgm:spPr/>
+      <dgm:t>
+        <a:bodyPr/>
+        <a:lstStyle/>
+        <a:p>
+          <a:endParaRPr lang="fr-FR"/>
+        </a:p>
+      </dgm:t>
+    </dgm:pt>
+    <dgm:pt modelId="{A5ADBA4C-D5D4-4B0B-90EF-1757F1F6F114}" type="sibTrans" cxnId="{E0E0DAF5-0ADA-4A7F-8BFE-8D69E970BFCA}">
+      <dgm:prSet/>
+      <dgm:spPr/>
+      <dgm:t>
+        <a:bodyPr/>
+        <a:lstStyle/>
+        <a:p>
+          <a:endParaRPr lang="fr-FR"/>
+        </a:p>
+      </dgm:t>
+    </dgm:pt>
+    <dgm:pt modelId="{323CE946-454B-4FC0-A452-1799607A768A}">
+      <dgm:prSet phldrT="[Texte]"/>
+      <dgm:spPr/>
+      <dgm:t>
+        <a:bodyPr/>
+        <a:lstStyle/>
+        <a:p>
+          <a:r>
+            <a:rPr lang="fr-FR" dirty="0" err="1"/>
+            <a:t>Meaning</a:t>
+          </a:r>
+          <a:r>
+            <a:rPr lang="fr-FR" dirty="0"/>
+            <a:t>?</a:t>
+          </a:r>
+        </a:p>
+      </dgm:t>
+    </dgm:pt>
+    <dgm:pt modelId="{D7F493F7-3514-476C-BDF8-F1F98284843A}" type="parTrans" cxnId="{84FAF4A0-0DC0-45DF-958D-42B379DB8E1C}">
+      <dgm:prSet/>
+      <dgm:spPr/>
+      <dgm:t>
+        <a:bodyPr/>
+        <a:lstStyle/>
+        <a:p>
+          <a:endParaRPr lang="fr-FR"/>
+        </a:p>
+      </dgm:t>
+    </dgm:pt>
+    <dgm:pt modelId="{E5D8E115-32DD-4858-A4D0-D0BCAD76B7EA}" type="sibTrans" cxnId="{84FAF4A0-0DC0-45DF-958D-42B379DB8E1C}">
+      <dgm:prSet/>
+      <dgm:spPr/>
+      <dgm:t>
+        <a:bodyPr/>
+        <a:lstStyle/>
+        <a:p>
+          <a:endParaRPr lang="fr-FR"/>
+        </a:p>
+      </dgm:t>
+    </dgm:pt>
+    <dgm:pt modelId="{A0314DAB-580D-45C4-BE6F-F0CCB9ED841F}">
+      <dgm:prSet phldrT="[Texte]"/>
+      <dgm:spPr/>
+      <dgm:t>
+        <a:bodyPr/>
+        <a:lstStyle/>
+        <a:p>
+          <a:r>
+            <a:rPr lang="fr-FR" dirty="0"/>
+            <a:t>…</a:t>
+          </a:r>
+        </a:p>
+      </dgm:t>
+    </dgm:pt>
+    <dgm:pt modelId="{B05EF502-46B9-4D4D-9370-A16ED432424A}" type="parTrans" cxnId="{C9CCDF14-C782-4D83-8C4A-FEE39ABDBE99}">
+      <dgm:prSet/>
+      <dgm:spPr/>
+      <dgm:t>
+        <a:bodyPr/>
+        <a:lstStyle/>
+        <a:p>
+          <a:endParaRPr lang="fr-FR"/>
+        </a:p>
+      </dgm:t>
+    </dgm:pt>
+    <dgm:pt modelId="{F5FD3321-5421-4954-B377-2BB1068DAA55}" type="sibTrans" cxnId="{C9CCDF14-C782-4D83-8C4A-FEE39ABDBE99}">
+      <dgm:prSet/>
+      <dgm:spPr/>
+      <dgm:t>
+        <a:bodyPr/>
+        <a:lstStyle/>
+        <a:p>
+          <a:endParaRPr lang="fr-FR"/>
+        </a:p>
+      </dgm:t>
+    </dgm:pt>
+    <dgm:pt modelId="{F8FD2C63-E51A-4C57-8FC5-195E28384400}">
+      <dgm:prSet phldrT="[Texte]"/>
+      <dgm:spPr/>
+      <dgm:t>
+        <a:bodyPr/>
+        <a:lstStyle/>
+        <a:p>
+          <a:r>
+            <a:rPr lang="fr-FR" dirty="0"/>
+            <a:t>…</a:t>
+          </a:r>
+        </a:p>
+      </dgm:t>
+    </dgm:pt>
+    <dgm:pt modelId="{34133AA0-53A9-4A88-826A-ADEE0CA49D7B}" type="parTrans" cxnId="{25BDBFA4-36E2-400F-B7D2-4C00910C89FD}">
+      <dgm:prSet/>
+      <dgm:spPr/>
+      <dgm:t>
+        <a:bodyPr/>
+        <a:lstStyle/>
+        <a:p>
+          <a:endParaRPr lang="fr-FR"/>
+        </a:p>
+      </dgm:t>
+    </dgm:pt>
+    <dgm:pt modelId="{EEB01222-7F4D-4521-8B47-A5FA64C519E2}" type="sibTrans" cxnId="{25BDBFA4-36E2-400F-B7D2-4C00910C89FD}">
+      <dgm:prSet/>
+      <dgm:spPr/>
+      <dgm:t>
+        <a:bodyPr/>
+        <a:lstStyle/>
+        <a:p>
+          <a:endParaRPr lang="fr-FR"/>
+        </a:p>
+      </dgm:t>
+    </dgm:pt>
+    <dgm:pt modelId="{C8583309-2BF5-4301-9858-FB10DA772249}">
+      <dgm:prSet phldrT="[Texte]"/>
+      <dgm:spPr/>
+      <dgm:t>
+        <a:bodyPr/>
+        <a:lstStyle/>
+        <a:p>
+          <a:r>
+            <a:rPr lang="fr-FR" dirty="0"/>
+            <a:t>…</a:t>
+          </a:r>
+        </a:p>
+      </dgm:t>
+    </dgm:pt>
+    <dgm:pt modelId="{DF556688-F5FA-4919-B50B-3D146505424D}" type="parTrans" cxnId="{67BE9AD7-DC50-4CAF-896B-129375B916ED}">
+      <dgm:prSet/>
+      <dgm:spPr/>
+      <dgm:t>
+        <a:bodyPr/>
+        <a:lstStyle/>
+        <a:p>
+          <a:endParaRPr lang="fr-FR"/>
+        </a:p>
+      </dgm:t>
+    </dgm:pt>
+    <dgm:pt modelId="{39935BEA-A6B1-4FE9-B63A-E583F6CEDD17}" type="sibTrans" cxnId="{67BE9AD7-DC50-4CAF-896B-129375B916ED}">
+      <dgm:prSet/>
+      <dgm:spPr/>
+      <dgm:t>
+        <a:bodyPr/>
+        <a:lstStyle/>
+        <a:p>
+          <a:endParaRPr lang="fr-FR"/>
+        </a:p>
+      </dgm:t>
+    </dgm:pt>
+    <dgm:pt modelId="{D420DDF6-6089-4CC8-AD51-4E779A3877D6}">
+      <dgm:prSet phldrT="[Texte]"/>
+      <dgm:spPr/>
+      <dgm:t>
+        <a:bodyPr/>
+        <a:lstStyle/>
+        <a:p>
+          <a:r>
+            <a:rPr lang="fr-FR" dirty="0"/>
+            <a:t>Download</a:t>
+          </a:r>
+        </a:p>
+      </dgm:t>
+    </dgm:pt>
+    <dgm:pt modelId="{E6AC31CB-682A-451B-A5C1-05FD5338405D}" type="parTrans" cxnId="{10EC01A3-2296-4803-9FAB-3ABEE118D762}">
+      <dgm:prSet/>
+      <dgm:spPr/>
+      <dgm:t>
+        <a:bodyPr/>
+        <a:lstStyle/>
+        <a:p>
+          <a:endParaRPr lang="fr-FR"/>
+        </a:p>
+      </dgm:t>
+    </dgm:pt>
+    <dgm:pt modelId="{0D9E158D-8CB6-4FA1-AF4C-31A50B9EEE87}" type="sibTrans" cxnId="{10EC01A3-2296-4803-9FAB-3ABEE118D762}">
+      <dgm:prSet/>
+      <dgm:spPr/>
+      <dgm:t>
+        <a:bodyPr/>
+        <a:lstStyle/>
+        <a:p>
+          <a:endParaRPr lang="fr-FR"/>
+        </a:p>
+      </dgm:t>
+    </dgm:pt>
+    <dgm:pt modelId="{A6CD5A5D-4746-4028-B83B-94DE3B56882F}">
+      <dgm:prSet phldrT="[Texte]"/>
+      <dgm:spPr/>
+      <dgm:t>
+        <a:bodyPr/>
+        <a:lstStyle/>
+        <a:p>
+          <a:r>
+            <a:rPr lang="fr-FR" dirty="0"/>
+            <a:t>More </a:t>
+          </a:r>
+          <a:r>
+            <a:rPr lang="fr-FR" dirty="0" err="1"/>
+            <a:t>cleaning</a:t>
+          </a:r>
+          <a:r>
+            <a:rPr lang="fr-FR" dirty="0"/>
+            <a:t>?</a:t>
+          </a:r>
+        </a:p>
+      </dgm:t>
+    </dgm:pt>
+    <dgm:pt modelId="{91868FCC-E226-4F51-87FB-D00F697B4393}" type="parTrans" cxnId="{F8B77042-7A47-4267-8788-5AD1C8F2F342}">
+      <dgm:prSet/>
+      <dgm:spPr/>
+      <dgm:t>
+        <a:bodyPr/>
+        <a:lstStyle/>
+        <a:p>
+          <a:endParaRPr lang="fr-FR"/>
+        </a:p>
+      </dgm:t>
+    </dgm:pt>
+    <dgm:pt modelId="{AD7CF910-8ECE-4376-8C90-50DDE4926528}" type="sibTrans" cxnId="{F8B77042-7A47-4267-8788-5AD1C8F2F342}">
+      <dgm:prSet/>
+      <dgm:spPr/>
+      <dgm:t>
+        <a:bodyPr/>
+        <a:lstStyle/>
+        <a:p>
+          <a:endParaRPr lang="fr-FR"/>
+        </a:p>
+      </dgm:t>
+    </dgm:pt>
+    <dgm:pt modelId="{D3EA6D0A-AE1D-437A-B25F-2CBC6D782E09}" type="pres">
+      <dgm:prSet presAssocID="{0B2884A8-C61A-47E0-88A0-4B991582B611}" presName="Name0" presStyleCnt="0">
+        <dgm:presLayoutVars>
+          <dgm:dir/>
+          <dgm:animLvl val="lvl"/>
+          <dgm:resizeHandles val="exact"/>
+        </dgm:presLayoutVars>
+      </dgm:prSet>
+      <dgm:spPr/>
+    </dgm:pt>
+    <dgm:pt modelId="{A8B60FC1-D798-4694-BD6A-660ED8082F5A}" type="pres">
+      <dgm:prSet presAssocID="{0469192A-6BB4-43FF-ABAD-AECC7A555A59}" presName="composite" presStyleCnt="0"/>
+      <dgm:spPr/>
+    </dgm:pt>
+    <dgm:pt modelId="{E8B05688-E45A-4ABA-AA71-0A072B8680B5}" type="pres">
+      <dgm:prSet presAssocID="{0469192A-6BB4-43FF-ABAD-AECC7A555A59}" presName="parTx" presStyleLbl="node1" presStyleIdx="0" presStyleCnt="5">
+        <dgm:presLayoutVars>
+          <dgm:chMax val="0"/>
+          <dgm:chPref val="0"/>
+          <dgm:bulletEnabled val="1"/>
+        </dgm:presLayoutVars>
+      </dgm:prSet>
+      <dgm:spPr/>
+    </dgm:pt>
+    <dgm:pt modelId="{D42188D5-C3DE-45DB-A634-05ADFE28CD04}" type="pres">
+      <dgm:prSet presAssocID="{0469192A-6BB4-43FF-ABAD-AECC7A555A59}" presName="desTx" presStyleLbl="revTx" presStyleIdx="0" presStyleCnt="4">
+        <dgm:presLayoutVars>
+          <dgm:bulletEnabled val="1"/>
+        </dgm:presLayoutVars>
+      </dgm:prSet>
+      <dgm:spPr/>
+    </dgm:pt>
+    <dgm:pt modelId="{08C0D104-5104-48C8-8EB1-1E4EB650B10C}" type="pres">
+      <dgm:prSet presAssocID="{4C557C1E-EBD2-4E39-AA1A-AA26769CEC3F}" presName="space" presStyleCnt="0"/>
+      <dgm:spPr/>
+    </dgm:pt>
+    <dgm:pt modelId="{9875E8CF-687B-4BAD-9B1E-A3D0734ECF80}" type="pres">
+      <dgm:prSet presAssocID="{B2010812-3CC0-4CD4-8F83-87CA8F2F7BDD}" presName="composite" presStyleCnt="0"/>
+      <dgm:spPr/>
+    </dgm:pt>
+    <dgm:pt modelId="{4673DFFF-1970-42D4-8886-B4F6928D42BF}" type="pres">
+      <dgm:prSet presAssocID="{B2010812-3CC0-4CD4-8F83-87CA8F2F7BDD}" presName="parTx" presStyleLbl="node1" presStyleIdx="1" presStyleCnt="5">
+        <dgm:presLayoutVars>
+          <dgm:chMax val="0"/>
+          <dgm:chPref val="0"/>
+          <dgm:bulletEnabled val="1"/>
+        </dgm:presLayoutVars>
+      </dgm:prSet>
+      <dgm:spPr/>
+    </dgm:pt>
+    <dgm:pt modelId="{39665076-877C-47BE-B9B3-4C18571A7925}" type="pres">
+      <dgm:prSet presAssocID="{B2010812-3CC0-4CD4-8F83-87CA8F2F7BDD}" presName="desTx" presStyleLbl="revTx" presStyleIdx="1" presStyleCnt="4">
+        <dgm:presLayoutVars>
+          <dgm:bulletEnabled val="1"/>
+        </dgm:presLayoutVars>
+      </dgm:prSet>
+      <dgm:spPr/>
+    </dgm:pt>
+    <dgm:pt modelId="{24309624-87A2-4F8B-B60C-7547DC10FD2C}" type="pres">
+      <dgm:prSet presAssocID="{E3ECF18C-5EFB-4850-B5B9-1BBCB877A2B7}" presName="space" presStyleCnt="0"/>
+      <dgm:spPr/>
+    </dgm:pt>
+    <dgm:pt modelId="{11382A30-4787-46B9-88BB-C1F953FC5BCF}" type="pres">
+      <dgm:prSet presAssocID="{2A38525C-7F37-4518-8BA5-C09B709FFF33}" presName="composite" presStyleCnt="0"/>
+      <dgm:spPr/>
+    </dgm:pt>
+    <dgm:pt modelId="{D88BBE5E-62D0-4ADD-9C87-24E9A1FA1376}" type="pres">
+      <dgm:prSet presAssocID="{2A38525C-7F37-4518-8BA5-C09B709FFF33}" presName="parTx" presStyleLbl="node1" presStyleIdx="2" presStyleCnt="5">
+        <dgm:presLayoutVars>
+          <dgm:chMax val="0"/>
+          <dgm:chPref val="0"/>
+          <dgm:bulletEnabled val="1"/>
+        </dgm:presLayoutVars>
+      </dgm:prSet>
+      <dgm:spPr/>
+    </dgm:pt>
+    <dgm:pt modelId="{6EF91DAC-DE5C-4625-ADB0-5107187D9866}" type="pres">
+      <dgm:prSet presAssocID="{2A38525C-7F37-4518-8BA5-C09B709FFF33}" presName="desTx" presStyleLbl="revTx" presStyleIdx="2" presStyleCnt="4">
+        <dgm:presLayoutVars>
+          <dgm:bulletEnabled val="1"/>
+        </dgm:presLayoutVars>
+      </dgm:prSet>
+      <dgm:spPr/>
+    </dgm:pt>
+    <dgm:pt modelId="{5DE8E1D1-7041-45CB-9AE8-FA529C320A5E}" type="pres">
+      <dgm:prSet presAssocID="{B05C062E-C9B5-4284-B2AA-35E0C99B8478}" presName="space" presStyleCnt="0"/>
+      <dgm:spPr/>
+    </dgm:pt>
+    <dgm:pt modelId="{677B109F-1F2B-46C2-AC1A-74B1CB113D73}" type="pres">
+      <dgm:prSet presAssocID="{A29A1F2B-2871-4D83-8915-B48E7F70EBC9}" presName="composite" presStyleCnt="0"/>
+      <dgm:spPr/>
+    </dgm:pt>
+    <dgm:pt modelId="{F42DC3AA-E258-43BE-9DB5-EEF0C25D47E5}" type="pres">
+      <dgm:prSet presAssocID="{A29A1F2B-2871-4D83-8915-B48E7F70EBC9}" presName="parTx" presStyleLbl="node1" presStyleIdx="3" presStyleCnt="5">
+        <dgm:presLayoutVars>
+          <dgm:chMax val="0"/>
+          <dgm:chPref val="0"/>
+          <dgm:bulletEnabled val="1"/>
+        </dgm:presLayoutVars>
+      </dgm:prSet>
+      <dgm:spPr/>
+    </dgm:pt>
+    <dgm:pt modelId="{1D1C9062-AB8E-43CC-98BC-5B98F04119F3}" type="pres">
+      <dgm:prSet presAssocID="{A29A1F2B-2871-4D83-8915-B48E7F70EBC9}" presName="desTx" presStyleLbl="revTx" presStyleIdx="3" presStyleCnt="4">
+        <dgm:presLayoutVars>
+          <dgm:bulletEnabled val="1"/>
+        </dgm:presLayoutVars>
+      </dgm:prSet>
+      <dgm:spPr/>
+    </dgm:pt>
+    <dgm:pt modelId="{3019D30F-ACE1-45C0-8E78-5B86120CC2B6}" type="pres">
+      <dgm:prSet presAssocID="{9A2E621D-850A-4753-B4E2-57C804F869B5}" presName="space" presStyleCnt="0"/>
+      <dgm:spPr/>
+    </dgm:pt>
+    <dgm:pt modelId="{91FCAE87-C315-4AA4-B123-0BA7400C9BC4}" type="pres">
+      <dgm:prSet presAssocID="{4E02CEC6-83E0-4132-AA9A-93B404AE4A0F}" presName="composite" presStyleCnt="0"/>
+      <dgm:spPr/>
+    </dgm:pt>
+    <dgm:pt modelId="{468266D3-BD30-4DDF-9F9D-9A63974A7711}" type="pres">
+      <dgm:prSet presAssocID="{4E02CEC6-83E0-4132-AA9A-93B404AE4A0F}" presName="parTx" presStyleLbl="node1" presStyleIdx="4" presStyleCnt="5">
+        <dgm:presLayoutVars>
+          <dgm:chMax val="0"/>
+          <dgm:chPref val="0"/>
+          <dgm:bulletEnabled val="1"/>
+        </dgm:presLayoutVars>
+      </dgm:prSet>
+      <dgm:spPr/>
+    </dgm:pt>
+    <dgm:pt modelId="{2DCE491B-9046-4E18-8AEA-8C5B4C6502E4}" type="pres">
+      <dgm:prSet presAssocID="{4E02CEC6-83E0-4132-AA9A-93B404AE4A0F}" presName="desTx" presStyleLbl="revTx" presStyleIdx="3" presStyleCnt="4">
+        <dgm:presLayoutVars>
+          <dgm:bulletEnabled val="1"/>
+        </dgm:presLayoutVars>
+      </dgm:prSet>
+      <dgm:spPr/>
+    </dgm:pt>
+  </dgm:ptLst>
+  <dgm:cxnLst>
+    <dgm:cxn modelId="{C9CCDF14-C782-4D83-8C4A-FEE39ABDBE99}" srcId="{B2010812-3CC0-4CD4-8F83-87CA8F2F7BDD}" destId="{A0314DAB-580D-45C4-BE6F-F0CCB9ED841F}" srcOrd="2" destOrd="0" parTransId="{B05EF502-46B9-4D4D-9370-A16ED432424A}" sibTransId="{F5FD3321-5421-4954-B377-2BB1068DAA55}"/>
+    <dgm:cxn modelId="{A5C1531D-E04A-4611-9483-BDE46BD0843B}" srcId="{A29A1F2B-2871-4D83-8915-B48E7F70EBC9}" destId="{3B5E53A2-2252-4B41-B676-2B5D0024BBC3}" srcOrd="0" destOrd="0" parTransId="{E1E66497-E8E2-4D55-90FC-C9DDDD98564C}" sibTransId="{5736680B-9395-4B0A-87B7-8FE588CB4156}"/>
+    <dgm:cxn modelId="{80628124-14F7-4B2D-98D1-3E59B4FF979C}" type="presOf" srcId="{D420DDF6-6089-4CC8-AD51-4E779A3877D6}" destId="{D42188D5-C3DE-45DB-A634-05ADFE28CD04}" srcOrd="0" destOrd="0" presId="urn:microsoft.com/office/officeart/2005/8/layout/chevron1"/>
+    <dgm:cxn modelId="{538B9E27-8995-421E-8A3B-212E057D8CF9}" type="presOf" srcId="{BB89F4A7-B439-4CB2-8612-999849DFDAF7}" destId="{39665076-877C-47BE-B9B3-4C18571A7925}" srcOrd="0" destOrd="3" presId="urn:microsoft.com/office/officeart/2005/8/layout/chevron1"/>
+    <dgm:cxn modelId="{9A002231-5F20-4E6A-A938-25DD2B2E372F}" srcId="{0B2884A8-C61A-47E0-88A0-4B991582B611}" destId="{0469192A-6BB4-43FF-ABAD-AECC7A555A59}" srcOrd="0" destOrd="0" parTransId="{62C49693-A8A9-4E4A-9AF1-30DFB784115D}" sibTransId="{4C557C1E-EBD2-4E39-AA1A-AA26769CEC3F}"/>
+    <dgm:cxn modelId="{0D6A475C-FFD2-493E-92EE-781E9F33F336}" type="presOf" srcId="{4E02CEC6-83E0-4132-AA9A-93B404AE4A0F}" destId="{468266D3-BD30-4DDF-9F9D-9A63974A7711}" srcOrd="0" destOrd="0" presId="urn:microsoft.com/office/officeart/2005/8/layout/chevron1"/>
+    <dgm:cxn modelId="{F8B77042-7A47-4267-8788-5AD1C8F2F342}" srcId="{2A38525C-7F37-4518-8BA5-C09B709FFF33}" destId="{A6CD5A5D-4746-4028-B83B-94DE3B56882F}" srcOrd="2" destOrd="0" parTransId="{91868FCC-E226-4F51-87FB-D00F697B4393}" sibTransId="{AD7CF910-8ECE-4376-8C90-50DDE4926528}"/>
+    <dgm:cxn modelId="{F4AC1447-FA2B-41B2-AF5A-8D8EA139C89A}" srcId="{B2010812-3CC0-4CD4-8F83-87CA8F2F7BDD}" destId="{4507F6C0-302D-433C-8F0A-097805E7893A}" srcOrd="1" destOrd="0" parTransId="{B8D9E2BF-5FF7-4113-BE81-1BF912736F26}" sibTransId="{1C92349F-4256-435E-B92D-C2D8DEBB84ED}"/>
+    <dgm:cxn modelId="{E563BD49-404A-4AB9-93F9-038780C8E2D6}" type="presOf" srcId="{4507F6C0-302D-433C-8F0A-097805E7893A}" destId="{39665076-877C-47BE-B9B3-4C18571A7925}" srcOrd="0" destOrd="1" presId="urn:microsoft.com/office/officeart/2005/8/layout/chevron1"/>
+    <dgm:cxn modelId="{E674EB49-8F6E-4641-BFAE-B2DE1302C651}" srcId="{0B2884A8-C61A-47E0-88A0-4B991582B611}" destId="{A29A1F2B-2871-4D83-8915-B48E7F70EBC9}" srcOrd="3" destOrd="0" parTransId="{7843552D-BB74-4C2F-A8E8-462258E9545D}" sibTransId="{9A2E621D-850A-4753-B4E2-57C804F869B5}"/>
+    <dgm:cxn modelId="{F2456052-7D9C-4AA3-8AD2-C244AABB0140}" srcId="{0B2884A8-C61A-47E0-88A0-4B991582B611}" destId="{2A38525C-7F37-4518-8BA5-C09B709FFF33}" srcOrd="2" destOrd="0" parTransId="{207359FE-7FA6-42ED-8BEE-B78F61401ABC}" sibTransId="{B05C062E-C9B5-4284-B2AA-35E0C99B8478}"/>
+    <dgm:cxn modelId="{B34B3674-48FC-4D3A-B395-4893E06C0302}" srcId="{2A38525C-7F37-4518-8BA5-C09B709FFF33}" destId="{684E4FCB-BA2C-43FB-971E-E63B8187774A}" srcOrd="0" destOrd="0" parTransId="{461FAA88-ACA5-454D-AB7B-29EE1D731915}" sibTransId="{D6321424-4208-4CDA-9F35-7CC7C5002458}"/>
+    <dgm:cxn modelId="{DD868377-0B75-4329-84B4-3E831F8F0431}" srcId="{B2010812-3CC0-4CD4-8F83-87CA8F2F7BDD}" destId="{BB89F4A7-B439-4CB2-8612-999849DFDAF7}" srcOrd="3" destOrd="0" parTransId="{B6A99A1A-B90D-4921-8390-842F1420DD03}" sibTransId="{11463A23-5111-4D40-B577-6724BB4FF59D}"/>
+    <dgm:cxn modelId="{6D9DAC80-8E02-4652-ABD8-F6109876F8A9}" type="presOf" srcId="{CCEE202A-9C66-4B5B-9289-426BBFC462D0}" destId="{6EF91DAC-DE5C-4625-ADB0-5107187D9866}" srcOrd="0" destOrd="3" presId="urn:microsoft.com/office/officeart/2005/8/layout/chevron1"/>
+    <dgm:cxn modelId="{24126287-64D3-4624-BB08-33911215770B}" type="presOf" srcId="{0469192A-6BB4-43FF-ABAD-AECC7A555A59}" destId="{E8B05688-E45A-4ABA-AA71-0A072B8680B5}" srcOrd="0" destOrd="0" presId="urn:microsoft.com/office/officeart/2005/8/layout/chevron1"/>
+    <dgm:cxn modelId="{92190E8A-86E9-4E6F-895C-7E8C74FBC841}" srcId="{B2010812-3CC0-4CD4-8F83-87CA8F2F7BDD}" destId="{0FAECC72-DE13-47F7-9479-7A2C4C508070}" srcOrd="0" destOrd="0" parTransId="{9F15E4E1-4BD6-43F9-BAED-F83765E107B1}" sibTransId="{F92B907B-F5E0-493A-A493-E94455E068ED}"/>
+    <dgm:cxn modelId="{C5A09C95-CA01-4090-99E4-9C6352C02EED}" type="presOf" srcId="{0B2884A8-C61A-47E0-88A0-4B991582B611}" destId="{D3EA6D0A-AE1D-437A-B25F-2CBC6D782E09}" srcOrd="0" destOrd="0" presId="urn:microsoft.com/office/officeart/2005/8/layout/chevron1"/>
+    <dgm:cxn modelId="{84FAF4A0-0DC0-45DF-958D-42B379DB8E1C}" srcId="{2A38525C-7F37-4518-8BA5-C09B709FFF33}" destId="{323CE946-454B-4FC0-A452-1799607A768A}" srcOrd="1" destOrd="0" parTransId="{D7F493F7-3514-476C-BDF8-F1F98284843A}" sibTransId="{E5D8E115-32DD-4858-A4D0-D0BCAD76B7EA}"/>
+    <dgm:cxn modelId="{9B65FBA1-8D1C-465D-878E-6C085BA31AFB}" srcId="{0B2884A8-C61A-47E0-88A0-4B991582B611}" destId="{4E02CEC6-83E0-4132-AA9A-93B404AE4A0F}" srcOrd="4" destOrd="0" parTransId="{FA8DF389-F70B-44FC-8522-FB13FA82E6AE}" sibTransId="{94EBF6ED-5218-4CCE-95C4-640A039B50D5}"/>
+    <dgm:cxn modelId="{10EC01A3-2296-4803-9FAB-3ABEE118D762}" srcId="{0469192A-6BB4-43FF-ABAD-AECC7A555A59}" destId="{D420DDF6-6089-4CC8-AD51-4E779A3877D6}" srcOrd="0" destOrd="0" parTransId="{E6AC31CB-682A-451B-A5C1-05FD5338405D}" sibTransId="{0D9E158D-8CB6-4FA1-AF4C-31A50B9EEE87}"/>
+    <dgm:cxn modelId="{25BDBFA4-36E2-400F-B7D2-4C00910C89FD}" srcId="{2A38525C-7F37-4518-8BA5-C09B709FFF33}" destId="{F8FD2C63-E51A-4C57-8FC5-195E28384400}" srcOrd="4" destOrd="0" parTransId="{34133AA0-53A9-4A88-826A-ADEE0CA49D7B}" sibTransId="{EEB01222-7F4D-4521-8B47-A5FA64C519E2}"/>
+    <dgm:cxn modelId="{029093A6-3679-414D-9FB7-D3F6A4AB2F5A}" type="presOf" srcId="{684E4FCB-BA2C-43FB-971E-E63B8187774A}" destId="{6EF91DAC-DE5C-4625-ADB0-5107187D9866}" srcOrd="0" destOrd="0" presId="urn:microsoft.com/office/officeart/2005/8/layout/chevron1"/>
+    <dgm:cxn modelId="{FCB220AA-33CC-4A32-9765-E12C247DB516}" type="presOf" srcId="{A29A1F2B-2871-4D83-8915-B48E7F70EBC9}" destId="{F42DC3AA-E258-43BE-9DB5-EEF0C25D47E5}" srcOrd="0" destOrd="0" presId="urn:microsoft.com/office/officeart/2005/8/layout/chevron1"/>
+    <dgm:cxn modelId="{0E6AB5B0-948E-41F4-9D48-99E1A0C1E7ED}" type="presOf" srcId="{3B5E53A2-2252-4B41-B676-2B5D0024BBC3}" destId="{1D1C9062-AB8E-43CC-98BC-5B98F04119F3}" srcOrd="0" destOrd="0" presId="urn:microsoft.com/office/officeart/2005/8/layout/chevron1"/>
+    <dgm:cxn modelId="{0E2002B6-1FE9-49D9-8754-B366D3A20265}" srcId="{0B2884A8-C61A-47E0-88A0-4B991582B611}" destId="{B2010812-3CC0-4CD4-8F83-87CA8F2F7BDD}" srcOrd="1" destOrd="0" parTransId="{A067CC6F-6678-406F-941D-9CCFD1CAB818}" sibTransId="{E3ECF18C-5EFB-4850-B5B9-1BBCB877A2B7}"/>
+    <dgm:cxn modelId="{CC1596BD-66E4-4A99-9624-48120E8FBB37}" type="presOf" srcId="{2A38525C-7F37-4518-8BA5-C09B709FFF33}" destId="{D88BBE5E-62D0-4ADD-9C87-24E9A1FA1376}" srcOrd="0" destOrd="0" presId="urn:microsoft.com/office/officeart/2005/8/layout/chevron1"/>
+    <dgm:cxn modelId="{859139C1-BC94-42AA-8A0E-8A6BB0B2E29E}" type="presOf" srcId="{0FAECC72-DE13-47F7-9479-7A2C4C508070}" destId="{39665076-877C-47BE-B9B3-4C18571A7925}" srcOrd="0" destOrd="0" presId="urn:microsoft.com/office/officeart/2005/8/layout/chevron1"/>
+    <dgm:cxn modelId="{AF3AC7C7-F2BA-4F6A-B122-F6BFBC0E00FB}" type="presOf" srcId="{A0314DAB-580D-45C4-BE6F-F0CCB9ED841F}" destId="{39665076-877C-47BE-B9B3-4C18571A7925}" srcOrd="0" destOrd="2" presId="urn:microsoft.com/office/officeart/2005/8/layout/chevron1"/>
+    <dgm:cxn modelId="{67BE9AD7-DC50-4CAF-896B-129375B916ED}" srcId="{A29A1F2B-2871-4D83-8915-B48E7F70EBC9}" destId="{C8583309-2BF5-4301-9858-FB10DA772249}" srcOrd="1" destOrd="0" parTransId="{DF556688-F5FA-4919-B50B-3D146505424D}" sibTransId="{39935BEA-A6B1-4FE9-B63A-E583F6CEDD17}"/>
+    <dgm:cxn modelId="{2BBA67D8-A7F9-4E6A-AFE8-1CCDDD775E5D}" type="presOf" srcId="{B2010812-3CC0-4CD4-8F83-87CA8F2F7BDD}" destId="{4673DFFF-1970-42D4-8886-B4F6928D42BF}" srcOrd="0" destOrd="0" presId="urn:microsoft.com/office/officeart/2005/8/layout/chevron1"/>
+    <dgm:cxn modelId="{CAE913E4-3965-432C-A34E-10B474AABCDA}" type="presOf" srcId="{323CE946-454B-4FC0-A452-1799607A768A}" destId="{6EF91DAC-DE5C-4625-ADB0-5107187D9866}" srcOrd="0" destOrd="1" presId="urn:microsoft.com/office/officeart/2005/8/layout/chevron1"/>
+    <dgm:cxn modelId="{3B6933E9-389B-4FD2-A9D8-E9905F15970B}" type="presOf" srcId="{C8583309-2BF5-4301-9858-FB10DA772249}" destId="{1D1C9062-AB8E-43CC-98BC-5B98F04119F3}" srcOrd="0" destOrd="1" presId="urn:microsoft.com/office/officeart/2005/8/layout/chevron1"/>
+    <dgm:cxn modelId="{E8D49EED-2B6C-4C4A-A332-41A288953F1C}" type="presOf" srcId="{F8FD2C63-E51A-4C57-8FC5-195E28384400}" destId="{6EF91DAC-DE5C-4625-ADB0-5107187D9866}" srcOrd="0" destOrd="4" presId="urn:microsoft.com/office/officeart/2005/8/layout/chevron1"/>
+    <dgm:cxn modelId="{E0E0DAF5-0ADA-4A7F-8BFE-8D69E970BFCA}" srcId="{2A38525C-7F37-4518-8BA5-C09B709FFF33}" destId="{CCEE202A-9C66-4B5B-9289-426BBFC462D0}" srcOrd="3" destOrd="0" parTransId="{EF321253-5E6C-4880-A721-E67A72FBF07D}" sibTransId="{A5ADBA4C-D5D4-4B0B-90EF-1757F1F6F114}"/>
+    <dgm:cxn modelId="{6B9800F6-E708-4B89-912C-4678A6DB22C3}" type="presOf" srcId="{A6CD5A5D-4746-4028-B83B-94DE3B56882F}" destId="{6EF91DAC-DE5C-4625-ADB0-5107187D9866}" srcOrd="0" destOrd="2" presId="urn:microsoft.com/office/officeart/2005/8/layout/chevron1"/>
+    <dgm:cxn modelId="{CF983C9D-0C0A-49BD-92CD-A395CF65C1E4}" type="presParOf" srcId="{D3EA6D0A-AE1D-437A-B25F-2CBC6D782E09}" destId="{A8B60FC1-D798-4694-BD6A-660ED8082F5A}" srcOrd="0" destOrd="0" presId="urn:microsoft.com/office/officeart/2005/8/layout/chevron1"/>
+    <dgm:cxn modelId="{5AFFD073-ADB8-4DC2-87BD-C67D01CC501C}" type="presParOf" srcId="{A8B60FC1-D798-4694-BD6A-660ED8082F5A}" destId="{E8B05688-E45A-4ABA-AA71-0A072B8680B5}" srcOrd="0" destOrd="0" presId="urn:microsoft.com/office/officeart/2005/8/layout/chevron1"/>
+    <dgm:cxn modelId="{51286768-A378-4FFB-B726-8F4673BD261A}" type="presParOf" srcId="{A8B60FC1-D798-4694-BD6A-660ED8082F5A}" destId="{D42188D5-C3DE-45DB-A634-05ADFE28CD04}" srcOrd="1" destOrd="0" presId="urn:microsoft.com/office/officeart/2005/8/layout/chevron1"/>
+    <dgm:cxn modelId="{7ADECF4C-4AEF-43C2-96C3-B50B9898DBD4}" type="presParOf" srcId="{D3EA6D0A-AE1D-437A-B25F-2CBC6D782E09}" destId="{08C0D104-5104-48C8-8EB1-1E4EB650B10C}" srcOrd="1" destOrd="0" presId="urn:microsoft.com/office/officeart/2005/8/layout/chevron1"/>
+    <dgm:cxn modelId="{F65347CD-41A8-40EF-8EE9-455575537FA0}" type="presParOf" srcId="{D3EA6D0A-AE1D-437A-B25F-2CBC6D782E09}" destId="{9875E8CF-687B-4BAD-9B1E-A3D0734ECF80}" srcOrd="2" destOrd="0" presId="urn:microsoft.com/office/officeart/2005/8/layout/chevron1"/>
+    <dgm:cxn modelId="{9884E71C-BDE8-410A-9FC0-B37DE03B7515}" type="presParOf" srcId="{9875E8CF-687B-4BAD-9B1E-A3D0734ECF80}" destId="{4673DFFF-1970-42D4-8886-B4F6928D42BF}" srcOrd="0" destOrd="0" presId="urn:microsoft.com/office/officeart/2005/8/layout/chevron1"/>
+    <dgm:cxn modelId="{1E656B0E-C259-4F0D-A018-448D01CFFE09}" type="presParOf" srcId="{9875E8CF-687B-4BAD-9B1E-A3D0734ECF80}" destId="{39665076-877C-47BE-B9B3-4C18571A7925}" srcOrd="1" destOrd="0" presId="urn:microsoft.com/office/officeart/2005/8/layout/chevron1"/>
+    <dgm:cxn modelId="{1F939D30-7F27-4859-9D28-152E1E10FC64}" type="presParOf" srcId="{D3EA6D0A-AE1D-437A-B25F-2CBC6D782E09}" destId="{24309624-87A2-4F8B-B60C-7547DC10FD2C}" srcOrd="3" destOrd="0" presId="urn:microsoft.com/office/officeart/2005/8/layout/chevron1"/>
+    <dgm:cxn modelId="{27C5D062-4F70-41FA-859E-7929A148FBA4}" type="presParOf" srcId="{D3EA6D0A-AE1D-437A-B25F-2CBC6D782E09}" destId="{11382A30-4787-46B9-88BB-C1F953FC5BCF}" srcOrd="4" destOrd="0" presId="urn:microsoft.com/office/officeart/2005/8/layout/chevron1"/>
+    <dgm:cxn modelId="{EDB09F9C-36BB-4804-852C-0E0D76C98B49}" type="presParOf" srcId="{11382A30-4787-46B9-88BB-C1F953FC5BCF}" destId="{D88BBE5E-62D0-4ADD-9C87-24E9A1FA1376}" srcOrd="0" destOrd="0" presId="urn:microsoft.com/office/officeart/2005/8/layout/chevron1"/>
+    <dgm:cxn modelId="{AE1C2234-BF15-4DB7-8AE9-AF93C15B8CD1}" type="presParOf" srcId="{11382A30-4787-46B9-88BB-C1F953FC5BCF}" destId="{6EF91DAC-DE5C-4625-ADB0-5107187D9866}" srcOrd="1" destOrd="0" presId="urn:microsoft.com/office/officeart/2005/8/layout/chevron1"/>
+    <dgm:cxn modelId="{5560E06B-981F-4E56-859F-6FC84FF14390}" type="presParOf" srcId="{D3EA6D0A-AE1D-437A-B25F-2CBC6D782E09}" destId="{5DE8E1D1-7041-45CB-9AE8-FA529C320A5E}" srcOrd="5" destOrd="0" presId="urn:microsoft.com/office/officeart/2005/8/layout/chevron1"/>
+    <dgm:cxn modelId="{A282138E-4A1F-4C0F-9DC1-3025BA8D1BB1}" type="presParOf" srcId="{D3EA6D0A-AE1D-437A-B25F-2CBC6D782E09}" destId="{677B109F-1F2B-46C2-AC1A-74B1CB113D73}" srcOrd="6" destOrd="0" presId="urn:microsoft.com/office/officeart/2005/8/layout/chevron1"/>
+    <dgm:cxn modelId="{3A381216-27F2-4E7C-90A2-8F7587420D2D}" type="presParOf" srcId="{677B109F-1F2B-46C2-AC1A-74B1CB113D73}" destId="{F42DC3AA-E258-43BE-9DB5-EEF0C25D47E5}" srcOrd="0" destOrd="0" presId="urn:microsoft.com/office/officeart/2005/8/layout/chevron1"/>
+    <dgm:cxn modelId="{48F37752-6BE0-4BF2-A027-2E7EF81146BB}" type="presParOf" srcId="{677B109F-1F2B-46C2-AC1A-74B1CB113D73}" destId="{1D1C9062-AB8E-43CC-98BC-5B98F04119F3}" srcOrd="1" destOrd="0" presId="urn:microsoft.com/office/officeart/2005/8/layout/chevron1"/>
+    <dgm:cxn modelId="{C6A8D20F-349B-4DF8-B448-17F2BC19C6CE}" type="presParOf" srcId="{D3EA6D0A-AE1D-437A-B25F-2CBC6D782E09}" destId="{3019D30F-ACE1-45C0-8E78-5B86120CC2B6}" srcOrd="7" destOrd="0" presId="urn:microsoft.com/office/officeart/2005/8/layout/chevron1"/>
+    <dgm:cxn modelId="{F09CE41D-F0FF-4EAE-B97C-732EDD47859A}" type="presParOf" srcId="{D3EA6D0A-AE1D-437A-B25F-2CBC6D782E09}" destId="{91FCAE87-C315-4AA4-B123-0BA7400C9BC4}" srcOrd="8" destOrd="0" presId="urn:microsoft.com/office/officeart/2005/8/layout/chevron1"/>
+    <dgm:cxn modelId="{25F79BD8-F3B4-49AD-A636-CDD2288352FD}" type="presParOf" srcId="{91FCAE87-C315-4AA4-B123-0BA7400C9BC4}" destId="{468266D3-BD30-4DDF-9F9D-9A63974A7711}" srcOrd="0" destOrd="0" presId="urn:microsoft.com/office/officeart/2005/8/layout/chevron1"/>
+    <dgm:cxn modelId="{AEABDCF8-1DB6-4DFD-9582-E751EC550C96}" type="presParOf" srcId="{91FCAE87-C315-4AA4-B123-0BA7400C9BC4}" destId="{2DCE491B-9046-4E18-8AEA-8C5B4C6502E4}" srcOrd="1" destOrd="0" presId="urn:microsoft.com/office/officeart/2005/8/layout/chevron1"/>
+  </dgm:cxnLst>
+  <dgm:bg/>
+  <dgm:whole/>
+  <dgm:extLst>
+    <a:ext uri="http://schemas.microsoft.com/office/drawing/2008/diagram">
+      <dsp:dataModelExt xmlns:dsp="http://schemas.microsoft.com/office/drawing/2008/diagram" relId="rId7" minVer="http://schemas.openxmlformats.org/drawingml/2006/diagram"/>
+    </a:ext>
+  </dgm:extLst>
+</dgm:dataModel>
+</file>
+
+<file path=ppt/diagrams/data2.xml><?xml version="1.0" encoding="utf-8"?>
 <dgm:dataModel xmlns:dgm="http://schemas.openxmlformats.org/drawingml/2006/diagram" xmlns:a="http://schemas.openxmlformats.org/drawingml/2006/main">
   <dgm:ptLst>
     <dgm:pt modelId="{DC7DFABE-76D4-4C98-94F0-FC9C95EE3BF5}" type="doc">
@@ -2084,6 +3819,835 @@
 </file>
 
 <file path=ppt/diagrams/drawing1.xml><?xml version="1.0" encoding="utf-8"?>
+<dsp:drawing xmlns:dgm="http://schemas.openxmlformats.org/drawingml/2006/diagram" xmlns:dsp="http://schemas.microsoft.com/office/drawing/2008/diagram" xmlns:a="http://schemas.openxmlformats.org/drawingml/2006/main">
+  <dsp:spTree>
+    <dsp:nvGrpSpPr>
+      <dsp:cNvPr id="0" name=""/>
+      <dsp:cNvGrpSpPr/>
+    </dsp:nvGrpSpPr>
+    <dsp:grpSpPr/>
+    <dsp:sp modelId="{E8B05688-E45A-4ABA-AA71-0A072B8680B5}">
+      <dsp:nvSpPr>
+        <dsp:cNvPr id="0" name=""/>
+        <dsp:cNvSpPr/>
+      </dsp:nvSpPr>
+      <dsp:spPr>
+        <a:xfrm>
+          <a:off x="1021" y="2136913"/>
+          <a:ext cx="2385916" cy="954366"/>
+        </a:xfrm>
+        <a:prstGeom prst="chevron">
+          <a:avLst/>
+        </a:prstGeom>
+        <a:solidFill>
+          <a:schemeClr val="accent5">
+            <a:hueOff val="0"/>
+            <a:satOff val="0"/>
+            <a:lumOff val="0"/>
+            <a:alphaOff val="0"/>
+          </a:schemeClr>
+        </a:solidFill>
+        <a:ln w="12700" cap="flat" cmpd="sng" algn="ctr">
+          <a:solidFill>
+            <a:schemeClr val="lt1">
+              <a:hueOff val="0"/>
+              <a:satOff val="0"/>
+              <a:lumOff val="0"/>
+              <a:alphaOff val="0"/>
+            </a:schemeClr>
+          </a:solidFill>
+          <a:prstDash val="solid"/>
+          <a:miter lim="800000"/>
+        </a:ln>
+        <a:effectLst/>
+      </dsp:spPr>
+      <dsp:style>
+        <a:lnRef idx="2">
+          <a:scrgbClr r="0" g="0" b="0"/>
+        </a:lnRef>
+        <a:fillRef idx="1">
+          <a:scrgbClr r="0" g="0" b="0"/>
+        </a:fillRef>
+        <a:effectRef idx="0">
+          <a:scrgbClr r="0" g="0" b="0"/>
+        </a:effectRef>
+        <a:fontRef idx="minor">
+          <a:schemeClr val="lt1"/>
+        </a:fontRef>
+      </dsp:style>
+      <dsp:txBody>
+        <a:bodyPr spcFirstLastPara="0" vert="horz" wrap="square" lIns="72009" tIns="24003" rIns="24003" bIns="24003" numCol="1" spcCol="1270" anchor="ctr" anchorCtr="0">
+          <a:noAutofit/>
+        </a:bodyPr>
+        <a:lstStyle/>
+        <a:p>
+          <a:pPr marL="0" lvl="0" indent="0" algn="ctr" defTabSz="800100">
+            <a:lnSpc>
+              <a:spcPct val="90000"/>
+            </a:lnSpc>
+            <a:spcBef>
+              <a:spcPct val="0"/>
+            </a:spcBef>
+            <a:spcAft>
+              <a:spcPct val="35000"/>
+            </a:spcAft>
+            <a:buNone/>
+          </a:pPr>
+          <a:r>
+            <a:rPr lang="fr-FR" sz="1800" kern="1200" dirty="0" err="1"/>
+            <a:t>Collecting</a:t>
+          </a:r>
+          <a:endParaRPr lang="fr-FR" sz="1800" kern="1200" dirty="0"/>
+        </a:p>
+      </dsp:txBody>
+      <dsp:txXfrm>
+        <a:off x="478204" y="2136913"/>
+        <a:ext cx="1431550" cy="954366"/>
+      </dsp:txXfrm>
+    </dsp:sp>
+    <dsp:sp modelId="{D42188D5-C3DE-45DB-A634-05ADFE28CD04}">
+      <dsp:nvSpPr>
+        <dsp:cNvPr id="0" name=""/>
+        <dsp:cNvSpPr/>
+      </dsp:nvSpPr>
+      <dsp:spPr>
+        <a:xfrm>
+          <a:off x="1021" y="3210575"/>
+          <a:ext cx="1908733" cy="1452937"/>
+        </a:xfrm>
+        <a:prstGeom prst="rect">
+          <a:avLst/>
+        </a:prstGeom>
+        <a:noFill/>
+        <a:ln>
+          <a:noFill/>
+        </a:ln>
+        <a:effectLst/>
+      </dsp:spPr>
+      <dsp:style>
+        <a:lnRef idx="0">
+          <a:scrgbClr r="0" g="0" b="0"/>
+        </a:lnRef>
+        <a:fillRef idx="0">
+          <a:scrgbClr r="0" g="0" b="0"/>
+        </a:fillRef>
+        <a:effectRef idx="0">
+          <a:scrgbClr r="0" g="0" b="0"/>
+        </a:effectRef>
+        <a:fontRef idx="minor"/>
+      </dsp:style>
+      <dsp:txBody>
+        <a:bodyPr spcFirstLastPara="0" vert="horz" wrap="square" lIns="0" tIns="0" rIns="0" bIns="0" numCol="1" spcCol="1270" anchor="t" anchorCtr="0">
+          <a:noAutofit/>
+        </a:bodyPr>
+        <a:lstStyle/>
+        <a:p>
+          <a:pPr marL="171450" lvl="1" indent="-171450" algn="l" defTabSz="800100">
+            <a:lnSpc>
+              <a:spcPct val="90000"/>
+            </a:lnSpc>
+            <a:spcBef>
+              <a:spcPct val="0"/>
+            </a:spcBef>
+            <a:spcAft>
+              <a:spcPct val="15000"/>
+            </a:spcAft>
+            <a:buChar char="•"/>
+          </a:pPr>
+          <a:r>
+            <a:rPr lang="fr-FR" sz="1800" kern="1200" dirty="0"/>
+            <a:t>Download</a:t>
+          </a:r>
+        </a:p>
+      </dsp:txBody>
+      <dsp:txXfrm>
+        <a:off x="1021" y="3210575"/>
+        <a:ext cx="1908733" cy="1452937"/>
+      </dsp:txXfrm>
+    </dsp:sp>
+    <dsp:sp modelId="{4673DFFF-1970-42D4-8886-B4F6928D42BF}">
+      <dsp:nvSpPr>
+        <dsp:cNvPr id="0" name=""/>
+        <dsp:cNvSpPr/>
+      </dsp:nvSpPr>
+      <dsp:spPr>
+        <a:xfrm>
+          <a:off x="2170938" y="2136913"/>
+          <a:ext cx="2385916" cy="954366"/>
+        </a:xfrm>
+        <a:prstGeom prst="chevron">
+          <a:avLst/>
+        </a:prstGeom>
+        <a:solidFill>
+          <a:schemeClr val="accent5">
+            <a:hueOff val="-1689636"/>
+            <a:satOff val="-4355"/>
+            <a:lumOff val="-2941"/>
+            <a:alphaOff val="0"/>
+          </a:schemeClr>
+        </a:solidFill>
+        <a:ln w="12700" cap="flat" cmpd="sng" algn="ctr">
+          <a:solidFill>
+            <a:schemeClr val="lt1">
+              <a:hueOff val="0"/>
+              <a:satOff val="0"/>
+              <a:lumOff val="0"/>
+              <a:alphaOff val="0"/>
+            </a:schemeClr>
+          </a:solidFill>
+          <a:prstDash val="solid"/>
+          <a:miter lim="800000"/>
+        </a:ln>
+        <a:effectLst/>
+      </dsp:spPr>
+      <dsp:style>
+        <a:lnRef idx="2">
+          <a:scrgbClr r="0" g="0" b="0"/>
+        </a:lnRef>
+        <a:fillRef idx="1">
+          <a:scrgbClr r="0" g="0" b="0"/>
+        </a:fillRef>
+        <a:effectRef idx="0">
+          <a:scrgbClr r="0" g="0" b="0"/>
+        </a:effectRef>
+        <a:fontRef idx="minor">
+          <a:schemeClr val="lt1"/>
+        </a:fontRef>
+      </dsp:style>
+      <dsp:txBody>
+        <a:bodyPr spcFirstLastPara="0" vert="horz" wrap="square" lIns="72009" tIns="24003" rIns="24003" bIns="24003" numCol="1" spcCol="1270" anchor="ctr" anchorCtr="0">
+          <a:noAutofit/>
+        </a:bodyPr>
+        <a:lstStyle/>
+        <a:p>
+          <a:pPr marL="0" lvl="0" indent="0" algn="ctr" defTabSz="800100">
+            <a:lnSpc>
+              <a:spcPct val="90000"/>
+            </a:lnSpc>
+            <a:spcBef>
+              <a:spcPct val="0"/>
+            </a:spcBef>
+            <a:spcAft>
+              <a:spcPct val="35000"/>
+            </a:spcAft>
+            <a:buNone/>
+          </a:pPr>
+          <a:r>
+            <a:rPr lang="fr-FR" sz="1800" kern="1200" dirty="0" err="1"/>
+            <a:t>Preprocessing</a:t>
+          </a:r>
+          <a:endParaRPr lang="fr-FR" sz="1800" kern="1200" dirty="0"/>
+        </a:p>
+      </dsp:txBody>
+      <dsp:txXfrm>
+        <a:off x="2648121" y="2136913"/>
+        <a:ext cx="1431550" cy="954366"/>
+      </dsp:txXfrm>
+    </dsp:sp>
+    <dsp:sp modelId="{39665076-877C-47BE-B9B3-4C18571A7925}">
+      <dsp:nvSpPr>
+        <dsp:cNvPr id="0" name=""/>
+        <dsp:cNvSpPr/>
+      </dsp:nvSpPr>
+      <dsp:spPr>
+        <a:xfrm>
+          <a:off x="2170938" y="3210575"/>
+          <a:ext cx="1908733" cy="1452937"/>
+        </a:xfrm>
+        <a:prstGeom prst="rect">
+          <a:avLst/>
+        </a:prstGeom>
+        <a:noFill/>
+        <a:ln>
+          <a:noFill/>
+        </a:ln>
+        <a:effectLst/>
+      </dsp:spPr>
+      <dsp:style>
+        <a:lnRef idx="0">
+          <a:scrgbClr r="0" g="0" b="0"/>
+        </a:lnRef>
+        <a:fillRef idx="0">
+          <a:scrgbClr r="0" g="0" b="0"/>
+        </a:fillRef>
+        <a:effectRef idx="0">
+          <a:scrgbClr r="0" g="0" b="0"/>
+        </a:effectRef>
+        <a:fontRef idx="minor"/>
+      </dsp:style>
+      <dsp:txBody>
+        <a:bodyPr spcFirstLastPara="0" vert="horz" wrap="square" lIns="0" tIns="0" rIns="0" bIns="0" numCol="1" spcCol="1270" anchor="t" anchorCtr="0">
+          <a:noAutofit/>
+        </a:bodyPr>
+        <a:lstStyle/>
+        <a:p>
+          <a:pPr marL="171450" lvl="1" indent="-171450" algn="l" defTabSz="800100">
+            <a:lnSpc>
+              <a:spcPct val="90000"/>
+            </a:lnSpc>
+            <a:spcBef>
+              <a:spcPct val="0"/>
+            </a:spcBef>
+            <a:spcAft>
+              <a:spcPct val="15000"/>
+            </a:spcAft>
+            <a:buChar char="•"/>
+          </a:pPr>
+          <a:r>
+            <a:rPr lang="fr-FR" sz="1800" kern="1200" dirty="0" err="1"/>
+            <a:t>Cleaning</a:t>
+          </a:r>
+          <a:endParaRPr lang="fr-FR" sz="1800" kern="1200" dirty="0"/>
+        </a:p>
+        <a:p>
+          <a:pPr marL="171450" lvl="1" indent="-171450" algn="l" defTabSz="800100">
+            <a:lnSpc>
+              <a:spcPct val="90000"/>
+            </a:lnSpc>
+            <a:spcBef>
+              <a:spcPct val="0"/>
+            </a:spcBef>
+            <a:spcAft>
+              <a:spcPct val="15000"/>
+            </a:spcAft>
+            <a:buChar char="•"/>
+          </a:pPr>
+          <a:r>
+            <a:rPr lang="fr-FR" sz="1800" kern="1200" dirty="0" err="1"/>
+            <a:t>Merging</a:t>
+          </a:r>
+          <a:endParaRPr lang="fr-FR" sz="1800" kern="1200" dirty="0"/>
+        </a:p>
+        <a:p>
+          <a:pPr marL="171450" lvl="1" indent="-171450" algn="l" defTabSz="800100">
+            <a:lnSpc>
+              <a:spcPct val="90000"/>
+            </a:lnSpc>
+            <a:spcBef>
+              <a:spcPct val="0"/>
+            </a:spcBef>
+            <a:spcAft>
+              <a:spcPct val="15000"/>
+            </a:spcAft>
+            <a:buChar char="•"/>
+          </a:pPr>
+          <a:r>
+            <a:rPr lang="fr-FR" sz="1800" kern="1200" dirty="0"/>
+            <a:t>…</a:t>
+          </a:r>
+        </a:p>
+        <a:p>
+          <a:pPr marL="171450" lvl="1" indent="-171450" algn="l" defTabSz="800100">
+            <a:lnSpc>
+              <a:spcPct val="90000"/>
+            </a:lnSpc>
+            <a:spcBef>
+              <a:spcPct val="0"/>
+            </a:spcBef>
+            <a:spcAft>
+              <a:spcPct val="15000"/>
+            </a:spcAft>
+            <a:buChar char="•"/>
+          </a:pPr>
+          <a:endParaRPr lang="fr-FR" sz="1800" kern="1200" dirty="0"/>
+        </a:p>
+      </dsp:txBody>
+      <dsp:txXfrm>
+        <a:off x="2170938" y="3210575"/>
+        <a:ext cx="1908733" cy="1452937"/>
+      </dsp:txXfrm>
+    </dsp:sp>
+    <dsp:sp modelId="{D88BBE5E-62D0-4ADD-9C87-24E9A1FA1376}">
+      <dsp:nvSpPr>
+        <dsp:cNvPr id="0" name=""/>
+        <dsp:cNvSpPr/>
+      </dsp:nvSpPr>
+      <dsp:spPr>
+        <a:xfrm>
+          <a:off x="4340854" y="2136913"/>
+          <a:ext cx="2385916" cy="954366"/>
+        </a:xfrm>
+        <a:prstGeom prst="chevron">
+          <a:avLst/>
+        </a:prstGeom>
+        <a:solidFill>
+          <a:schemeClr val="accent5">
+            <a:hueOff val="-3379271"/>
+            <a:satOff val="-8710"/>
+            <a:lumOff val="-5883"/>
+            <a:alphaOff val="0"/>
+          </a:schemeClr>
+        </a:solidFill>
+        <a:ln w="12700" cap="flat" cmpd="sng" algn="ctr">
+          <a:solidFill>
+            <a:schemeClr val="lt1">
+              <a:hueOff val="0"/>
+              <a:satOff val="0"/>
+              <a:lumOff val="0"/>
+              <a:alphaOff val="0"/>
+            </a:schemeClr>
+          </a:solidFill>
+          <a:prstDash val="solid"/>
+          <a:miter lim="800000"/>
+        </a:ln>
+        <a:effectLst/>
+      </dsp:spPr>
+      <dsp:style>
+        <a:lnRef idx="2">
+          <a:scrgbClr r="0" g="0" b="0"/>
+        </a:lnRef>
+        <a:fillRef idx="1">
+          <a:scrgbClr r="0" g="0" b="0"/>
+        </a:fillRef>
+        <a:effectRef idx="0">
+          <a:scrgbClr r="0" g="0" b="0"/>
+        </a:effectRef>
+        <a:fontRef idx="minor">
+          <a:schemeClr val="lt1"/>
+        </a:fontRef>
+      </dsp:style>
+      <dsp:txBody>
+        <a:bodyPr spcFirstLastPara="0" vert="horz" wrap="square" lIns="72009" tIns="24003" rIns="24003" bIns="24003" numCol="1" spcCol="1270" anchor="ctr" anchorCtr="0">
+          <a:noAutofit/>
+        </a:bodyPr>
+        <a:lstStyle/>
+        <a:p>
+          <a:pPr marL="0" lvl="0" indent="0" algn="ctr" defTabSz="800100">
+            <a:lnSpc>
+              <a:spcPct val="90000"/>
+            </a:lnSpc>
+            <a:spcBef>
+              <a:spcPct val="0"/>
+            </a:spcBef>
+            <a:spcAft>
+              <a:spcPct val="35000"/>
+            </a:spcAft>
+            <a:buNone/>
+          </a:pPr>
+          <a:r>
+            <a:rPr lang="fr-FR" sz="1800" kern="1200" dirty="0"/>
+            <a:t>Exploration</a:t>
+          </a:r>
+        </a:p>
+      </dsp:txBody>
+      <dsp:txXfrm>
+        <a:off x="4818037" y="2136913"/>
+        <a:ext cx="1431550" cy="954366"/>
+      </dsp:txXfrm>
+    </dsp:sp>
+    <dsp:sp modelId="{6EF91DAC-DE5C-4625-ADB0-5107187D9866}">
+      <dsp:nvSpPr>
+        <dsp:cNvPr id="0" name=""/>
+        <dsp:cNvSpPr/>
+      </dsp:nvSpPr>
+      <dsp:spPr>
+        <a:xfrm>
+          <a:off x="4340854" y="3210575"/>
+          <a:ext cx="1908733" cy="1452937"/>
+        </a:xfrm>
+        <a:prstGeom prst="rect">
+          <a:avLst/>
+        </a:prstGeom>
+        <a:noFill/>
+        <a:ln>
+          <a:noFill/>
+        </a:ln>
+        <a:effectLst/>
+      </dsp:spPr>
+      <dsp:style>
+        <a:lnRef idx="0">
+          <a:scrgbClr r="0" g="0" b="0"/>
+        </a:lnRef>
+        <a:fillRef idx="0">
+          <a:scrgbClr r="0" g="0" b="0"/>
+        </a:fillRef>
+        <a:effectRef idx="0">
+          <a:scrgbClr r="0" g="0" b="0"/>
+        </a:effectRef>
+        <a:fontRef idx="minor"/>
+      </dsp:style>
+      <dsp:txBody>
+        <a:bodyPr spcFirstLastPara="0" vert="horz" wrap="square" lIns="0" tIns="0" rIns="0" bIns="0" numCol="1" spcCol="1270" anchor="t" anchorCtr="0">
+          <a:noAutofit/>
+        </a:bodyPr>
+        <a:lstStyle/>
+        <a:p>
+          <a:pPr marL="171450" lvl="1" indent="-171450" algn="l" defTabSz="800100">
+            <a:lnSpc>
+              <a:spcPct val="90000"/>
+            </a:lnSpc>
+            <a:spcBef>
+              <a:spcPct val="0"/>
+            </a:spcBef>
+            <a:spcAft>
+              <a:spcPct val="15000"/>
+            </a:spcAft>
+            <a:buChar char="•"/>
+          </a:pPr>
+          <a:r>
+            <a:rPr lang="fr-FR" sz="1800" kern="1200" dirty="0" err="1"/>
+            <a:t>What</a:t>
+          </a:r>
+          <a:r>
+            <a:rPr lang="fr-FR" sz="1800" kern="1200" dirty="0"/>
+            <a:t> </a:t>
+          </a:r>
+          <a:r>
+            <a:rPr lang="fr-FR" sz="1800" kern="1200" dirty="0" err="1"/>
+            <a:t>is</a:t>
+          </a:r>
+          <a:r>
+            <a:rPr lang="fr-FR" sz="1800" kern="1200" dirty="0"/>
+            <a:t> </a:t>
+          </a:r>
+          <a:r>
+            <a:rPr lang="fr-FR" sz="1800" kern="1200" dirty="0" err="1"/>
+            <a:t>available</a:t>
+          </a:r>
+          <a:r>
+            <a:rPr lang="fr-FR" sz="1800" kern="1200" dirty="0"/>
+            <a:t>?</a:t>
+          </a:r>
+        </a:p>
+        <a:p>
+          <a:pPr marL="171450" lvl="1" indent="-171450" algn="l" defTabSz="800100">
+            <a:lnSpc>
+              <a:spcPct val="90000"/>
+            </a:lnSpc>
+            <a:spcBef>
+              <a:spcPct val="0"/>
+            </a:spcBef>
+            <a:spcAft>
+              <a:spcPct val="15000"/>
+            </a:spcAft>
+            <a:buChar char="•"/>
+          </a:pPr>
+          <a:r>
+            <a:rPr lang="fr-FR" sz="1800" kern="1200" dirty="0" err="1"/>
+            <a:t>Meaning</a:t>
+          </a:r>
+          <a:r>
+            <a:rPr lang="fr-FR" sz="1800" kern="1200" dirty="0"/>
+            <a:t>?</a:t>
+          </a:r>
+        </a:p>
+        <a:p>
+          <a:pPr marL="171450" lvl="1" indent="-171450" algn="l" defTabSz="800100">
+            <a:lnSpc>
+              <a:spcPct val="90000"/>
+            </a:lnSpc>
+            <a:spcBef>
+              <a:spcPct val="0"/>
+            </a:spcBef>
+            <a:spcAft>
+              <a:spcPct val="15000"/>
+            </a:spcAft>
+            <a:buChar char="•"/>
+          </a:pPr>
+          <a:r>
+            <a:rPr lang="fr-FR" sz="1800" kern="1200" dirty="0"/>
+            <a:t>More </a:t>
+          </a:r>
+          <a:r>
+            <a:rPr lang="fr-FR" sz="1800" kern="1200" dirty="0" err="1"/>
+            <a:t>cleaning</a:t>
+          </a:r>
+          <a:r>
+            <a:rPr lang="fr-FR" sz="1800" kern="1200" dirty="0"/>
+            <a:t>?</a:t>
+          </a:r>
+        </a:p>
+        <a:p>
+          <a:pPr marL="171450" lvl="1" indent="-171450" algn="l" defTabSz="800100">
+            <a:lnSpc>
+              <a:spcPct val="90000"/>
+            </a:lnSpc>
+            <a:spcBef>
+              <a:spcPct val="0"/>
+            </a:spcBef>
+            <a:spcAft>
+              <a:spcPct val="15000"/>
+            </a:spcAft>
+            <a:buChar char="•"/>
+          </a:pPr>
+          <a:r>
+            <a:rPr lang="fr-FR" sz="1800" kern="1200" dirty="0"/>
+            <a:t>Display Target</a:t>
+          </a:r>
+        </a:p>
+        <a:p>
+          <a:pPr marL="171450" lvl="1" indent="-171450" algn="l" defTabSz="800100">
+            <a:lnSpc>
+              <a:spcPct val="90000"/>
+            </a:lnSpc>
+            <a:spcBef>
+              <a:spcPct val="0"/>
+            </a:spcBef>
+            <a:spcAft>
+              <a:spcPct val="15000"/>
+            </a:spcAft>
+            <a:buChar char="•"/>
+          </a:pPr>
+          <a:r>
+            <a:rPr lang="fr-FR" sz="1800" kern="1200" dirty="0"/>
+            <a:t>…</a:t>
+          </a:r>
+        </a:p>
+      </dsp:txBody>
+      <dsp:txXfrm>
+        <a:off x="4340854" y="3210575"/>
+        <a:ext cx="1908733" cy="1452937"/>
+      </dsp:txXfrm>
+    </dsp:sp>
+    <dsp:sp modelId="{F42DC3AA-E258-43BE-9DB5-EEF0C25D47E5}">
+      <dsp:nvSpPr>
+        <dsp:cNvPr id="0" name=""/>
+        <dsp:cNvSpPr/>
+      </dsp:nvSpPr>
+      <dsp:spPr>
+        <a:xfrm>
+          <a:off x="6510771" y="2136913"/>
+          <a:ext cx="2385916" cy="954366"/>
+        </a:xfrm>
+        <a:prstGeom prst="chevron">
+          <a:avLst/>
+        </a:prstGeom>
+        <a:solidFill>
+          <a:schemeClr val="accent5">
+            <a:hueOff val="-5068907"/>
+            <a:satOff val="-13064"/>
+            <a:lumOff val="-8824"/>
+            <a:alphaOff val="0"/>
+          </a:schemeClr>
+        </a:solidFill>
+        <a:ln w="12700" cap="flat" cmpd="sng" algn="ctr">
+          <a:solidFill>
+            <a:schemeClr val="lt1">
+              <a:hueOff val="0"/>
+              <a:satOff val="0"/>
+              <a:lumOff val="0"/>
+              <a:alphaOff val="0"/>
+            </a:schemeClr>
+          </a:solidFill>
+          <a:prstDash val="solid"/>
+          <a:miter lim="800000"/>
+        </a:ln>
+        <a:effectLst/>
+      </dsp:spPr>
+      <dsp:style>
+        <a:lnRef idx="2">
+          <a:scrgbClr r="0" g="0" b="0"/>
+        </a:lnRef>
+        <a:fillRef idx="1">
+          <a:scrgbClr r="0" g="0" b="0"/>
+        </a:fillRef>
+        <a:effectRef idx="0">
+          <a:scrgbClr r="0" g="0" b="0"/>
+        </a:effectRef>
+        <a:fontRef idx="minor">
+          <a:schemeClr val="lt1"/>
+        </a:fontRef>
+      </dsp:style>
+      <dsp:txBody>
+        <a:bodyPr spcFirstLastPara="0" vert="horz" wrap="square" lIns="72009" tIns="24003" rIns="24003" bIns="24003" numCol="1" spcCol="1270" anchor="ctr" anchorCtr="0">
+          <a:noAutofit/>
+        </a:bodyPr>
+        <a:lstStyle/>
+        <a:p>
+          <a:pPr marL="0" lvl="0" indent="0" algn="ctr" defTabSz="800100">
+            <a:lnSpc>
+              <a:spcPct val="90000"/>
+            </a:lnSpc>
+            <a:spcBef>
+              <a:spcPct val="0"/>
+            </a:spcBef>
+            <a:spcAft>
+              <a:spcPct val="35000"/>
+            </a:spcAft>
+            <a:buNone/>
+          </a:pPr>
+          <a:r>
+            <a:rPr lang="fr-FR" sz="1800" kern="1200" dirty="0" err="1"/>
+            <a:t>Modelisation</a:t>
+          </a:r>
+          <a:endParaRPr lang="fr-FR" sz="1800" kern="1200" dirty="0"/>
+        </a:p>
+      </dsp:txBody>
+      <dsp:txXfrm>
+        <a:off x="6987954" y="2136913"/>
+        <a:ext cx="1431550" cy="954366"/>
+      </dsp:txXfrm>
+    </dsp:sp>
+    <dsp:sp modelId="{1D1C9062-AB8E-43CC-98BC-5B98F04119F3}">
+      <dsp:nvSpPr>
+        <dsp:cNvPr id="0" name=""/>
+        <dsp:cNvSpPr/>
+      </dsp:nvSpPr>
+      <dsp:spPr>
+        <a:xfrm>
+          <a:off x="6510771" y="3210575"/>
+          <a:ext cx="1908733" cy="1452937"/>
+        </a:xfrm>
+        <a:prstGeom prst="rect">
+          <a:avLst/>
+        </a:prstGeom>
+        <a:noFill/>
+        <a:ln>
+          <a:noFill/>
+        </a:ln>
+        <a:effectLst/>
+      </dsp:spPr>
+      <dsp:style>
+        <a:lnRef idx="0">
+          <a:scrgbClr r="0" g="0" b="0"/>
+        </a:lnRef>
+        <a:fillRef idx="0">
+          <a:scrgbClr r="0" g="0" b="0"/>
+        </a:fillRef>
+        <a:effectRef idx="0">
+          <a:scrgbClr r="0" g="0" b="0"/>
+        </a:effectRef>
+        <a:fontRef idx="minor"/>
+      </dsp:style>
+      <dsp:txBody>
+        <a:bodyPr spcFirstLastPara="0" vert="horz" wrap="square" lIns="0" tIns="0" rIns="0" bIns="0" numCol="1" spcCol="1270" anchor="t" anchorCtr="0">
+          <a:noAutofit/>
+        </a:bodyPr>
+        <a:lstStyle/>
+        <a:p>
+          <a:pPr marL="171450" lvl="1" indent="-171450" algn="l" defTabSz="800100">
+            <a:lnSpc>
+              <a:spcPct val="90000"/>
+            </a:lnSpc>
+            <a:spcBef>
+              <a:spcPct val="0"/>
+            </a:spcBef>
+            <a:spcAft>
+              <a:spcPct val="15000"/>
+            </a:spcAft>
+            <a:buChar char="•"/>
+          </a:pPr>
+          <a:r>
+            <a:rPr lang="fr-FR" sz="1800" kern="1200" dirty="0" err="1"/>
+            <a:t>Linear</a:t>
+          </a:r>
+          <a:r>
+            <a:rPr lang="fr-FR" sz="1800" kern="1200" dirty="0"/>
+            <a:t> </a:t>
+          </a:r>
+          <a:r>
+            <a:rPr lang="fr-FR" sz="1800" kern="1200" dirty="0" err="1"/>
+            <a:t>Regression</a:t>
+          </a:r>
+          <a:endParaRPr lang="fr-FR" sz="1800" kern="1200" dirty="0"/>
+        </a:p>
+        <a:p>
+          <a:pPr marL="171450" lvl="1" indent="-171450" algn="l" defTabSz="800100">
+            <a:lnSpc>
+              <a:spcPct val="90000"/>
+            </a:lnSpc>
+            <a:spcBef>
+              <a:spcPct val="0"/>
+            </a:spcBef>
+            <a:spcAft>
+              <a:spcPct val="15000"/>
+            </a:spcAft>
+            <a:buChar char="•"/>
+          </a:pPr>
+          <a:r>
+            <a:rPr lang="fr-FR" sz="1800" kern="1200" dirty="0"/>
+            <a:t>…</a:t>
+          </a:r>
+        </a:p>
+      </dsp:txBody>
+      <dsp:txXfrm>
+        <a:off x="6510771" y="3210575"/>
+        <a:ext cx="1908733" cy="1452937"/>
+      </dsp:txXfrm>
+    </dsp:sp>
+    <dsp:sp modelId="{468266D3-BD30-4DDF-9F9D-9A63974A7711}">
+      <dsp:nvSpPr>
+        <dsp:cNvPr id="0" name=""/>
+        <dsp:cNvSpPr/>
+      </dsp:nvSpPr>
+      <dsp:spPr>
+        <a:xfrm>
+          <a:off x="8680687" y="2136913"/>
+          <a:ext cx="2385916" cy="954366"/>
+        </a:xfrm>
+        <a:prstGeom prst="chevron">
+          <a:avLst/>
+        </a:prstGeom>
+        <a:solidFill>
+          <a:schemeClr val="accent5">
+            <a:hueOff val="-6758543"/>
+            <a:satOff val="-17419"/>
+            <a:lumOff val="-11765"/>
+            <a:alphaOff val="0"/>
+          </a:schemeClr>
+        </a:solidFill>
+        <a:ln w="12700" cap="flat" cmpd="sng" algn="ctr">
+          <a:solidFill>
+            <a:schemeClr val="lt1">
+              <a:hueOff val="0"/>
+              <a:satOff val="0"/>
+              <a:lumOff val="0"/>
+              <a:alphaOff val="0"/>
+            </a:schemeClr>
+          </a:solidFill>
+          <a:prstDash val="solid"/>
+          <a:miter lim="800000"/>
+        </a:ln>
+        <a:effectLst/>
+      </dsp:spPr>
+      <dsp:style>
+        <a:lnRef idx="2">
+          <a:scrgbClr r="0" g="0" b="0"/>
+        </a:lnRef>
+        <a:fillRef idx="1">
+          <a:scrgbClr r="0" g="0" b="0"/>
+        </a:fillRef>
+        <a:effectRef idx="0">
+          <a:scrgbClr r="0" g="0" b="0"/>
+        </a:effectRef>
+        <a:fontRef idx="minor">
+          <a:schemeClr val="lt1"/>
+        </a:fontRef>
+      </dsp:style>
+      <dsp:txBody>
+        <a:bodyPr spcFirstLastPara="0" vert="horz" wrap="square" lIns="72009" tIns="24003" rIns="24003" bIns="24003" numCol="1" spcCol="1270" anchor="ctr" anchorCtr="0">
+          <a:noAutofit/>
+        </a:bodyPr>
+        <a:lstStyle/>
+        <a:p>
+          <a:pPr marL="0" lvl="0" indent="0" algn="ctr" defTabSz="800100">
+            <a:lnSpc>
+              <a:spcPct val="90000"/>
+            </a:lnSpc>
+            <a:spcBef>
+              <a:spcPct val="0"/>
+            </a:spcBef>
+            <a:spcAft>
+              <a:spcPct val="35000"/>
+            </a:spcAft>
+            <a:buNone/>
+          </a:pPr>
+          <a:r>
+            <a:rPr lang="fr-FR" sz="1800" kern="1200" dirty="0"/>
+            <a:t>Conclusion</a:t>
+          </a:r>
+        </a:p>
+      </dsp:txBody>
+      <dsp:txXfrm>
+        <a:off x="9157870" y="2136913"/>
+        <a:ext cx="1431550" cy="954366"/>
+      </dsp:txXfrm>
+    </dsp:sp>
+  </dsp:spTree>
+</dsp:drawing>
+</file>
+
+<file path=ppt/diagrams/drawing2.xml><?xml version="1.0" encoding="utf-8"?>
 <dsp:drawing xmlns:dgm="http://schemas.openxmlformats.org/drawingml/2006/diagram" xmlns:dsp="http://schemas.microsoft.com/office/drawing/2008/diagram" xmlns:a="http://schemas.openxmlformats.org/drawingml/2006/main">
   <dsp:spTree>
     <dsp:nvGrpSpPr>
@@ -2661,6 +5225,289 @@
 </file>
 
 <file path=ppt/diagrams/layout1.xml><?xml version="1.0" encoding="utf-8"?>
+<dgm:layoutDef xmlns:dgm="http://schemas.openxmlformats.org/drawingml/2006/diagram" xmlns:a="http://schemas.openxmlformats.org/drawingml/2006/main" uniqueId="urn:microsoft.com/office/officeart/2005/8/layout/chevron1">
+  <dgm:title val=""/>
+  <dgm:desc val=""/>
+  <dgm:catLst>
+    <dgm:cat type="process" pri="9000"/>
+  </dgm:catLst>
+  <dgm:sampData useDef="1">
+    <dgm:dataModel>
+      <dgm:ptLst/>
+      <dgm:bg/>
+      <dgm:whole/>
+    </dgm:dataModel>
+  </dgm:sampData>
+  <dgm:styleData>
+    <dgm:dataModel>
+      <dgm:ptLst>
+        <dgm:pt modelId="0" type="doc"/>
+        <dgm:pt modelId="1"/>
+        <dgm:pt modelId="2"/>
+      </dgm:ptLst>
+      <dgm:cxnLst>
+        <dgm:cxn modelId="3" srcId="0" destId="1" srcOrd="0" destOrd="0"/>
+        <dgm:cxn modelId="4" srcId="0" destId="2" srcOrd="1" destOrd="0"/>
+      </dgm:cxnLst>
+      <dgm:bg/>
+      <dgm:whole/>
+    </dgm:dataModel>
+  </dgm:styleData>
+  <dgm:clrData>
+    <dgm:dataModel>
+      <dgm:ptLst>
+        <dgm:pt modelId="0" type="doc"/>
+        <dgm:pt modelId="1"/>
+        <dgm:pt modelId="2"/>
+        <dgm:pt modelId="3"/>
+        <dgm:pt modelId="4"/>
+      </dgm:ptLst>
+      <dgm:cxnLst>
+        <dgm:cxn modelId="5" srcId="0" destId="1" srcOrd="0" destOrd="0"/>
+        <dgm:cxn modelId="6" srcId="0" destId="2" srcOrd="1" destOrd="0"/>
+        <dgm:cxn modelId="7" srcId="0" destId="3" srcOrd="2" destOrd="0"/>
+        <dgm:cxn modelId="8" srcId="0" destId="4" srcOrd="3" destOrd="0"/>
+      </dgm:cxnLst>
+      <dgm:bg/>
+      <dgm:whole/>
+    </dgm:dataModel>
+  </dgm:clrData>
+  <dgm:layoutNode name="Name0">
+    <dgm:varLst>
+      <dgm:dir/>
+      <dgm:animLvl val="lvl"/>
+      <dgm:resizeHandles val="exact"/>
+    </dgm:varLst>
+    <dgm:choose name="Name1">
+      <dgm:if name="Name2" func="var" arg="dir" op="equ" val="norm">
+        <dgm:alg type="lin"/>
+      </dgm:if>
+      <dgm:else name="Name3">
+        <dgm:alg type="lin">
+          <dgm:param type="linDir" val="fromR"/>
+        </dgm:alg>
+      </dgm:else>
+    </dgm:choose>
+    <dgm:shape xmlns:r="http://schemas.openxmlformats.org/officeDocument/2006/relationships" r:blip="">
+      <dgm:adjLst/>
+    </dgm:shape>
+    <dgm:presOf/>
+    <dgm:choose name="Name4">
+      <dgm:if name="Name5" axis="des" func="maxDepth" op="gte" val="2">
+        <dgm:constrLst>
+          <dgm:constr type="h" for="ch" forName="composite" refType="h"/>
+          <dgm:constr type="w" for="ch" forName="composite" refType="w"/>
+          <dgm:constr type="w" for="des" forName="parTx"/>
+          <dgm:constr type="h" for="des" forName="parTx" op="equ"/>
+          <dgm:constr type="w" for="des" forName="desTx"/>
+          <dgm:constr type="h" for="des" forName="desTx" op="equ"/>
+          <dgm:constr type="primFontSz" for="des" forName="parTx" val="65"/>
+          <dgm:constr type="secFontSz" for="des" forName="desTx" refType="primFontSz" refFor="des" refForName="parTx" op="equ"/>
+          <dgm:constr type="h" for="des" forName="parTx" refType="primFontSz" refFor="des" refForName="parTx" fact="1.5"/>
+          <dgm:constr type="h" for="des" forName="desTx" refType="primFontSz" refFor="des" refForName="parTx" fact="0.5"/>
+          <dgm:constr type="w" for="ch" forName="space" op="equ" val="-6"/>
+        </dgm:constrLst>
+        <dgm:ruleLst>
+          <dgm:rule type="w" for="ch" forName="composite" val="0" fact="NaN" max="NaN"/>
+          <dgm:rule type="primFontSz" for="des" forName="parTx" val="5" fact="NaN" max="NaN"/>
+        </dgm:ruleLst>
+        <dgm:forEach name="Name6" axis="ch" ptType="node">
+          <dgm:layoutNode name="composite">
+            <dgm:alg type="composite"/>
+            <dgm:shape xmlns:r="http://schemas.openxmlformats.org/officeDocument/2006/relationships" r:blip="">
+              <dgm:adjLst/>
+            </dgm:shape>
+            <dgm:presOf/>
+            <dgm:choose name="Name7">
+              <dgm:if name="Name8" func="var" arg="dir" op="equ" val="norm">
+                <dgm:constrLst>
+                  <dgm:constr type="l" for="ch" forName="parTx"/>
+                  <dgm:constr type="w" for="ch" forName="parTx" refType="w"/>
+                  <dgm:constr type="t" for="ch" forName="parTx"/>
+                  <dgm:constr type="l" for="ch" forName="desTx"/>
+                  <dgm:constr type="w" for="ch" forName="desTx" refType="w" refFor="ch" refForName="parTx" fact="0.8"/>
+                  <dgm:constr type="t" for="ch" forName="desTx" refType="h" refFor="ch" refForName="parTx" fact="1.125"/>
+                </dgm:constrLst>
+              </dgm:if>
+              <dgm:else name="Name9">
+                <dgm:constrLst>
+                  <dgm:constr type="l" for="ch" forName="parTx"/>
+                  <dgm:constr type="w" for="ch" forName="parTx" refType="w"/>
+                  <dgm:constr type="t" for="ch" forName="parTx"/>
+                  <dgm:constr type="l" for="ch" forName="desTx" refType="w" fact="0.2"/>
+                  <dgm:constr type="w" for="ch" forName="desTx" refType="w" refFor="ch" refForName="parTx" fact="0.8"/>
+                  <dgm:constr type="t" for="ch" forName="desTx" refType="h" refFor="ch" refForName="parTx" fact="1.125"/>
+                </dgm:constrLst>
+              </dgm:else>
+            </dgm:choose>
+            <dgm:ruleLst>
+              <dgm:rule type="h" val="INF" fact="NaN" max="NaN"/>
+            </dgm:ruleLst>
+            <dgm:layoutNode name="parTx">
+              <dgm:varLst>
+                <dgm:chMax val="0"/>
+                <dgm:chPref val="0"/>
+                <dgm:bulletEnabled val="1"/>
+              </dgm:varLst>
+              <dgm:alg type="tx"/>
+              <dgm:choose name="Name10">
+                <dgm:if name="Name11" func="var" arg="dir" op="equ" val="norm">
+                  <dgm:shape xmlns:r="http://schemas.openxmlformats.org/officeDocument/2006/relationships" type="chevron" r:blip="">
+                    <dgm:adjLst/>
+                  </dgm:shape>
+                </dgm:if>
+                <dgm:else name="Name12">
+                  <dgm:shape xmlns:r="http://schemas.openxmlformats.org/officeDocument/2006/relationships" rot="180" type="chevron" r:blip="">
+                    <dgm:adjLst/>
+                  </dgm:shape>
+                </dgm:else>
+              </dgm:choose>
+              <dgm:presOf axis="self" ptType="node"/>
+              <dgm:choose name="Name13">
+                <dgm:if name="Name14" func="var" arg="dir" op="equ" val="norm">
+                  <dgm:constrLst>
+                    <dgm:constr type="h" refType="w" op="lte" fact="0.4"/>
+                    <dgm:constr type="h"/>
+                    <dgm:constr type="tMarg" refType="primFontSz" fact="0.105"/>
+                    <dgm:constr type="bMarg" refType="primFontSz" fact="0.105"/>
+                    <dgm:constr type="lMarg" refType="primFontSz" fact="0.315"/>
+                    <dgm:constr type="rMarg" refType="primFontSz" fact="0.105"/>
+                  </dgm:constrLst>
+                </dgm:if>
+                <dgm:else name="Name15">
+                  <dgm:constrLst>
+                    <dgm:constr type="h" refType="w" op="lte" fact="0.4"/>
+                    <dgm:constr type="h"/>
+                    <dgm:constr type="tMarg" refType="primFontSz" fact="0.105"/>
+                    <dgm:constr type="bMarg" refType="primFontSz" fact="0.105"/>
+                    <dgm:constr type="lMarg" refType="primFontSz" fact="0.105"/>
+                    <dgm:constr type="rMarg" refType="primFontSz" fact="0.315"/>
+                  </dgm:constrLst>
+                </dgm:else>
+              </dgm:choose>
+              <dgm:ruleLst>
+                <dgm:rule type="h" val="INF" fact="NaN" max="NaN"/>
+              </dgm:ruleLst>
+            </dgm:layoutNode>
+            <dgm:layoutNode name="desTx" styleLbl="revTx">
+              <dgm:varLst>
+                <dgm:bulletEnabled val="1"/>
+              </dgm:varLst>
+              <dgm:alg type="tx">
+                <dgm:param type="stBulletLvl" val="1"/>
+              </dgm:alg>
+              <dgm:choose name="Name16">
+                <dgm:if name="Name17" axis="ch" ptType="node" func="cnt" op="gte" val="1">
+                  <dgm:shape xmlns:r="http://schemas.openxmlformats.org/officeDocument/2006/relationships" type="rect" r:blip="">
+                    <dgm:adjLst/>
+                  </dgm:shape>
+                </dgm:if>
+                <dgm:else name="Name18">
+                  <dgm:shape xmlns:r="http://schemas.openxmlformats.org/officeDocument/2006/relationships" type="rect" r:blip="" hideGeom="1">
+                    <dgm:adjLst/>
+                  </dgm:shape>
+                </dgm:else>
+              </dgm:choose>
+              <dgm:presOf axis="des" ptType="node"/>
+              <dgm:constrLst>
+                <dgm:constr type="secFontSz" val="65"/>
+                <dgm:constr type="primFontSz" refType="secFontSz"/>
+                <dgm:constr type="h"/>
+                <dgm:constr type="tMarg"/>
+                <dgm:constr type="bMarg"/>
+                <dgm:constr type="rMarg"/>
+                <dgm:constr type="lMarg"/>
+              </dgm:constrLst>
+              <dgm:ruleLst>
+                <dgm:rule type="h" val="INF" fact="NaN" max="NaN"/>
+              </dgm:ruleLst>
+            </dgm:layoutNode>
+          </dgm:layoutNode>
+          <dgm:forEach name="Name19" axis="followSib" ptType="sibTrans" cnt="1">
+            <dgm:layoutNode name="space">
+              <dgm:alg type="sp"/>
+              <dgm:shape xmlns:r="http://schemas.openxmlformats.org/officeDocument/2006/relationships" r:blip="">
+                <dgm:adjLst/>
+              </dgm:shape>
+              <dgm:presOf/>
+              <dgm:constrLst/>
+              <dgm:ruleLst/>
+            </dgm:layoutNode>
+          </dgm:forEach>
+        </dgm:forEach>
+      </dgm:if>
+      <dgm:else name="Name20">
+        <dgm:constrLst>
+          <dgm:constr type="w" for="ch" forName="parTxOnly" refType="w"/>
+          <dgm:constr type="h" for="des" forName="parTxOnly" op="equ"/>
+          <dgm:constr type="primFontSz" for="des" forName="parTxOnly" op="equ" val="65"/>
+          <dgm:constr type="w" for="ch" forName="parTxOnlySpace" refType="w" refFor="ch" refForName="parTxOnly" fact="-0.1"/>
+        </dgm:constrLst>
+        <dgm:ruleLst/>
+        <dgm:forEach name="Name21" axis="ch" ptType="node">
+          <dgm:layoutNode name="parTxOnly">
+            <dgm:varLst>
+              <dgm:chMax val="0"/>
+              <dgm:chPref val="0"/>
+              <dgm:bulletEnabled val="1"/>
+            </dgm:varLst>
+            <dgm:alg type="tx"/>
+            <dgm:choose name="Name22">
+              <dgm:if name="Name23" func="var" arg="dir" op="equ" val="norm">
+                <dgm:shape xmlns:r="http://schemas.openxmlformats.org/officeDocument/2006/relationships" type="chevron" r:blip="">
+                  <dgm:adjLst/>
+                </dgm:shape>
+              </dgm:if>
+              <dgm:else name="Name24">
+                <dgm:shape xmlns:r="http://schemas.openxmlformats.org/officeDocument/2006/relationships" rot="180" type="chevron" r:blip="">
+                  <dgm:adjLst/>
+                </dgm:shape>
+              </dgm:else>
+            </dgm:choose>
+            <dgm:presOf axis="self" ptType="node"/>
+            <dgm:choose name="Name25">
+              <dgm:if name="Name26" func="var" arg="dir" op="equ" val="norm">
+                <dgm:constrLst>
+                  <dgm:constr type="h" refType="w" op="equ" fact="0.4"/>
+                  <dgm:constr type="tMarg" refType="primFontSz" fact="0.105"/>
+                  <dgm:constr type="bMarg" refType="primFontSz" fact="0.105"/>
+                  <dgm:constr type="lMarg" refType="primFontSz" fact="0.315"/>
+                  <dgm:constr type="rMarg" refType="primFontSz" fact="0.105"/>
+                </dgm:constrLst>
+              </dgm:if>
+              <dgm:else name="Name27">
+                <dgm:constrLst>
+                  <dgm:constr type="h" refType="w" op="equ" fact="0.4"/>
+                  <dgm:constr type="tMarg" refType="primFontSz" fact="0.105"/>
+                  <dgm:constr type="bMarg" refType="primFontSz" fact="0.105"/>
+                  <dgm:constr type="lMarg" refType="primFontSz" fact="0.105"/>
+                  <dgm:constr type="rMarg" refType="primFontSz" fact="0.315"/>
+                </dgm:constrLst>
+              </dgm:else>
+            </dgm:choose>
+            <dgm:ruleLst>
+              <dgm:rule type="primFontSz" val="5" fact="NaN" max="NaN"/>
+            </dgm:ruleLst>
+          </dgm:layoutNode>
+          <dgm:forEach name="Name28" axis="followSib" ptType="sibTrans" cnt="1">
+            <dgm:layoutNode name="parTxOnlySpace">
+              <dgm:alg type="sp"/>
+              <dgm:shape xmlns:r="http://schemas.openxmlformats.org/officeDocument/2006/relationships" r:blip="">
+                <dgm:adjLst/>
+              </dgm:shape>
+              <dgm:presOf/>
+              <dgm:constrLst/>
+              <dgm:ruleLst/>
+            </dgm:layoutNode>
+          </dgm:forEach>
+        </dgm:forEach>
+      </dgm:else>
+    </dgm:choose>
+  </dgm:layoutNode>
+</dgm:layoutDef>
+</file>
+
+<file path=ppt/diagrams/layout2.xml><?xml version="1.0" encoding="utf-8"?>
 <dgm:layoutDef xmlns:dgm="http://schemas.openxmlformats.org/drawingml/2006/diagram" xmlns:a="http://schemas.openxmlformats.org/drawingml/2006/main" uniqueId="urn:microsoft.com/office/officeart/2005/8/layout/cycle1">
   <dgm:title val=""/>
   <dgm:desc val=""/>
@@ -3892,6 +6739,1040 @@
 </dgm:styleDef>
 </file>
 
+<file path=ppt/diagrams/quickStyle2.xml><?xml version="1.0" encoding="utf-8"?>
+<dgm:styleDef xmlns:dgm="http://schemas.openxmlformats.org/drawingml/2006/diagram" xmlns:a="http://schemas.openxmlformats.org/drawingml/2006/main" uniqueId="urn:microsoft.com/office/officeart/2005/8/quickstyle/simple1">
+  <dgm:title val=""/>
+  <dgm:desc val=""/>
+  <dgm:catLst>
+    <dgm:cat type="simple" pri="10100"/>
+  </dgm:catLst>
+  <dgm:scene3d>
+    <a:camera prst="orthographicFront"/>
+    <a:lightRig rig="threePt" dir="t"/>
+  </dgm:scene3d>
+  <dgm:styleLbl name="node0">
+    <dgm:scene3d>
+      <a:camera prst="orthographicFront"/>
+      <a:lightRig rig="threePt" dir="t"/>
+    </dgm:scene3d>
+    <dgm:sp3d/>
+    <dgm:txPr/>
+    <dgm:style>
+      <a:lnRef idx="2">
+        <a:scrgbClr r="0" g="0" b="0"/>
+      </a:lnRef>
+      <a:fillRef idx="1">
+        <a:scrgbClr r="0" g="0" b="0"/>
+      </a:fillRef>
+      <a:effectRef idx="0">
+        <a:scrgbClr r="0" g="0" b="0"/>
+      </a:effectRef>
+      <a:fontRef idx="minor">
+        <a:schemeClr val="lt1"/>
+      </a:fontRef>
+    </dgm:style>
+  </dgm:styleLbl>
+  <dgm:styleLbl name="lnNode1">
+    <dgm:scene3d>
+      <a:camera prst="orthographicFront"/>
+      <a:lightRig rig="threePt" dir="t"/>
+    </dgm:scene3d>
+    <dgm:sp3d/>
+    <dgm:txPr/>
+    <dgm:style>
+      <a:lnRef idx="2">
+        <a:scrgbClr r="0" g="0" b="0"/>
+      </a:lnRef>
+      <a:fillRef idx="1">
+        <a:scrgbClr r="0" g="0" b="0"/>
+      </a:fillRef>
+      <a:effectRef idx="0">
+        <a:scrgbClr r="0" g="0" b="0"/>
+      </a:effectRef>
+      <a:fontRef idx="minor">
+        <a:schemeClr val="lt1"/>
+      </a:fontRef>
+    </dgm:style>
+  </dgm:styleLbl>
+  <dgm:styleLbl name="vennNode1">
+    <dgm:scene3d>
+      <a:camera prst="orthographicFront"/>
+      <a:lightRig rig="threePt" dir="t"/>
+    </dgm:scene3d>
+    <dgm:sp3d/>
+    <dgm:txPr/>
+    <dgm:style>
+      <a:lnRef idx="2">
+        <a:scrgbClr r="0" g="0" b="0"/>
+      </a:lnRef>
+      <a:fillRef idx="1">
+        <a:scrgbClr r="0" g="0" b="0"/>
+      </a:fillRef>
+      <a:effectRef idx="0">
+        <a:scrgbClr r="0" g="0" b="0"/>
+      </a:effectRef>
+      <a:fontRef idx="minor">
+        <a:schemeClr val="tx1"/>
+      </a:fontRef>
+    </dgm:style>
+  </dgm:styleLbl>
+  <dgm:styleLbl name="alignNode1">
+    <dgm:scene3d>
+      <a:camera prst="orthographicFront"/>
+      <a:lightRig rig="threePt" dir="t"/>
+    </dgm:scene3d>
+    <dgm:sp3d/>
+    <dgm:txPr/>
+    <dgm:style>
+      <a:lnRef idx="2">
+        <a:scrgbClr r="0" g="0" b="0"/>
+      </a:lnRef>
+      <a:fillRef idx="1">
+        <a:scrgbClr r="0" g="0" b="0"/>
+      </a:fillRef>
+      <a:effectRef idx="0">
+        <a:scrgbClr r="0" g="0" b="0"/>
+      </a:effectRef>
+      <a:fontRef idx="minor">
+        <a:schemeClr val="lt1"/>
+      </a:fontRef>
+    </dgm:style>
+  </dgm:styleLbl>
+  <dgm:styleLbl name="node1">
+    <dgm:scene3d>
+      <a:camera prst="orthographicFront"/>
+      <a:lightRig rig="threePt" dir="t"/>
+    </dgm:scene3d>
+    <dgm:sp3d/>
+    <dgm:txPr/>
+    <dgm:style>
+      <a:lnRef idx="2">
+        <a:scrgbClr r="0" g="0" b="0"/>
+      </a:lnRef>
+      <a:fillRef idx="1">
+        <a:scrgbClr r="0" g="0" b="0"/>
+      </a:fillRef>
+      <a:effectRef idx="0">
+        <a:scrgbClr r="0" g="0" b="0"/>
+      </a:effectRef>
+      <a:fontRef idx="minor">
+        <a:schemeClr val="lt1"/>
+      </a:fontRef>
+    </dgm:style>
+  </dgm:styleLbl>
+  <dgm:styleLbl name="node2">
+    <dgm:scene3d>
+      <a:camera prst="orthographicFront"/>
+      <a:lightRig rig="threePt" dir="t"/>
+    </dgm:scene3d>
+    <dgm:sp3d/>
+    <dgm:txPr/>
+    <dgm:style>
+      <a:lnRef idx="2">
+        <a:scrgbClr r="0" g="0" b="0"/>
+      </a:lnRef>
+      <a:fillRef idx="1">
+        <a:scrgbClr r="0" g="0" b="0"/>
+      </a:fillRef>
+      <a:effectRef idx="0">
+        <a:scrgbClr r="0" g="0" b="0"/>
+      </a:effectRef>
+      <a:fontRef idx="minor">
+        <a:schemeClr val="lt1"/>
+      </a:fontRef>
+    </dgm:style>
+  </dgm:styleLbl>
+  <dgm:styleLbl name="node3">
+    <dgm:scene3d>
+      <a:camera prst="orthographicFront"/>
+      <a:lightRig rig="threePt" dir="t"/>
+    </dgm:scene3d>
+    <dgm:sp3d/>
+    <dgm:txPr/>
+    <dgm:style>
+      <a:lnRef idx="2">
+        <a:scrgbClr r="0" g="0" b="0"/>
+      </a:lnRef>
+      <a:fillRef idx="1">
+        <a:scrgbClr r="0" g="0" b="0"/>
+      </a:fillRef>
+      <a:effectRef idx="0">
+        <a:scrgbClr r="0" g="0" b="0"/>
+      </a:effectRef>
+      <a:fontRef idx="minor">
+        <a:schemeClr val="lt1"/>
+      </a:fontRef>
+    </dgm:style>
+  </dgm:styleLbl>
+  <dgm:styleLbl name="node4">
+    <dgm:scene3d>
+      <a:camera prst="orthographicFront"/>
+      <a:lightRig rig="threePt" dir="t"/>
+    </dgm:scene3d>
+    <dgm:sp3d/>
+    <dgm:txPr/>
+    <dgm:style>
+      <a:lnRef idx="2">
+        <a:scrgbClr r="0" g="0" b="0"/>
+      </a:lnRef>
+      <a:fillRef idx="1">
+        <a:scrgbClr r="0" g="0" b="0"/>
+      </a:fillRef>
+      <a:effectRef idx="0">
+        <a:scrgbClr r="0" g="0" b="0"/>
+      </a:effectRef>
+      <a:fontRef idx="minor">
+        <a:schemeClr val="lt1"/>
+      </a:fontRef>
+    </dgm:style>
+  </dgm:styleLbl>
+  <dgm:styleLbl name="fgImgPlace1">
+    <dgm:scene3d>
+      <a:camera prst="orthographicFront"/>
+      <a:lightRig rig="threePt" dir="t"/>
+    </dgm:scene3d>
+    <dgm:sp3d/>
+    <dgm:txPr/>
+    <dgm:style>
+      <a:lnRef idx="2">
+        <a:scrgbClr r="0" g="0" b="0"/>
+      </a:lnRef>
+      <a:fillRef idx="1">
+        <a:scrgbClr r="0" g="0" b="0"/>
+      </a:fillRef>
+      <a:effectRef idx="0">
+        <a:scrgbClr r="0" g="0" b="0"/>
+      </a:effectRef>
+      <a:fontRef idx="minor"/>
+    </dgm:style>
+  </dgm:styleLbl>
+  <dgm:styleLbl name="alignImgPlace1">
+    <dgm:scene3d>
+      <a:camera prst="orthographicFront"/>
+      <a:lightRig rig="threePt" dir="t"/>
+    </dgm:scene3d>
+    <dgm:sp3d/>
+    <dgm:txPr/>
+    <dgm:style>
+      <a:lnRef idx="2">
+        <a:scrgbClr r="0" g="0" b="0"/>
+      </a:lnRef>
+      <a:fillRef idx="1">
+        <a:scrgbClr r="0" g="0" b="0"/>
+      </a:fillRef>
+      <a:effectRef idx="0">
+        <a:scrgbClr r="0" g="0" b="0"/>
+      </a:effectRef>
+      <a:fontRef idx="minor"/>
+    </dgm:style>
+  </dgm:styleLbl>
+  <dgm:styleLbl name="bgImgPlace1">
+    <dgm:scene3d>
+      <a:camera prst="orthographicFront"/>
+      <a:lightRig rig="threePt" dir="t"/>
+    </dgm:scene3d>
+    <dgm:sp3d/>
+    <dgm:txPr/>
+    <dgm:style>
+      <a:lnRef idx="2">
+        <a:scrgbClr r="0" g="0" b="0"/>
+      </a:lnRef>
+      <a:fillRef idx="1">
+        <a:scrgbClr r="0" g="0" b="0"/>
+      </a:fillRef>
+      <a:effectRef idx="0">
+        <a:scrgbClr r="0" g="0" b="0"/>
+      </a:effectRef>
+      <a:fontRef idx="minor"/>
+    </dgm:style>
+  </dgm:styleLbl>
+  <dgm:styleLbl name="sibTrans2D1">
+    <dgm:scene3d>
+      <a:camera prst="orthographicFront"/>
+      <a:lightRig rig="threePt" dir="t"/>
+    </dgm:scene3d>
+    <dgm:sp3d/>
+    <dgm:txPr/>
+    <dgm:style>
+      <a:lnRef idx="0">
+        <a:scrgbClr r="0" g="0" b="0"/>
+      </a:lnRef>
+      <a:fillRef idx="1">
+        <a:scrgbClr r="0" g="0" b="0"/>
+      </a:fillRef>
+      <a:effectRef idx="0">
+        <a:scrgbClr r="0" g="0" b="0"/>
+      </a:effectRef>
+      <a:fontRef idx="minor">
+        <a:schemeClr val="lt1"/>
+      </a:fontRef>
+    </dgm:style>
+  </dgm:styleLbl>
+  <dgm:styleLbl name="fgSibTrans2D1">
+    <dgm:scene3d>
+      <a:camera prst="orthographicFront"/>
+      <a:lightRig rig="threePt" dir="t"/>
+    </dgm:scene3d>
+    <dgm:sp3d/>
+    <dgm:txPr/>
+    <dgm:style>
+      <a:lnRef idx="0">
+        <a:scrgbClr r="0" g="0" b="0"/>
+      </a:lnRef>
+      <a:fillRef idx="1">
+        <a:scrgbClr r="0" g="0" b="0"/>
+      </a:fillRef>
+      <a:effectRef idx="0">
+        <a:scrgbClr r="0" g="0" b="0"/>
+      </a:effectRef>
+      <a:fontRef idx="minor">
+        <a:schemeClr val="lt1"/>
+      </a:fontRef>
+    </dgm:style>
+  </dgm:styleLbl>
+  <dgm:styleLbl name="bgSibTrans2D1">
+    <dgm:scene3d>
+      <a:camera prst="orthographicFront"/>
+      <a:lightRig rig="threePt" dir="t"/>
+    </dgm:scene3d>
+    <dgm:sp3d/>
+    <dgm:txPr/>
+    <dgm:style>
+      <a:lnRef idx="0">
+        <a:scrgbClr r="0" g="0" b="0"/>
+      </a:lnRef>
+      <a:fillRef idx="1">
+        <a:scrgbClr r="0" g="0" b="0"/>
+      </a:fillRef>
+      <a:effectRef idx="0">
+        <a:scrgbClr r="0" g="0" b="0"/>
+      </a:effectRef>
+      <a:fontRef idx="minor">
+        <a:schemeClr val="lt1"/>
+      </a:fontRef>
+    </dgm:style>
+  </dgm:styleLbl>
+  <dgm:styleLbl name="sibTrans1D1">
+    <dgm:scene3d>
+      <a:camera prst="orthographicFront"/>
+      <a:lightRig rig="threePt" dir="t"/>
+    </dgm:scene3d>
+    <dgm:sp3d/>
+    <dgm:txPr/>
+    <dgm:style>
+      <a:lnRef idx="1">
+        <a:scrgbClr r="0" g="0" b="0"/>
+      </a:lnRef>
+      <a:fillRef idx="0">
+        <a:scrgbClr r="0" g="0" b="0"/>
+      </a:fillRef>
+      <a:effectRef idx="0">
+        <a:scrgbClr r="0" g="0" b="0"/>
+      </a:effectRef>
+      <a:fontRef idx="minor"/>
+    </dgm:style>
+  </dgm:styleLbl>
+  <dgm:styleLbl name="callout">
+    <dgm:scene3d>
+      <a:camera prst="orthographicFront"/>
+      <a:lightRig rig="threePt" dir="t"/>
+    </dgm:scene3d>
+    <dgm:sp3d/>
+    <dgm:txPr/>
+    <dgm:style>
+      <a:lnRef idx="2">
+        <a:scrgbClr r="0" g="0" b="0"/>
+      </a:lnRef>
+      <a:fillRef idx="1">
+        <a:scrgbClr r="0" g="0" b="0"/>
+      </a:fillRef>
+      <a:effectRef idx="0">
+        <a:scrgbClr r="0" g="0" b="0"/>
+      </a:effectRef>
+      <a:fontRef idx="minor"/>
+    </dgm:style>
+  </dgm:styleLbl>
+  <dgm:styleLbl name="asst0">
+    <dgm:scene3d>
+      <a:camera prst="orthographicFront"/>
+      <a:lightRig rig="threePt" dir="t"/>
+    </dgm:scene3d>
+    <dgm:sp3d/>
+    <dgm:txPr/>
+    <dgm:style>
+      <a:lnRef idx="2">
+        <a:scrgbClr r="0" g="0" b="0"/>
+      </a:lnRef>
+      <a:fillRef idx="1">
+        <a:scrgbClr r="0" g="0" b="0"/>
+      </a:fillRef>
+      <a:effectRef idx="0">
+        <a:scrgbClr r="0" g="0" b="0"/>
+      </a:effectRef>
+      <a:fontRef idx="minor">
+        <a:schemeClr val="lt1"/>
+      </a:fontRef>
+    </dgm:style>
+  </dgm:styleLbl>
+  <dgm:styleLbl name="asst1">
+    <dgm:scene3d>
+      <a:camera prst="orthographicFront"/>
+      <a:lightRig rig="threePt" dir="t"/>
+    </dgm:scene3d>
+    <dgm:sp3d/>
+    <dgm:txPr/>
+    <dgm:style>
+      <a:lnRef idx="2">
+        <a:scrgbClr r="0" g="0" b="0"/>
+      </a:lnRef>
+      <a:fillRef idx="1">
+        <a:scrgbClr r="0" g="0" b="0"/>
+      </a:fillRef>
+      <a:effectRef idx="0">
+        <a:scrgbClr r="0" g="0" b="0"/>
+      </a:effectRef>
+      <a:fontRef idx="minor">
+        <a:schemeClr val="lt1"/>
+      </a:fontRef>
+    </dgm:style>
+  </dgm:styleLbl>
+  <dgm:styleLbl name="asst2">
+    <dgm:scene3d>
+      <a:camera prst="orthographicFront"/>
+      <a:lightRig rig="threePt" dir="t"/>
+    </dgm:scene3d>
+    <dgm:sp3d/>
+    <dgm:txPr/>
+    <dgm:style>
+      <a:lnRef idx="2">
+        <a:scrgbClr r="0" g="0" b="0"/>
+      </a:lnRef>
+      <a:fillRef idx="1">
+        <a:scrgbClr r="0" g="0" b="0"/>
+      </a:fillRef>
+      <a:effectRef idx="0">
+        <a:scrgbClr r="0" g="0" b="0"/>
+      </a:effectRef>
+      <a:fontRef idx="minor">
+        <a:schemeClr val="lt1"/>
+      </a:fontRef>
+    </dgm:style>
+  </dgm:styleLbl>
+  <dgm:styleLbl name="asst3">
+    <dgm:scene3d>
+      <a:camera prst="orthographicFront"/>
+      <a:lightRig rig="threePt" dir="t"/>
+    </dgm:scene3d>
+    <dgm:sp3d/>
+    <dgm:txPr/>
+    <dgm:style>
+      <a:lnRef idx="2">
+        <a:scrgbClr r="0" g="0" b="0"/>
+      </a:lnRef>
+      <a:fillRef idx="1">
+        <a:scrgbClr r="0" g="0" b="0"/>
+      </a:fillRef>
+      <a:effectRef idx="0">
+        <a:scrgbClr r="0" g="0" b="0"/>
+      </a:effectRef>
+      <a:fontRef idx="minor">
+        <a:schemeClr val="lt1"/>
+      </a:fontRef>
+    </dgm:style>
+  </dgm:styleLbl>
+  <dgm:styleLbl name="asst4">
+    <dgm:scene3d>
+      <a:camera prst="orthographicFront"/>
+      <a:lightRig rig="threePt" dir="t"/>
+    </dgm:scene3d>
+    <dgm:sp3d/>
+    <dgm:txPr/>
+    <dgm:style>
+      <a:lnRef idx="2">
+        <a:scrgbClr r="0" g="0" b="0"/>
+      </a:lnRef>
+      <a:fillRef idx="1">
+        <a:scrgbClr r="0" g="0" b="0"/>
+      </a:fillRef>
+      <a:effectRef idx="0">
+        <a:scrgbClr r="0" g="0" b="0"/>
+      </a:effectRef>
+      <a:fontRef idx="minor">
+        <a:schemeClr val="lt1"/>
+      </a:fontRef>
+    </dgm:style>
+  </dgm:styleLbl>
+  <dgm:styleLbl name="parChTrans2D1">
+    <dgm:scene3d>
+      <a:camera prst="orthographicFront"/>
+      <a:lightRig rig="threePt" dir="t"/>
+    </dgm:scene3d>
+    <dgm:sp3d/>
+    <dgm:txPr/>
+    <dgm:style>
+      <a:lnRef idx="2">
+        <a:scrgbClr r="0" g="0" b="0"/>
+      </a:lnRef>
+      <a:fillRef idx="1">
+        <a:scrgbClr r="0" g="0" b="0"/>
+      </a:fillRef>
+      <a:effectRef idx="0">
+        <a:scrgbClr r="0" g="0" b="0"/>
+      </a:effectRef>
+      <a:fontRef idx="minor">
+        <a:schemeClr val="lt1"/>
+      </a:fontRef>
+    </dgm:style>
+  </dgm:styleLbl>
+  <dgm:styleLbl name="parChTrans2D2">
+    <dgm:scene3d>
+      <a:camera prst="orthographicFront"/>
+      <a:lightRig rig="threePt" dir="t"/>
+    </dgm:scene3d>
+    <dgm:sp3d/>
+    <dgm:txPr/>
+    <dgm:style>
+      <a:lnRef idx="2">
+        <a:scrgbClr r="0" g="0" b="0"/>
+      </a:lnRef>
+      <a:fillRef idx="1">
+        <a:scrgbClr r="0" g="0" b="0"/>
+      </a:fillRef>
+      <a:effectRef idx="0">
+        <a:scrgbClr r="0" g="0" b="0"/>
+      </a:effectRef>
+      <a:fontRef idx="minor">
+        <a:schemeClr val="lt1"/>
+      </a:fontRef>
+    </dgm:style>
+  </dgm:styleLbl>
+  <dgm:styleLbl name="parChTrans2D3">
+    <dgm:scene3d>
+      <a:camera prst="orthographicFront"/>
+      <a:lightRig rig="threePt" dir="t"/>
+    </dgm:scene3d>
+    <dgm:sp3d/>
+    <dgm:txPr/>
+    <dgm:style>
+      <a:lnRef idx="2">
+        <a:scrgbClr r="0" g="0" b="0"/>
+      </a:lnRef>
+      <a:fillRef idx="1">
+        <a:scrgbClr r="0" g="0" b="0"/>
+      </a:fillRef>
+      <a:effectRef idx="0">
+        <a:scrgbClr r="0" g="0" b="0"/>
+      </a:effectRef>
+      <a:fontRef idx="minor">
+        <a:schemeClr val="lt1"/>
+      </a:fontRef>
+    </dgm:style>
+  </dgm:styleLbl>
+  <dgm:styleLbl name="parChTrans2D4">
+    <dgm:scene3d>
+      <a:camera prst="orthographicFront"/>
+      <a:lightRig rig="threePt" dir="t"/>
+    </dgm:scene3d>
+    <dgm:sp3d/>
+    <dgm:txPr/>
+    <dgm:style>
+      <a:lnRef idx="2">
+        <a:scrgbClr r="0" g="0" b="0"/>
+      </a:lnRef>
+      <a:fillRef idx="1">
+        <a:scrgbClr r="0" g="0" b="0"/>
+      </a:fillRef>
+      <a:effectRef idx="0">
+        <a:scrgbClr r="0" g="0" b="0"/>
+      </a:effectRef>
+      <a:fontRef idx="minor">
+        <a:schemeClr val="lt1"/>
+      </a:fontRef>
+    </dgm:style>
+  </dgm:styleLbl>
+  <dgm:styleLbl name="parChTrans1D1">
+    <dgm:scene3d>
+      <a:camera prst="orthographicFront"/>
+      <a:lightRig rig="threePt" dir="t"/>
+    </dgm:scene3d>
+    <dgm:sp3d/>
+    <dgm:txPr/>
+    <dgm:style>
+      <a:lnRef idx="2">
+        <a:scrgbClr r="0" g="0" b="0"/>
+      </a:lnRef>
+      <a:fillRef idx="0">
+        <a:scrgbClr r="0" g="0" b="0"/>
+      </a:fillRef>
+      <a:effectRef idx="0">
+        <a:scrgbClr r="0" g="0" b="0"/>
+      </a:effectRef>
+      <a:fontRef idx="minor"/>
+    </dgm:style>
+  </dgm:styleLbl>
+  <dgm:styleLbl name="parChTrans1D2">
+    <dgm:scene3d>
+      <a:camera prst="orthographicFront"/>
+      <a:lightRig rig="threePt" dir="t"/>
+    </dgm:scene3d>
+    <dgm:sp3d/>
+    <dgm:txPr/>
+    <dgm:style>
+      <a:lnRef idx="2">
+        <a:scrgbClr r="0" g="0" b="0"/>
+      </a:lnRef>
+      <a:fillRef idx="0">
+        <a:scrgbClr r="0" g="0" b="0"/>
+      </a:fillRef>
+      <a:effectRef idx="0">
+        <a:scrgbClr r="0" g="0" b="0"/>
+      </a:effectRef>
+      <a:fontRef idx="minor"/>
+    </dgm:style>
+  </dgm:styleLbl>
+  <dgm:styleLbl name="parChTrans1D3">
+    <dgm:scene3d>
+      <a:camera prst="orthographicFront"/>
+      <a:lightRig rig="threePt" dir="t"/>
+    </dgm:scene3d>
+    <dgm:sp3d/>
+    <dgm:txPr/>
+    <dgm:style>
+      <a:lnRef idx="2">
+        <a:scrgbClr r="0" g="0" b="0"/>
+      </a:lnRef>
+      <a:fillRef idx="0">
+        <a:scrgbClr r="0" g="0" b="0"/>
+      </a:fillRef>
+      <a:effectRef idx="0">
+        <a:scrgbClr r="0" g="0" b="0"/>
+      </a:effectRef>
+      <a:fontRef idx="minor"/>
+    </dgm:style>
+  </dgm:styleLbl>
+  <dgm:styleLbl name="parChTrans1D4">
+    <dgm:scene3d>
+      <a:camera prst="orthographicFront"/>
+      <a:lightRig rig="threePt" dir="t"/>
+    </dgm:scene3d>
+    <dgm:sp3d/>
+    <dgm:txPr/>
+    <dgm:style>
+      <a:lnRef idx="2">
+        <a:scrgbClr r="0" g="0" b="0"/>
+      </a:lnRef>
+      <a:fillRef idx="0">
+        <a:scrgbClr r="0" g="0" b="0"/>
+      </a:fillRef>
+      <a:effectRef idx="0">
+        <a:scrgbClr r="0" g="0" b="0"/>
+      </a:effectRef>
+      <a:fontRef idx="minor"/>
+    </dgm:style>
+  </dgm:styleLbl>
+  <dgm:styleLbl name="fgAcc1">
+    <dgm:scene3d>
+      <a:camera prst="orthographicFront"/>
+      <a:lightRig rig="threePt" dir="t"/>
+    </dgm:scene3d>
+    <dgm:sp3d/>
+    <dgm:txPr/>
+    <dgm:style>
+      <a:lnRef idx="2">
+        <a:scrgbClr r="0" g="0" b="0"/>
+      </a:lnRef>
+      <a:fillRef idx="1">
+        <a:scrgbClr r="0" g="0" b="0"/>
+      </a:fillRef>
+      <a:effectRef idx="0">
+        <a:scrgbClr r="0" g="0" b="0"/>
+      </a:effectRef>
+      <a:fontRef idx="minor"/>
+    </dgm:style>
+  </dgm:styleLbl>
+  <dgm:styleLbl name="conFgAcc1">
+    <dgm:scene3d>
+      <a:camera prst="orthographicFront"/>
+      <a:lightRig rig="threePt" dir="t"/>
+    </dgm:scene3d>
+    <dgm:sp3d/>
+    <dgm:txPr/>
+    <dgm:style>
+      <a:lnRef idx="2">
+        <a:scrgbClr r="0" g="0" b="0"/>
+      </a:lnRef>
+      <a:fillRef idx="1">
+        <a:scrgbClr r="0" g="0" b="0"/>
+      </a:fillRef>
+      <a:effectRef idx="0">
+        <a:scrgbClr r="0" g="0" b="0"/>
+      </a:effectRef>
+      <a:fontRef idx="minor"/>
+    </dgm:style>
+  </dgm:styleLbl>
+  <dgm:styleLbl name="alignAcc1">
+    <dgm:scene3d>
+      <a:camera prst="orthographicFront"/>
+      <a:lightRig rig="threePt" dir="t"/>
+    </dgm:scene3d>
+    <dgm:sp3d/>
+    <dgm:txPr/>
+    <dgm:style>
+      <a:lnRef idx="2">
+        <a:scrgbClr r="0" g="0" b="0"/>
+      </a:lnRef>
+      <a:fillRef idx="1">
+        <a:scrgbClr r="0" g="0" b="0"/>
+      </a:fillRef>
+      <a:effectRef idx="0">
+        <a:scrgbClr r="0" g="0" b="0"/>
+      </a:effectRef>
+      <a:fontRef idx="minor"/>
+    </dgm:style>
+  </dgm:styleLbl>
+  <dgm:styleLbl name="trAlignAcc1">
+    <dgm:scene3d>
+      <a:camera prst="orthographicFront"/>
+      <a:lightRig rig="threePt" dir="t"/>
+    </dgm:scene3d>
+    <dgm:sp3d/>
+    <dgm:txPr/>
+    <dgm:style>
+      <a:lnRef idx="1">
+        <a:scrgbClr r="0" g="0" b="0"/>
+      </a:lnRef>
+      <a:fillRef idx="1">
+        <a:scrgbClr r="0" g="0" b="0"/>
+      </a:fillRef>
+      <a:effectRef idx="0">
+        <a:scrgbClr r="0" g="0" b="0"/>
+      </a:effectRef>
+      <a:fontRef idx="minor"/>
+    </dgm:style>
+  </dgm:styleLbl>
+  <dgm:styleLbl name="bgAcc1">
+    <dgm:scene3d>
+      <a:camera prst="orthographicFront"/>
+      <a:lightRig rig="threePt" dir="t"/>
+    </dgm:scene3d>
+    <dgm:sp3d/>
+    <dgm:txPr/>
+    <dgm:style>
+      <a:lnRef idx="2">
+        <a:scrgbClr r="0" g="0" b="0"/>
+      </a:lnRef>
+      <a:fillRef idx="1">
+        <a:scrgbClr r="0" g="0" b="0"/>
+      </a:fillRef>
+      <a:effectRef idx="0">
+        <a:scrgbClr r="0" g="0" b="0"/>
+      </a:effectRef>
+      <a:fontRef idx="minor"/>
+    </dgm:style>
+  </dgm:styleLbl>
+  <dgm:styleLbl name="solidFgAcc1">
+    <dgm:scene3d>
+      <a:camera prst="orthographicFront"/>
+      <a:lightRig rig="threePt" dir="t"/>
+    </dgm:scene3d>
+    <dgm:sp3d/>
+    <dgm:txPr/>
+    <dgm:style>
+      <a:lnRef idx="2">
+        <a:scrgbClr r="0" g="0" b="0"/>
+      </a:lnRef>
+      <a:fillRef idx="1">
+        <a:scrgbClr r="0" g="0" b="0"/>
+      </a:fillRef>
+      <a:effectRef idx="0">
+        <a:scrgbClr r="0" g="0" b="0"/>
+      </a:effectRef>
+      <a:fontRef idx="minor"/>
+    </dgm:style>
+  </dgm:styleLbl>
+  <dgm:styleLbl name="solidAlignAcc1">
+    <dgm:scene3d>
+      <a:camera prst="orthographicFront"/>
+      <a:lightRig rig="threePt" dir="t"/>
+    </dgm:scene3d>
+    <dgm:sp3d/>
+    <dgm:txPr/>
+    <dgm:style>
+      <a:lnRef idx="2">
+        <a:scrgbClr r="0" g="0" b="0"/>
+      </a:lnRef>
+      <a:fillRef idx="1">
+        <a:scrgbClr r="0" g="0" b="0"/>
+      </a:fillRef>
+      <a:effectRef idx="0">
+        <a:scrgbClr r="0" g="0" b="0"/>
+      </a:effectRef>
+      <a:fontRef idx="minor"/>
+    </dgm:style>
+  </dgm:styleLbl>
+  <dgm:styleLbl name="solidBgAcc1">
+    <dgm:scene3d>
+      <a:camera prst="orthographicFront"/>
+      <a:lightRig rig="threePt" dir="t"/>
+    </dgm:scene3d>
+    <dgm:sp3d/>
+    <dgm:txPr/>
+    <dgm:style>
+      <a:lnRef idx="2">
+        <a:scrgbClr r="0" g="0" b="0"/>
+      </a:lnRef>
+      <a:fillRef idx="1">
+        <a:scrgbClr r="0" g="0" b="0"/>
+      </a:fillRef>
+      <a:effectRef idx="0">
+        <a:scrgbClr r="0" g="0" b="0"/>
+      </a:effectRef>
+      <a:fontRef idx="minor"/>
+    </dgm:style>
+  </dgm:styleLbl>
+  <dgm:styleLbl name="fgAccFollowNode1">
+    <dgm:scene3d>
+      <a:camera prst="orthographicFront"/>
+      <a:lightRig rig="threePt" dir="t"/>
+    </dgm:scene3d>
+    <dgm:sp3d/>
+    <dgm:txPr/>
+    <dgm:style>
+      <a:lnRef idx="2">
+        <a:scrgbClr r="0" g="0" b="0"/>
+      </a:lnRef>
+      <a:fillRef idx="1">
+        <a:scrgbClr r="0" g="0" b="0"/>
+      </a:fillRef>
+      <a:effectRef idx="0">
+        <a:scrgbClr r="0" g="0" b="0"/>
+      </a:effectRef>
+      <a:fontRef idx="minor"/>
+    </dgm:style>
+  </dgm:styleLbl>
+  <dgm:styleLbl name="alignAccFollowNode1">
+    <dgm:scene3d>
+      <a:camera prst="orthographicFront"/>
+      <a:lightRig rig="threePt" dir="t"/>
+    </dgm:scene3d>
+    <dgm:sp3d/>
+    <dgm:txPr/>
+    <dgm:style>
+      <a:lnRef idx="2">
+        <a:scrgbClr r="0" g="0" b="0"/>
+      </a:lnRef>
+      <a:fillRef idx="1">
+        <a:scrgbClr r="0" g="0" b="0"/>
+      </a:fillRef>
+      <a:effectRef idx="0">
+        <a:scrgbClr r="0" g="0" b="0"/>
+      </a:effectRef>
+      <a:fontRef idx="minor"/>
+    </dgm:style>
+  </dgm:styleLbl>
+  <dgm:styleLbl name="bgAccFollowNode1">
+    <dgm:scene3d>
+      <a:camera prst="orthographicFront"/>
+      <a:lightRig rig="threePt" dir="t"/>
+    </dgm:scene3d>
+    <dgm:sp3d/>
+    <dgm:txPr/>
+    <dgm:style>
+      <a:lnRef idx="2">
+        <a:scrgbClr r="0" g="0" b="0"/>
+      </a:lnRef>
+      <a:fillRef idx="1">
+        <a:scrgbClr r="0" g="0" b="0"/>
+      </a:fillRef>
+      <a:effectRef idx="0">
+        <a:scrgbClr r="0" g="0" b="0"/>
+      </a:effectRef>
+      <a:fontRef idx="minor"/>
+    </dgm:style>
+  </dgm:styleLbl>
+  <dgm:styleLbl name="fgAcc0">
+    <dgm:scene3d>
+      <a:camera prst="orthographicFront"/>
+      <a:lightRig rig="threePt" dir="t"/>
+    </dgm:scene3d>
+    <dgm:sp3d/>
+    <dgm:txPr/>
+    <dgm:style>
+      <a:lnRef idx="2">
+        <a:scrgbClr r="0" g="0" b="0"/>
+      </a:lnRef>
+      <a:fillRef idx="1">
+        <a:scrgbClr r="0" g="0" b="0"/>
+      </a:fillRef>
+      <a:effectRef idx="0">
+        <a:scrgbClr r="0" g="0" b="0"/>
+      </a:effectRef>
+      <a:fontRef idx="minor"/>
+    </dgm:style>
+  </dgm:styleLbl>
+  <dgm:styleLbl name="fgAcc2">
+    <dgm:scene3d>
+      <a:camera prst="orthographicFront"/>
+      <a:lightRig rig="threePt" dir="t"/>
+    </dgm:scene3d>
+    <dgm:sp3d/>
+    <dgm:txPr/>
+    <dgm:style>
+      <a:lnRef idx="2">
+        <a:scrgbClr r="0" g="0" b="0"/>
+      </a:lnRef>
+      <a:fillRef idx="1">
+        <a:scrgbClr r="0" g="0" b="0"/>
+      </a:fillRef>
+      <a:effectRef idx="0">
+        <a:scrgbClr r="0" g="0" b="0"/>
+      </a:effectRef>
+      <a:fontRef idx="minor"/>
+    </dgm:style>
+  </dgm:styleLbl>
+  <dgm:styleLbl name="fgAcc3">
+    <dgm:scene3d>
+      <a:camera prst="orthographicFront"/>
+      <a:lightRig rig="threePt" dir="t"/>
+    </dgm:scene3d>
+    <dgm:sp3d/>
+    <dgm:txPr/>
+    <dgm:style>
+      <a:lnRef idx="2">
+        <a:scrgbClr r="0" g="0" b="0"/>
+      </a:lnRef>
+      <a:fillRef idx="1">
+        <a:scrgbClr r="0" g="0" b="0"/>
+      </a:fillRef>
+      <a:effectRef idx="0">
+        <a:scrgbClr r="0" g="0" b="0"/>
+      </a:effectRef>
+      <a:fontRef idx="minor"/>
+    </dgm:style>
+  </dgm:styleLbl>
+  <dgm:styleLbl name="fgAcc4">
+    <dgm:scene3d>
+      <a:camera prst="orthographicFront"/>
+      <a:lightRig rig="threePt" dir="t"/>
+    </dgm:scene3d>
+    <dgm:sp3d/>
+    <dgm:txPr/>
+    <dgm:style>
+      <a:lnRef idx="2">
+        <a:scrgbClr r="0" g="0" b="0"/>
+      </a:lnRef>
+      <a:fillRef idx="1">
+        <a:scrgbClr r="0" g="0" b="0"/>
+      </a:fillRef>
+      <a:effectRef idx="0">
+        <a:scrgbClr r="0" g="0" b="0"/>
+      </a:effectRef>
+      <a:fontRef idx="minor"/>
+    </dgm:style>
+  </dgm:styleLbl>
+  <dgm:styleLbl name="bgShp">
+    <dgm:scene3d>
+      <a:camera prst="orthographicFront"/>
+      <a:lightRig rig="threePt" dir="t"/>
+    </dgm:scene3d>
+    <dgm:sp3d/>
+    <dgm:txPr/>
+    <dgm:style>
+      <a:lnRef idx="0">
+        <a:scrgbClr r="0" g="0" b="0"/>
+      </a:lnRef>
+      <a:fillRef idx="1">
+        <a:scrgbClr r="0" g="0" b="0"/>
+      </a:fillRef>
+      <a:effectRef idx="0">
+        <a:scrgbClr r="0" g="0" b="0"/>
+      </a:effectRef>
+      <a:fontRef idx="minor"/>
+    </dgm:style>
+  </dgm:styleLbl>
+  <dgm:styleLbl name="dkBgShp">
+    <dgm:scene3d>
+      <a:camera prst="orthographicFront"/>
+      <a:lightRig rig="threePt" dir="t"/>
+    </dgm:scene3d>
+    <dgm:sp3d/>
+    <dgm:txPr/>
+    <dgm:style>
+      <a:lnRef idx="0">
+        <a:scrgbClr r="0" g="0" b="0"/>
+      </a:lnRef>
+      <a:fillRef idx="1">
+        <a:scrgbClr r="0" g="0" b="0"/>
+      </a:fillRef>
+      <a:effectRef idx="0">
+        <a:scrgbClr r="0" g="0" b="0"/>
+      </a:effectRef>
+      <a:fontRef idx="minor"/>
+    </dgm:style>
+  </dgm:styleLbl>
+  <dgm:styleLbl name="trBgShp">
+    <dgm:scene3d>
+      <a:camera prst="orthographicFront"/>
+      <a:lightRig rig="threePt" dir="t"/>
+    </dgm:scene3d>
+    <dgm:sp3d/>
+    <dgm:txPr/>
+    <dgm:style>
+      <a:lnRef idx="0">
+        <a:scrgbClr r="0" g="0" b="0"/>
+      </a:lnRef>
+      <a:fillRef idx="1">
+        <a:scrgbClr r="0" g="0" b="0"/>
+      </a:fillRef>
+      <a:effectRef idx="0">
+        <a:scrgbClr r="0" g="0" b="0"/>
+      </a:effectRef>
+      <a:fontRef idx="minor"/>
+    </dgm:style>
+  </dgm:styleLbl>
+  <dgm:styleLbl name="fgShp">
+    <dgm:scene3d>
+      <a:camera prst="orthographicFront"/>
+      <a:lightRig rig="threePt" dir="t"/>
+    </dgm:scene3d>
+    <dgm:sp3d/>
+    <dgm:txPr/>
+    <dgm:style>
+      <a:lnRef idx="2">
+        <a:scrgbClr r="0" g="0" b="0"/>
+      </a:lnRef>
+      <a:fillRef idx="1">
+        <a:scrgbClr r="0" g="0" b="0"/>
+      </a:fillRef>
+      <a:effectRef idx="0">
+        <a:scrgbClr r="0" g="0" b="0"/>
+      </a:effectRef>
+      <a:fontRef idx="minor"/>
+    </dgm:style>
+  </dgm:styleLbl>
+  <dgm:styleLbl name="revTx">
+    <dgm:scene3d>
+      <a:camera prst="orthographicFront"/>
+      <a:lightRig rig="threePt" dir="t"/>
+    </dgm:scene3d>
+    <dgm:sp3d/>
+    <dgm:txPr/>
+    <dgm:style>
+      <a:lnRef idx="0">
+        <a:scrgbClr r="0" g="0" b="0"/>
+      </a:lnRef>
+      <a:fillRef idx="0">
+        <a:scrgbClr r="0" g="0" b="0"/>
+      </a:fillRef>
+      <a:effectRef idx="0">
+        <a:scrgbClr r="0" g="0" b="0"/>
+      </a:effectRef>
+      <a:fontRef idx="minor"/>
+    </dgm:style>
+  </dgm:styleLbl>
+</dgm:styleDef>
+</file>
+
 <file path=ppt/notesMasters/notesMaster1.xml><?xml version="1.0" encoding="utf-8"?>
 <p:notesMaster xmlns:a="http://schemas.openxmlformats.org/drawingml/2006/main" xmlns:r="http://schemas.openxmlformats.org/officeDocument/2006/relationships" xmlns:p="http://schemas.openxmlformats.org/presentationml/2006/main">
   <p:cSld>
@@ -3974,7 +7855,7 @@
           <a:p>
             <a:fld id="{108C534B-2FFB-4723-A7EE-0028887F4A4C}" type="datetimeFigureOut">
               <a:rPr lang="fr-FR" smtClean="0"/>
-              <a:t>26/03/2024</a:t>
+              <a:t>27/03/2024</a:t>
             </a:fld>
             <a:endParaRPr lang="fr-FR"/>
           </a:p>
@@ -4340,6 +8221,100 @@
 </p:notes>
 </file>
 
+<file path=ppt/notesSlides/notesSlide2.xml><?xml version="1.0" encoding="utf-8"?>
+<p:notes xmlns:a="http://schemas.openxmlformats.org/drawingml/2006/main" xmlns:r="http://schemas.openxmlformats.org/officeDocument/2006/relationships" xmlns:p="http://schemas.openxmlformats.org/presentationml/2006/main">
+  <p:cSld>
+    <p:spTree>
+      <p:nvGrpSpPr>
+        <p:cNvPr id="1" name=""/>
+        <p:cNvGrpSpPr/>
+        <p:nvPr/>
+      </p:nvGrpSpPr>
+      <p:grpSpPr>
+        <a:xfrm>
+          <a:off x="0" y="0"/>
+          <a:ext cx="0" cy="0"/>
+          <a:chOff x="0" y="0"/>
+          <a:chExt cx="0" cy="0"/>
+        </a:xfrm>
+      </p:grpSpPr>
+      <p:sp>
+        <p:nvSpPr>
+          <p:cNvPr id="2" name="Espace réservé de l'image des diapositives 1"/>
+          <p:cNvSpPr>
+            <a:spLocks noGrp="1" noRot="1" noChangeAspect="1"/>
+          </p:cNvSpPr>
+          <p:nvPr>
+            <p:ph type="sldImg"/>
+          </p:nvPr>
+        </p:nvSpPr>
+        <p:spPr/>
+      </p:sp>
+      <p:sp>
+        <p:nvSpPr>
+          <p:cNvPr id="3" name="Espace réservé des notes 2"/>
+          <p:cNvSpPr>
+            <a:spLocks noGrp="1"/>
+          </p:cNvSpPr>
+          <p:nvPr>
+            <p:ph type="body" idx="1"/>
+          </p:nvPr>
+        </p:nvSpPr>
+        <p:spPr/>
+        <p:txBody>
+          <a:bodyPr/>
+          <a:lstStyle/>
+          <a:p>
+            <a:r>
+              <a:rPr lang="en-US" dirty="0"/>
+              <a:t>Who will use the solution to your problem? </a:t>
+            </a:r>
+          </a:p>
+          <a:p>
+            <a:r>
+              <a:rPr lang="en-US" dirty="0"/>
+              <a:t>The company's customers, internal teams, managers?</a:t>
+            </a:r>
+            <a:endParaRPr lang="fr-FR" dirty="0"/>
+          </a:p>
+        </p:txBody>
+      </p:sp>
+      <p:sp>
+        <p:nvSpPr>
+          <p:cNvPr id="4" name="Espace réservé du numéro de diapositive 3"/>
+          <p:cNvSpPr>
+            <a:spLocks noGrp="1"/>
+          </p:cNvSpPr>
+          <p:nvPr>
+            <p:ph type="sldNum" sz="quarter" idx="5"/>
+          </p:nvPr>
+        </p:nvSpPr>
+        <p:spPr/>
+        <p:txBody>
+          <a:bodyPr/>
+          <a:lstStyle/>
+          <a:p>
+            <a:fld id="{15637A7A-FACC-4B9B-AFF9-9B9BAE957224}" type="slidenum">
+              <a:rPr lang="fr-FR" smtClean="0"/>
+              <a:t>7</a:t>
+            </a:fld>
+            <a:endParaRPr lang="fr-FR"/>
+          </a:p>
+        </p:txBody>
+      </p:sp>
+    </p:spTree>
+    <p:extLst>
+      <p:ext uri="{BB962C8B-B14F-4D97-AF65-F5344CB8AC3E}">
+        <p14:creationId xmlns:p14="http://schemas.microsoft.com/office/powerpoint/2010/main" val="1849268205"/>
+      </p:ext>
+    </p:extLst>
+  </p:cSld>
+  <p:clrMapOvr>
+    <a:masterClrMapping/>
+  </p:clrMapOvr>
+</p:notes>
+</file>
+
 <file path=ppt/slideLayouts/slideLayout1.xml><?xml version="1.0" encoding="utf-8"?>
 <p:sldLayout xmlns:a="http://schemas.openxmlformats.org/drawingml/2006/main" xmlns:r="http://schemas.openxmlformats.org/officeDocument/2006/relationships" xmlns:p="http://schemas.openxmlformats.org/presentationml/2006/main" type="title" preserve="1">
   <p:cSld name="Diapositive de titre">
@@ -4487,7 +8462,7 @@
           <a:p>
             <a:fld id="{A0E914F3-0C81-4A72-87EF-BDF4732DAA55}" type="datetimeFigureOut">
               <a:rPr lang="fr-FR" smtClean="0"/>
-              <a:t>26/03/2024</a:t>
+              <a:t>27/03/2024</a:t>
             </a:fld>
             <a:endParaRPr lang="fr-FR"/>
           </a:p>
@@ -4685,7 +8660,7 @@
           <a:p>
             <a:fld id="{A0E914F3-0C81-4A72-87EF-BDF4732DAA55}" type="datetimeFigureOut">
               <a:rPr lang="fr-FR" smtClean="0"/>
-              <a:t>26/03/2024</a:t>
+              <a:t>27/03/2024</a:t>
             </a:fld>
             <a:endParaRPr lang="fr-FR"/>
           </a:p>
@@ -4893,7 +8868,7 @@
           <a:p>
             <a:fld id="{A0E914F3-0C81-4A72-87EF-BDF4732DAA55}" type="datetimeFigureOut">
               <a:rPr lang="fr-FR" smtClean="0"/>
-              <a:t>26/03/2024</a:t>
+              <a:t>27/03/2024</a:t>
             </a:fld>
             <a:endParaRPr lang="fr-FR"/>
           </a:p>
@@ -4963,6 +8938,225 @@
   <p:clrMapOvr>
     <a:masterClrMapping/>
   </p:clrMapOvr>
+</p:sldLayout>
+</file>
+
+<file path=ppt/slideLayouts/slideLayout12.xml><?xml version="1.0" encoding="utf-8"?>
+<p:sldLayout xmlns:a="http://schemas.openxmlformats.org/drawingml/2006/main" xmlns:r="http://schemas.openxmlformats.org/officeDocument/2006/relationships" xmlns:p="http://schemas.openxmlformats.org/presentationml/2006/main" userDrawn="1">
+  <p:cSld name="Défaut">
+    <p:spTree>
+      <p:nvGrpSpPr>
+        <p:cNvPr id="1" name=""/>
+        <p:cNvGrpSpPr/>
+        <p:nvPr/>
+      </p:nvGrpSpPr>
+      <p:grpSpPr>
+        <a:xfrm>
+          <a:off x="0" y="0"/>
+          <a:ext cx="0" cy="0"/>
+          <a:chOff x="0" y="0"/>
+          <a:chExt cx="0" cy="0"/>
+        </a:xfrm>
+      </p:grpSpPr>
+      <p:sp>
+        <p:nvSpPr>
+          <p:cNvPr id="2" name="Titre 1">
+            <a:extLst>
+              <a:ext uri="{FF2B5EF4-FFF2-40B4-BE49-F238E27FC236}">
+                <a16:creationId xmlns:a16="http://schemas.microsoft.com/office/drawing/2014/main" id="{23B3C955-23C5-45B3-A86F-42A449D06741}"/>
+              </a:ext>
+            </a:extLst>
+          </p:cNvPr>
+          <p:cNvSpPr>
+            <a:spLocks noGrp="1"/>
+          </p:cNvSpPr>
+          <p:nvPr>
+            <p:ph type="title"/>
+          </p:nvPr>
+        </p:nvSpPr>
+        <p:spPr/>
+        <p:txBody>
+          <a:bodyPr/>
+          <a:lstStyle>
+            <a:lvl1pPr>
+              <a:defRPr/>
+            </a:lvl1pPr>
+          </a:lstStyle>
+          <a:p>
+            <a:r>
+              <a:rPr lang="en-US" noProof="0" dirty="0" err="1"/>
+              <a:t>Modifiez</a:t>
+            </a:r>
+            <a:r>
+              <a:rPr lang="en-US" noProof="0" dirty="0"/>
+              <a:t> le style du </a:t>
+            </a:r>
+            <a:r>
+              <a:rPr lang="en-US" noProof="0" dirty="0" err="1"/>
+              <a:t>titre</a:t>
+            </a:r>
+            <a:endParaRPr lang="en-US" noProof="0" dirty="0"/>
+          </a:p>
+        </p:txBody>
+      </p:sp>
+      <p:sp>
+        <p:nvSpPr>
+          <p:cNvPr id="3" name="Texte niveau 1…">
+            <a:extLst>
+              <a:ext uri="{FF2B5EF4-FFF2-40B4-BE49-F238E27FC236}">
+                <a16:creationId xmlns:a16="http://schemas.microsoft.com/office/drawing/2014/main" id="{CA07DDFE-6403-4C03-A3C6-1AC63C469912}"/>
+              </a:ext>
+            </a:extLst>
+          </p:cNvPr>
+          <p:cNvSpPr txBox="1">
+            <a:spLocks noGrp="1"/>
+          </p:cNvSpPr>
+          <p:nvPr>
+            <p:ph idx="1" hasCustomPrompt="1"/>
+          </p:nvPr>
+        </p:nvSpPr>
+        <p:spPr>
+          <a:xfrm>
+            <a:off x="208906" y="1190019"/>
+            <a:ext cx="11774188" cy="5056957"/>
+          </a:xfrm>
+          <a:prstGeom prst="rect">
+            <a:avLst/>
+          </a:prstGeom>
+          <a:ln w="12700">
+            <a:miter lim="400000"/>
+          </a:ln>
+          <a:extLst>
+            <a:ext uri="{C572A759-6A51-4108-AA02-DFA0A04FC94B}">
+              <ma14:wrappingTextBoxFlag xmlns="" xmlns:ma14="http://schemas.microsoft.com/office/mac/drawingml/2011/main" val="1"/>
+            </a:ext>
+          </a:extLst>
+        </p:spPr>
+        <p:txBody>
+          <a:bodyPr lIns="45719" rIns="45719">
+            <a:normAutofit/>
+          </a:bodyPr>
+          <a:lstStyle>
+            <a:lvl2pPr>
+              <a:defRPr sz="2000"/>
+            </a:lvl2pPr>
+            <a:lvl3pPr>
+              <a:defRPr sz="2000"/>
+            </a:lvl3pPr>
+            <a:lvl4pPr>
+              <a:defRPr sz="2000"/>
+            </a:lvl4pPr>
+            <a:lvl5pPr>
+              <a:defRPr sz="2000"/>
+            </a:lvl5pPr>
+          </a:lstStyle>
+          <a:p>
+            <a:r>
+              <a:rPr lang="en-US" noProof="0" dirty="0" err="1"/>
+              <a:t>Texte</a:t>
+            </a:r>
+            <a:r>
+              <a:rPr lang="en-US" noProof="0" dirty="0"/>
+              <a:t> </a:t>
+            </a:r>
+            <a:r>
+              <a:rPr lang="en-US" noProof="0" dirty="0" err="1"/>
+              <a:t>niveau</a:t>
+            </a:r>
+            <a:r>
+              <a:rPr lang="en-US" noProof="0" dirty="0"/>
+              <a:t> 1</a:t>
+            </a:r>
+          </a:p>
+          <a:p>
+            <a:pPr lvl="1"/>
+            <a:r>
+              <a:rPr lang="en-US" noProof="0" dirty="0" err="1"/>
+              <a:t>Texte</a:t>
+            </a:r>
+            <a:r>
+              <a:rPr lang="en-US" noProof="0" dirty="0"/>
+              <a:t> </a:t>
+            </a:r>
+            <a:r>
+              <a:rPr lang="en-US" noProof="0" dirty="0" err="1"/>
+              <a:t>niveau</a:t>
+            </a:r>
+            <a:r>
+              <a:rPr lang="en-US" noProof="0" dirty="0"/>
+              <a:t> 2</a:t>
+            </a:r>
+          </a:p>
+          <a:p>
+            <a:pPr lvl="2"/>
+            <a:r>
+              <a:rPr lang="en-US" noProof="0" dirty="0" err="1"/>
+              <a:t>Texte</a:t>
+            </a:r>
+            <a:r>
+              <a:rPr lang="en-US" noProof="0" dirty="0"/>
+              <a:t> </a:t>
+            </a:r>
+            <a:r>
+              <a:rPr lang="en-US" noProof="0" dirty="0" err="1"/>
+              <a:t>niveau</a:t>
+            </a:r>
+            <a:r>
+              <a:rPr lang="en-US" noProof="0" dirty="0"/>
+              <a:t> 3</a:t>
+            </a:r>
+          </a:p>
+          <a:p>
+            <a:pPr lvl="3"/>
+            <a:r>
+              <a:rPr lang="en-US" noProof="0" dirty="0" err="1"/>
+              <a:t>Texte</a:t>
+            </a:r>
+            <a:r>
+              <a:rPr lang="en-US" noProof="0" dirty="0"/>
+              <a:t> </a:t>
+            </a:r>
+            <a:r>
+              <a:rPr lang="en-US" noProof="0" dirty="0" err="1"/>
+              <a:t>niveau</a:t>
+            </a:r>
+            <a:r>
+              <a:rPr lang="en-US" noProof="0" dirty="0"/>
+              <a:t> 4</a:t>
+            </a:r>
+          </a:p>
+          <a:p>
+            <a:pPr lvl="4"/>
+            <a:r>
+              <a:rPr lang="en-US" noProof="0" dirty="0" err="1"/>
+              <a:t>Texte</a:t>
+            </a:r>
+            <a:r>
+              <a:rPr lang="en-US" noProof="0" dirty="0"/>
+              <a:t> </a:t>
+            </a:r>
+            <a:r>
+              <a:rPr lang="en-US" noProof="0" dirty="0" err="1"/>
+              <a:t>niveau</a:t>
+            </a:r>
+            <a:r>
+              <a:rPr lang="en-US" noProof="0" dirty="0"/>
+              <a:t> 5</a:t>
+            </a:r>
+          </a:p>
+        </p:txBody>
+      </p:sp>
+    </p:spTree>
+    <p:extLst>
+      <p:ext uri="{BB962C8B-B14F-4D97-AF65-F5344CB8AC3E}">
+        <p14:creationId xmlns:p14="http://schemas.microsoft.com/office/powerpoint/2010/main" val="4163135690"/>
+      </p:ext>
+    </p:extLst>
+  </p:cSld>
+  <p:clrMapOvr>
+    <a:masterClrMapping/>
+  </p:clrMapOvr>
+  <p:transition spd="med"/>
 </p:sldLayout>
 </file>
 
@@ -5091,7 +9285,7 @@
           <a:p>
             <a:fld id="{A0E914F3-0C81-4A72-87EF-BDF4732DAA55}" type="datetimeFigureOut">
               <a:rPr lang="fr-FR" smtClean="0"/>
-              <a:t>26/03/2024</a:t>
+              <a:t>27/03/2024</a:t>
             </a:fld>
             <a:endParaRPr lang="fr-FR"/>
           </a:p>
@@ -5366,7 +9560,7 @@
           <a:p>
             <a:fld id="{A0E914F3-0C81-4A72-87EF-BDF4732DAA55}" type="datetimeFigureOut">
               <a:rPr lang="fr-FR" smtClean="0"/>
-              <a:t>26/03/2024</a:t>
+              <a:t>27/03/2024</a:t>
             </a:fld>
             <a:endParaRPr lang="fr-FR"/>
           </a:p>
@@ -5631,7 +9825,7 @@
           <a:p>
             <a:fld id="{A0E914F3-0C81-4A72-87EF-BDF4732DAA55}" type="datetimeFigureOut">
               <a:rPr lang="fr-FR" smtClean="0"/>
-              <a:t>26/03/2024</a:t>
+              <a:t>27/03/2024</a:t>
             </a:fld>
             <a:endParaRPr lang="fr-FR"/>
           </a:p>
@@ -6043,7 +10237,7 @@
           <a:p>
             <a:fld id="{A0E914F3-0C81-4A72-87EF-BDF4732DAA55}" type="datetimeFigureOut">
               <a:rPr lang="fr-FR" smtClean="0"/>
-              <a:t>26/03/2024</a:t>
+              <a:t>27/03/2024</a:t>
             </a:fld>
             <a:endParaRPr lang="fr-FR"/>
           </a:p>
@@ -6184,7 +10378,7 @@
           <a:p>
             <a:fld id="{A0E914F3-0C81-4A72-87EF-BDF4732DAA55}" type="datetimeFigureOut">
               <a:rPr lang="fr-FR" smtClean="0"/>
-              <a:t>26/03/2024</a:t>
+              <a:t>27/03/2024</a:t>
             </a:fld>
             <a:endParaRPr lang="fr-FR"/>
           </a:p>
@@ -6297,7 +10491,7 @@
           <a:p>
             <a:fld id="{A0E914F3-0C81-4A72-87EF-BDF4732DAA55}" type="datetimeFigureOut">
               <a:rPr lang="fr-FR" smtClean="0"/>
-              <a:t>26/03/2024</a:t>
+              <a:t>27/03/2024</a:t>
             </a:fld>
             <a:endParaRPr lang="fr-FR"/>
           </a:p>
@@ -6608,7 +10802,7 @@
           <a:p>
             <a:fld id="{A0E914F3-0C81-4A72-87EF-BDF4732DAA55}" type="datetimeFigureOut">
               <a:rPr lang="fr-FR" smtClean="0"/>
-              <a:t>26/03/2024</a:t>
+              <a:t>27/03/2024</a:t>
             </a:fld>
             <a:endParaRPr lang="fr-FR"/>
           </a:p>
@@ -6899,7 +11093,7 @@
           <a:p>
             <a:fld id="{A0E914F3-0C81-4A72-87EF-BDF4732DAA55}" type="datetimeFigureOut">
               <a:rPr lang="fr-FR" smtClean="0"/>
-              <a:t>26/03/2024</a:t>
+              <a:t>27/03/2024</a:t>
             </a:fld>
             <a:endParaRPr lang="fr-FR"/>
           </a:p>
@@ -7140,7 +11334,7 @@
           <a:p>
             <a:fld id="{A0E914F3-0C81-4A72-87EF-BDF4732DAA55}" type="datetimeFigureOut">
               <a:rPr lang="fr-FR" smtClean="0"/>
-              <a:t>26/03/2024</a:t>
+              <a:t>27/03/2024</a:t>
             </a:fld>
             <a:endParaRPr lang="fr-FR"/>
           </a:p>
@@ -7256,6 +11450,7 @@
     <p:sldLayoutId id="2147483669" r:id="rId9"/>
     <p:sldLayoutId id="2147483670" r:id="rId10"/>
     <p:sldLayoutId id="2147483671" r:id="rId11"/>
+    <p:sldLayoutId id="2147483672" r:id="rId12"/>
   </p:sldLayoutIdLst>
   <p:txStyles>
     <p:titleStyle>
@@ -7642,6 +11837,908 @@
       </p:grpSpPr>
       <p:sp>
         <p:nvSpPr>
+          <p:cNvPr id="4" name="Titre 3">
+            <a:extLst>
+              <a:ext uri="{FF2B5EF4-FFF2-40B4-BE49-F238E27FC236}">
+                <a16:creationId xmlns:a16="http://schemas.microsoft.com/office/drawing/2014/main" id="{CC2A2999-2A2B-52F7-227C-09A61B8C832C}"/>
+              </a:ext>
+            </a:extLst>
+          </p:cNvPr>
+          <p:cNvSpPr>
+            <a:spLocks noGrp="1"/>
+          </p:cNvSpPr>
+          <p:nvPr>
+            <p:ph type="title"/>
+          </p:nvPr>
+        </p:nvSpPr>
+        <p:spPr/>
+        <p:txBody>
+          <a:bodyPr/>
+          <a:lstStyle/>
+          <a:p>
+            <a:endParaRPr lang="fr-FR" dirty="0"/>
+          </a:p>
+        </p:txBody>
+      </p:sp>
+      <p:pic>
+        <p:nvPicPr>
+          <p:cNvPr id="5" name="Graphique 4" descr="Homme avec un remplissage uni">
+            <a:extLst>
+              <a:ext uri="{FF2B5EF4-FFF2-40B4-BE49-F238E27FC236}">
+                <a16:creationId xmlns:a16="http://schemas.microsoft.com/office/drawing/2014/main" id="{C2D34783-C6E4-301A-7FF1-B841B66054D1}"/>
+              </a:ext>
+            </a:extLst>
+          </p:cNvPr>
+          <p:cNvPicPr>
+            <a:picLocks noChangeAspect="1"/>
+          </p:cNvPicPr>
+          <p:nvPr/>
+        </p:nvPicPr>
+        <p:blipFill>
+          <a:blip r:embed="rId2">
+            <a:extLst>
+              <a:ext uri="{28A0092B-C50C-407E-A947-70E740481C1C}">
+                <a14:useLocalDpi xmlns:a14="http://schemas.microsoft.com/office/drawing/2010/main" val="0"/>
+              </a:ext>
+              <a:ext uri="{96DAC541-7B7A-43D3-8B79-37D633B846F1}">
+                <asvg:svgBlip xmlns:asvg="http://schemas.microsoft.com/office/drawing/2016/SVG/main" r:embed="rId3"/>
+              </a:ext>
+            </a:extLst>
+          </a:blip>
+          <a:stretch>
+            <a:fillRect/>
+          </a:stretch>
+        </p:blipFill>
+        <p:spPr>
+          <a:xfrm>
+            <a:off x="3810668" y="2718816"/>
+            <a:ext cx="1743456" cy="1743456"/>
+          </a:xfrm>
+          <a:prstGeom prst="rect">
+            <a:avLst/>
+          </a:prstGeom>
+        </p:spPr>
+      </p:pic>
+      <p:pic>
+        <p:nvPicPr>
+          <p:cNvPr id="7" name="Graphique 6" descr="Femme avec un remplissage uni">
+            <a:extLst>
+              <a:ext uri="{FF2B5EF4-FFF2-40B4-BE49-F238E27FC236}">
+                <a16:creationId xmlns:a16="http://schemas.microsoft.com/office/drawing/2014/main" id="{30C17F68-E2AA-3F3B-01AA-A173088A0525}"/>
+              </a:ext>
+            </a:extLst>
+          </p:cNvPr>
+          <p:cNvPicPr>
+            <a:picLocks noChangeAspect="1"/>
+          </p:cNvPicPr>
+          <p:nvPr/>
+        </p:nvPicPr>
+        <p:blipFill>
+          <a:blip r:embed="rId4">
+            <a:extLst>
+              <a:ext uri="{28A0092B-C50C-407E-A947-70E740481C1C}">
+                <a14:useLocalDpi xmlns:a14="http://schemas.microsoft.com/office/drawing/2010/main" val="0"/>
+              </a:ext>
+              <a:ext uri="{96DAC541-7B7A-43D3-8B79-37D633B846F1}">
+                <asvg:svgBlip xmlns:asvg="http://schemas.microsoft.com/office/drawing/2016/SVG/main" r:embed="rId5"/>
+              </a:ext>
+            </a:extLst>
+          </a:blip>
+          <a:stretch>
+            <a:fillRect/>
+          </a:stretch>
+        </p:blipFill>
+        <p:spPr>
+          <a:xfrm>
+            <a:off x="10448544" y="2622804"/>
+            <a:ext cx="1743456" cy="1743456"/>
+          </a:xfrm>
+          <a:prstGeom prst="rect">
+            <a:avLst/>
+          </a:prstGeom>
+        </p:spPr>
+      </p:pic>
+      <p:sp>
+        <p:nvSpPr>
+          <p:cNvPr id="8" name="Flèche : droite 7">
+            <a:extLst>
+              <a:ext uri="{FF2B5EF4-FFF2-40B4-BE49-F238E27FC236}">
+                <a16:creationId xmlns:a16="http://schemas.microsoft.com/office/drawing/2014/main" id="{D457F5E4-7C2D-FE4E-6227-42A5982DD0A8}"/>
+              </a:ext>
+            </a:extLst>
+          </p:cNvPr>
+          <p:cNvSpPr/>
+          <p:nvPr/>
+        </p:nvSpPr>
+        <p:spPr>
+          <a:xfrm>
+            <a:off x="5560981" y="2774920"/>
+            <a:ext cx="5040000" cy="720000"/>
+          </a:xfrm>
+          <a:prstGeom prst="rightArrow">
+            <a:avLst/>
+          </a:prstGeom>
+        </p:spPr>
+        <p:style>
+          <a:lnRef idx="2">
+            <a:schemeClr val="accent1">
+              <a:shade val="15000"/>
+            </a:schemeClr>
+          </a:lnRef>
+          <a:fillRef idx="1">
+            <a:schemeClr val="accent1"/>
+          </a:fillRef>
+          <a:effectRef idx="0">
+            <a:schemeClr val="accent1"/>
+          </a:effectRef>
+          <a:fontRef idx="minor">
+            <a:schemeClr val="lt1"/>
+          </a:fontRef>
+        </p:style>
+        <p:txBody>
+          <a:bodyPr rtlCol="0" anchor="ctr"/>
+          <a:lstStyle/>
+          <a:p>
+            <a:pPr algn="ctr"/>
+            <a:r>
+              <a:rPr lang="fr-FR" sz="1400" dirty="0"/>
+              <a:t>attr1_ - Q8 - </a:t>
+            </a:r>
+            <a:r>
+              <a:rPr lang="fr-FR" sz="1400" dirty="0" err="1"/>
+              <a:t>what</a:t>
+            </a:r>
+            <a:r>
+              <a:rPr lang="fr-FR" sz="1400" dirty="0"/>
+              <a:t> </a:t>
+            </a:r>
+            <a:r>
+              <a:rPr lang="fr-FR" sz="1400" dirty="0" err="1"/>
+              <a:t>you</a:t>
+            </a:r>
+            <a:r>
+              <a:rPr lang="fr-FR" sz="1400" dirty="0"/>
+              <a:t> look for in </a:t>
+            </a:r>
+            <a:r>
+              <a:rPr lang="fr-FR" sz="1400" dirty="0" err="1"/>
+              <a:t>opp</a:t>
+            </a:r>
+            <a:r>
+              <a:rPr lang="fr-FR" sz="1400" dirty="0"/>
+              <a:t> </a:t>
+            </a:r>
+            <a:r>
+              <a:rPr lang="fr-FR" sz="1400" dirty="0" err="1"/>
+              <a:t>sex</a:t>
+            </a:r>
+            <a:endParaRPr lang="fr-FR" sz="1400" dirty="0"/>
+          </a:p>
+        </p:txBody>
+      </p:sp>
+      <p:sp>
+        <p:nvSpPr>
+          <p:cNvPr id="9" name="Flèche : gauche 8">
+            <a:extLst>
+              <a:ext uri="{FF2B5EF4-FFF2-40B4-BE49-F238E27FC236}">
+                <a16:creationId xmlns:a16="http://schemas.microsoft.com/office/drawing/2014/main" id="{08527DFB-C326-42D8-3868-92244B861396}"/>
+              </a:ext>
+            </a:extLst>
+          </p:cNvPr>
+          <p:cNvSpPr/>
+          <p:nvPr/>
+        </p:nvSpPr>
+        <p:spPr>
+          <a:xfrm>
+            <a:off x="5547935" y="3439965"/>
+            <a:ext cx="5040000" cy="720000"/>
+          </a:xfrm>
+          <a:prstGeom prst="leftArrow">
+            <a:avLst/>
+          </a:prstGeom>
+        </p:spPr>
+        <p:style>
+          <a:lnRef idx="2">
+            <a:schemeClr val="accent1">
+              <a:shade val="15000"/>
+            </a:schemeClr>
+          </a:lnRef>
+          <a:fillRef idx="1">
+            <a:schemeClr val="accent1"/>
+          </a:fillRef>
+          <a:effectRef idx="0">
+            <a:schemeClr val="accent1"/>
+          </a:effectRef>
+          <a:fontRef idx="minor">
+            <a:schemeClr val="lt1"/>
+          </a:fontRef>
+        </p:style>
+        <p:txBody>
+          <a:bodyPr rtlCol="0" anchor="ctr"/>
+          <a:lstStyle/>
+          <a:p>
+            <a:pPr algn="ctr"/>
+            <a:r>
+              <a:rPr lang="fr-FR" sz="1400" dirty="0"/>
+              <a:t>attr2_ - Q10 - </a:t>
+            </a:r>
+            <a:r>
+              <a:rPr lang="fr-FR" sz="1400" dirty="0" err="1"/>
+              <a:t>what</a:t>
+            </a:r>
+            <a:r>
+              <a:rPr lang="fr-FR" sz="1400" dirty="0"/>
+              <a:t> I </a:t>
+            </a:r>
+            <a:r>
+              <a:rPr lang="fr-FR" sz="1400" dirty="0" err="1"/>
+              <a:t>think</a:t>
+            </a:r>
+            <a:r>
+              <a:rPr lang="fr-FR" sz="1400" dirty="0"/>
+              <a:t> </a:t>
+            </a:r>
+            <a:r>
+              <a:rPr lang="fr-FR" sz="1400" dirty="0" err="1"/>
+              <a:t>they</a:t>
+            </a:r>
+            <a:r>
+              <a:rPr lang="fr-FR" sz="1400" dirty="0"/>
+              <a:t> look for a date</a:t>
+            </a:r>
+          </a:p>
+        </p:txBody>
+      </p:sp>
+      <p:pic>
+        <p:nvPicPr>
+          <p:cNvPr id="11" name="Graphique 10" descr="Nuage contour">
+            <a:extLst>
+              <a:ext uri="{FF2B5EF4-FFF2-40B4-BE49-F238E27FC236}">
+                <a16:creationId xmlns:a16="http://schemas.microsoft.com/office/drawing/2014/main" id="{7CCBDF41-572B-4E3C-C004-9823BB4A4AE3}"/>
+              </a:ext>
+            </a:extLst>
+          </p:cNvPr>
+          <p:cNvPicPr>
+            <a:picLocks noChangeAspect="1"/>
+          </p:cNvPicPr>
+          <p:nvPr/>
+        </p:nvPicPr>
+        <p:blipFill>
+          <a:blip r:embed="rId6">
+            <a:extLst>
+              <a:ext uri="{28A0092B-C50C-407E-A947-70E740481C1C}">
+                <a14:useLocalDpi xmlns:a14="http://schemas.microsoft.com/office/drawing/2010/main" val="0"/>
+              </a:ext>
+              <a:ext uri="{96DAC541-7B7A-43D3-8B79-37D633B846F1}">
+                <asvg:svgBlip xmlns:asvg="http://schemas.microsoft.com/office/drawing/2016/SVG/main" r:embed="rId7"/>
+              </a:ext>
+            </a:extLst>
+          </a:blip>
+          <a:stretch>
+            <a:fillRect/>
+          </a:stretch>
+        </p:blipFill>
+        <p:spPr>
+          <a:xfrm>
+            <a:off x="160689" y="1794532"/>
+            <a:ext cx="1466088" cy="1466088"/>
+          </a:xfrm>
+          <a:prstGeom prst="rect">
+            <a:avLst/>
+          </a:prstGeom>
+        </p:spPr>
+      </p:pic>
+      <p:sp>
+        <p:nvSpPr>
+          <p:cNvPr id="13" name="ZoneTexte 12">
+            <a:extLst>
+              <a:ext uri="{FF2B5EF4-FFF2-40B4-BE49-F238E27FC236}">
+                <a16:creationId xmlns:a16="http://schemas.microsoft.com/office/drawing/2014/main" id="{D2E02F60-7FBB-0954-3EC7-9BF8BB5CB190}"/>
+              </a:ext>
+            </a:extLst>
+          </p:cNvPr>
+          <p:cNvSpPr txBox="1"/>
+          <p:nvPr/>
+        </p:nvSpPr>
+        <p:spPr>
+          <a:xfrm>
+            <a:off x="249081" y="2889031"/>
+            <a:ext cx="2350008" cy="830997"/>
+          </a:xfrm>
+          <a:prstGeom prst="rect">
+            <a:avLst/>
+          </a:prstGeom>
+          <a:noFill/>
+        </p:spPr>
+        <p:txBody>
+          <a:bodyPr wrap="square">
+            <a:spAutoFit/>
+          </a:bodyPr>
+          <a:lstStyle/>
+          <a:p>
+            <a:r>
+              <a:rPr lang="fr-FR" sz="1200" dirty="0"/>
+              <a:t>Q1 - </a:t>
+            </a:r>
+            <a:r>
+              <a:rPr lang="fr-FR" sz="1200" dirty="0" err="1"/>
+              <a:t>primary</a:t>
+            </a:r>
+            <a:r>
+              <a:rPr lang="fr-FR" sz="1200" dirty="0"/>
+              <a:t> goal</a:t>
+            </a:r>
+          </a:p>
+          <a:p>
+            <a:r>
+              <a:rPr lang="fr-FR" sz="1200" dirty="0"/>
+              <a:t>Q4 - </a:t>
+            </a:r>
+            <a:r>
+              <a:rPr lang="fr-FR" sz="1200" dirty="0" err="1"/>
+              <a:t>intended</a:t>
+            </a:r>
+            <a:r>
+              <a:rPr lang="fr-FR" sz="1200" dirty="0"/>
+              <a:t> </a:t>
+            </a:r>
+            <a:r>
+              <a:rPr lang="fr-FR" sz="1200" dirty="0" err="1"/>
+              <a:t>career</a:t>
+            </a:r>
+            <a:endParaRPr lang="fr-FR" sz="1200" dirty="0"/>
+          </a:p>
+          <a:p>
+            <a:r>
+              <a:rPr lang="fr-FR" sz="1200" dirty="0"/>
+              <a:t>Q6 – expectation happy</a:t>
+            </a:r>
+          </a:p>
+          <a:p>
+            <a:r>
+              <a:rPr lang="fr-FR" sz="1200" dirty="0"/>
+              <a:t>Q7 – expectation </a:t>
+            </a:r>
+            <a:r>
+              <a:rPr lang="fr-FR" sz="1200" dirty="0" err="1"/>
+              <a:t>num</a:t>
+            </a:r>
+            <a:endParaRPr lang="fr-FR" sz="1200" dirty="0"/>
+          </a:p>
+        </p:txBody>
+      </p:sp>
+      <p:sp>
+        <p:nvSpPr>
+          <p:cNvPr id="15" name="ZoneTexte 14">
+            <a:extLst>
+              <a:ext uri="{FF2B5EF4-FFF2-40B4-BE49-F238E27FC236}">
+                <a16:creationId xmlns:a16="http://schemas.microsoft.com/office/drawing/2014/main" id="{C7AC9996-9E9A-41A8-EB31-C0F7BA65539C}"/>
+              </a:ext>
+            </a:extLst>
+          </p:cNvPr>
+          <p:cNvSpPr txBox="1"/>
+          <p:nvPr/>
+        </p:nvSpPr>
+        <p:spPr>
+          <a:xfrm>
+            <a:off x="495905" y="4550993"/>
+            <a:ext cx="1743456" cy="1569660"/>
+          </a:xfrm>
+          <a:prstGeom prst="rect">
+            <a:avLst/>
+          </a:prstGeom>
+          <a:noFill/>
+          <a:ln w="38100">
+            <a:solidFill>
+              <a:schemeClr val="tx1"/>
+            </a:solidFill>
+          </a:ln>
+        </p:spPr>
+        <p:txBody>
+          <a:bodyPr wrap="square" rtlCol="0">
+            <a:spAutoFit/>
+          </a:bodyPr>
+          <a:lstStyle/>
+          <a:p>
+            <a:pPr algn="ctr"/>
+            <a:r>
+              <a:rPr lang="fr-FR" sz="1200" dirty="0" err="1"/>
+              <a:t>Attributes</a:t>
+            </a:r>
+            <a:endParaRPr lang="fr-FR" sz="1200" dirty="0"/>
+          </a:p>
+          <a:p>
+            <a:r>
+              <a:rPr lang="fr-FR" sz="1200" dirty="0"/>
+              <a:t>Q2 - How </a:t>
+            </a:r>
+            <a:r>
+              <a:rPr lang="fr-FR" sz="1200" dirty="0" err="1"/>
+              <a:t>often</a:t>
+            </a:r>
+            <a:r>
+              <a:rPr lang="fr-FR" sz="1200" dirty="0"/>
+              <a:t> on date</a:t>
+            </a:r>
+          </a:p>
+          <a:p>
+            <a:r>
+              <a:rPr lang="fr-FR" sz="1200" dirty="0"/>
+              <a:t>Q3 - How </a:t>
+            </a:r>
+            <a:r>
+              <a:rPr lang="fr-FR" sz="1200" dirty="0" err="1"/>
+              <a:t>often</a:t>
+            </a:r>
+            <a:r>
+              <a:rPr lang="fr-FR" sz="1200" dirty="0"/>
+              <a:t> out</a:t>
+            </a:r>
+          </a:p>
+          <a:p>
+            <a:r>
+              <a:rPr lang="fr-FR" sz="1200" dirty="0"/>
+              <a:t>Q5 - </a:t>
+            </a:r>
+            <a:r>
+              <a:rPr lang="fr-FR" sz="1200" dirty="0" err="1"/>
+              <a:t>Activities</a:t>
+            </a:r>
+            <a:endParaRPr lang="fr-FR" sz="1200" dirty="0"/>
+          </a:p>
+          <a:p>
+            <a:r>
+              <a:rPr lang="fr-FR" sz="1200" dirty="0" err="1"/>
+              <a:t>Undergraduate</a:t>
+            </a:r>
+            <a:r>
+              <a:rPr lang="fr-FR" sz="1200" dirty="0"/>
+              <a:t> </a:t>
+            </a:r>
+            <a:r>
+              <a:rPr lang="fr-FR" sz="1200" dirty="0" err="1"/>
+              <a:t>school</a:t>
+            </a:r>
+            <a:endParaRPr lang="fr-FR" sz="1200" dirty="0"/>
+          </a:p>
+          <a:p>
+            <a:r>
+              <a:rPr lang="fr-FR" sz="1200" dirty="0"/>
+              <a:t>Race</a:t>
+            </a:r>
+          </a:p>
+          <a:p>
+            <a:r>
+              <a:rPr lang="fr-FR" sz="1200" dirty="0"/>
+              <a:t>Religion</a:t>
+            </a:r>
+          </a:p>
+          <a:p>
+            <a:r>
+              <a:rPr lang="fr-FR" sz="1200" dirty="0"/>
+              <a:t>Age</a:t>
+            </a:r>
+          </a:p>
+        </p:txBody>
+      </p:sp>
+      <p:sp>
+        <p:nvSpPr>
+          <p:cNvPr id="16" name="Flèche : gauche 15">
+            <a:extLst>
+              <a:ext uri="{FF2B5EF4-FFF2-40B4-BE49-F238E27FC236}">
+                <a16:creationId xmlns:a16="http://schemas.microsoft.com/office/drawing/2014/main" id="{7CEEECCA-816F-C774-7A9B-E096B178AD3F}"/>
+              </a:ext>
+            </a:extLst>
+          </p:cNvPr>
+          <p:cNvSpPr/>
+          <p:nvPr/>
+        </p:nvSpPr>
+        <p:spPr>
+          <a:xfrm>
+            <a:off x="5929976" y="4104696"/>
+            <a:ext cx="5040000" cy="720000"/>
+          </a:xfrm>
+          <a:prstGeom prst="leftArrow">
+            <a:avLst/>
+          </a:prstGeom>
+        </p:spPr>
+        <p:style>
+          <a:lnRef idx="2">
+            <a:schemeClr val="accent1">
+              <a:shade val="15000"/>
+            </a:schemeClr>
+          </a:lnRef>
+          <a:fillRef idx="1">
+            <a:schemeClr val="accent1"/>
+          </a:fillRef>
+          <a:effectRef idx="0">
+            <a:schemeClr val="accent1"/>
+          </a:effectRef>
+          <a:fontRef idx="minor">
+            <a:schemeClr val="lt1"/>
+          </a:fontRef>
+        </p:style>
+        <p:txBody>
+          <a:bodyPr rtlCol="0" anchor="ctr"/>
+          <a:lstStyle/>
+          <a:p>
+            <a:pPr algn="ctr"/>
+            <a:r>
+              <a:rPr lang="fr-FR" sz="1400" dirty="0"/>
+              <a:t>attr4_ - Q9 - </a:t>
+            </a:r>
+            <a:r>
+              <a:rPr lang="fr-FR" sz="1400" dirty="0" err="1"/>
+              <a:t>what</a:t>
+            </a:r>
+            <a:r>
+              <a:rPr lang="fr-FR" sz="1400" dirty="0"/>
+              <a:t> </a:t>
+            </a:r>
+            <a:r>
+              <a:rPr lang="fr-FR" sz="1400" dirty="0" err="1"/>
+              <a:t>they</a:t>
+            </a:r>
+            <a:r>
+              <a:rPr lang="fr-FR" sz="1400" dirty="0"/>
+              <a:t> look for in </a:t>
+            </a:r>
+            <a:r>
+              <a:rPr lang="fr-FR" sz="1400" dirty="0" err="1"/>
+              <a:t>opp</a:t>
+            </a:r>
+            <a:r>
+              <a:rPr lang="fr-FR" sz="1400" dirty="0"/>
+              <a:t> </a:t>
+            </a:r>
+            <a:r>
+              <a:rPr lang="fr-FR" sz="1400" dirty="0" err="1"/>
+              <a:t>sex</a:t>
+            </a:r>
+            <a:endParaRPr lang="fr-FR" sz="1400" dirty="0"/>
+          </a:p>
+        </p:txBody>
+      </p:sp>
+      <p:sp>
+        <p:nvSpPr>
+          <p:cNvPr id="17" name="Flèche : en arc 16">
+            <a:extLst>
+              <a:ext uri="{FF2B5EF4-FFF2-40B4-BE49-F238E27FC236}">
+                <a16:creationId xmlns:a16="http://schemas.microsoft.com/office/drawing/2014/main" id="{1F5D8C2D-3CC9-9372-0A81-F086E089E33C}"/>
+              </a:ext>
+            </a:extLst>
+          </p:cNvPr>
+          <p:cNvSpPr/>
+          <p:nvPr/>
+        </p:nvSpPr>
+        <p:spPr>
+          <a:xfrm>
+            <a:off x="4096084" y="2307336"/>
+            <a:ext cx="1104900" cy="1051465"/>
+          </a:xfrm>
+          <a:prstGeom prst="circularArrow">
+            <a:avLst/>
+          </a:prstGeom>
+        </p:spPr>
+        <p:style>
+          <a:lnRef idx="2">
+            <a:schemeClr val="accent1">
+              <a:shade val="15000"/>
+            </a:schemeClr>
+          </a:lnRef>
+          <a:fillRef idx="1">
+            <a:schemeClr val="accent1"/>
+          </a:fillRef>
+          <a:effectRef idx="0">
+            <a:schemeClr val="accent1"/>
+          </a:effectRef>
+          <a:fontRef idx="minor">
+            <a:schemeClr val="lt1"/>
+          </a:fontRef>
+        </p:style>
+        <p:txBody>
+          <a:bodyPr rtlCol="0" anchor="ctr"/>
+          <a:lstStyle/>
+          <a:p>
+            <a:pPr algn="ctr"/>
+            <a:endParaRPr lang="fr-FR">
+              <a:solidFill>
+                <a:schemeClr val="tx1"/>
+              </a:solidFill>
+            </a:endParaRPr>
+          </a:p>
+        </p:txBody>
+      </p:sp>
+      <p:sp>
+        <p:nvSpPr>
+          <p:cNvPr id="18" name="ZoneTexte 17">
+            <a:extLst>
+              <a:ext uri="{FF2B5EF4-FFF2-40B4-BE49-F238E27FC236}">
+                <a16:creationId xmlns:a16="http://schemas.microsoft.com/office/drawing/2014/main" id="{2179BD8A-7831-07E4-0911-BFBDAF7266DC}"/>
+              </a:ext>
+            </a:extLst>
+          </p:cNvPr>
+          <p:cNvSpPr txBox="1"/>
+          <p:nvPr/>
+        </p:nvSpPr>
+        <p:spPr>
+          <a:xfrm>
+            <a:off x="3417017" y="2063105"/>
+            <a:ext cx="3025893" cy="307777"/>
+          </a:xfrm>
+          <a:prstGeom prst="rect">
+            <a:avLst/>
+          </a:prstGeom>
+          <a:noFill/>
+        </p:spPr>
+        <p:txBody>
+          <a:bodyPr wrap="none" rtlCol="0">
+            <a:spAutoFit/>
+          </a:bodyPr>
+          <a:lstStyle/>
+          <a:p>
+            <a:r>
+              <a:rPr lang="fr-FR" sz="1400" dirty="0"/>
+              <a:t>attr3_ - Q11 - How I </a:t>
+            </a:r>
+            <a:r>
+              <a:rPr lang="fr-FR" sz="1400" dirty="0" err="1"/>
+              <a:t>think</a:t>
+            </a:r>
+            <a:r>
+              <a:rPr lang="fr-FR" sz="1400" dirty="0"/>
+              <a:t> I </a:t>
+            </a:r>
+            <a:r>
+              <a:rPr lang="fr-FR" sz="1400" dirty="0" err="1"/>
+              <a:t>measure</a:t>
+            </a:r>
+            <a:r>
+              <a:rPr lang="fr-FR" sz="1400" dirty="0"/>
+              <a:t> up</a:t>
+            </a:r>
+          </a:p>
+        </p:txBody>
+      </p:sp>
+      <p:sp>
+        <p:nvSpPr>
+          <p:cNvPr id="19" name="ZoneTexte 18">
+            <a:extLst>
+              <a:ext uri="{FF2B5EF4-FFF2-40B4-BE49-F238E27FC236}">
+                <a16:creationId xmlns:a16="http://schemas.microsoft.com/office/drawing/2014/main" id="{35A91468-4A5C-46EF-98C7-F3322B69D755}"/>
+              </a:ext>
+            </a:extLst>
+          </p:cNvPr>
+          <p:cNvSpPr txBox="1"/>
+          <p:nvPr/>
+        </p:nvSpPr>
+        <p:spPr>
+          <a:xfrm>
+            <a:off x="2960215" y="4838836"/>
+            <a:ext cx="3336939" cy="307777"/>
+          </a:xfrm>
+          <a:prstGeom prst="rect">
+            <a:avLst/>
+          </a:prstGeom>
+          <a:noFill/>
+        </p:spPr>
+        <p:txBody>
+          <a:bodyPr wrap="none" rtlCol="0">
+            <a:spAutoFit/>
+          </a:bodyPr>
+          <a:lstStyle/>
+          <a:p>
+            <a:r>
+              <a:rPr lang="fr-FR" sz="1400" dirty="0"/>
+              <a:t>attr5_ - Q12 - How I </a:t>
+            </a:r>
+            <a:r>
+              <a:rPr lang="fr-FR" sz="1400" dirty="0" err="1"/>
+              <a:t>think</a:t>
+            </a:r>
+            <a:r>
+              <a:rPr lang="fr-FR" sz="1400" dirty="0"/>
+              <a:t> </a:t>
+            </a:r>
+            <a:r>
+              <a:rPr lang="fr-FR" sz="1400" dirty="0" err="1"/>
+              <a:t>they</a:t>
+            </a:r>
+            <a:r>
+              <a:rPr lang="fr-FR" sz="1400" dirty="0"/>
+              <a:t> </a:t>
+            </a:r>
+            <a:r>
+              <a:rPr lang="fr-FR" sz="1400" dirty="0" err="1"/>
+              <a:t>perceive</a:t>
+            </a:r>
+            <a:r>
+              <a:rPr lang="fr-FR" sz="1400" dirty="0"/>
+              <a:t> me</a:t>
+            </a:r>
+          </a:p>
+        </p:txBody>
+      </p:sp>
+      <p:sp>
+        <p:nvSpPr>
+          <p:cNvPr id="20" name="Flèche : en arc 19">
+            <a:extLst>
+              <a:ext uri="{FF2B5EF4-FFF2-40B4-BE49-F238E27FC236}">
+                <a16:creationId xmlns:a16="http://schemas.microsoft.com/office/drawing/2014/main" id="{39FD7A89-145B-B9DD-B7A9-927CFBCE35B4}"/>
+              </a:ext>
+            </a:extLst>
+          </p:cNvPr>
+          <p:cNvSpPr/>
+          <p:nvPr/>
+        </p:nvSpPr>
+        <p:spPr>
+          <a:xfrm rot="10800000">
+            <a:off x="4165854" y="3828019"/>
+            <a:ext cx="1104900" cy="1051465"/>
+          </a:xfrm>
+          <a:prstGeom prst="circularArrow">
+            <a:avLst/>
+          </a:prstGeom>
+        </p:spPr>
+        <p:style>
+          <a:lnRef idx="2">
+            <a:schemeClr val="accent1">
+              <a:shade val="15000"/>
+            </a:schemeClr>
+          </a:lnRef>
+          <a:fillRef idx="1">
+            <a:schemeClr val="accent1"/>
+          </a:fillRef>
+          <a:effectRef idx="0">
+            <a:schemeClr val="accent1"/>
+          </a:effectRef>
+          <a:fontRef idx="minor">
+            <a:schemeClr val="lt1"/>
+          </a:fontRef>
+        </p:style>
+        <p:txBody>
+          <a:bodyPr rtlCol="0" anchor="ctr"/>
+          <a:lstStyle/>
+          <a:p>
+            <a:pPr algn="ctr"/>
+            <a:endParaRPr lang="fr-FR">
+              <a:solidFill>
+                <a:schemeClr val="tx1"/>
+              </a:solidFill>
+            </a:endParaRPr>
+          </a:p>
+        </p:txBody>
+      </p:sp>
+      <p:sp>
+        <p:nvSpPr>
+          <p:cNvPr id="21" name="Cercle : creux 20">
+            <a:extLst>
+              <a:ext uri="{FF2B5EF4-FFF2-40B4-BE49-F238E27FC236}">
+                <a16:creationId xmlns:a16="http://schemas.microsoft.com/office/drawing/2014/main" id="{C1F883C3-1957-5A1D-3F88-2890E5ECB526}"/>
+              </a:ext>
+            </a:extLst>
+          </p:cNvPr>
+          <p:cNvSpPr/>
+          <p:nvPr/>
+        </p:nvSpPr>
+        <p:spPr>
+          <a:xfrm>
+            <a:off x="3117623" y="3590544"/>
+            <a:ext cx="764860" cy="722301"/>
+          </a:xfrm>
+          <a:prstGeom prst="donut">
+            <a:avLst/>
+          </a:prstGeom>
+        </p:spPr>
+        <p:style>
+          <a:lnRef idx="2">
+            <a:schemeClr val="accent1">
+              <a:shade val="15000"/>
+            </a:schemeClr>
+          </a:lnRef>
+          <a:fillRef idx="1">
+            <a:schemeClr val="accent1"/>
+          </a:fillRef>
+          <a:effectRef idx="0">
+            <a:schemeClr val="accent1"/>
+          </a:effectRef>
+          <a:fontRef idx="minor">
+            <a:schemeClr val="lt1"/>
+          </a:fontRef>
+        </p:style>
+        <p:txBody>
+          <a:bodyPr rtlCol="0" anchor="ctr"/>
+          <a:lstStyle/>
+          <a:p>
+            <a:pPr algn="ctr"/>
+            <a:endParaRPr lang="fr-FR">
+              <a:solidFill>
+                <a:schemeClr val="tx1"/>
+              </a:solidFill>
+            </a:endParaRPr>
+          </a:p>
+        </p:txBody>
+      </p:sp>
+      <p:sp>
+        <p:nvSpPr>
+          <p:cNvPr id="23" name="ZoneTexte 22">
+            <a:extLst>
+              <a:ext uri="{FF2B5EF4-FFF2-40B4-BE49-F238E27FC236}">
+                <a16:creationId xmlns:a16="http://schemas.microsoft.com/office/drawing/2014/main" id="{4FF3DE83-4CA3-BF0B-9E16-E7C6AF92DA2C}"/>
+              </a:ext>
+            </a:extLst>
+          </p:cNvPr>
+          <p:cNvSpPr txBox="1"/>
+          <p:nvPr/>
+        </p:nvSpPr>
+        <p:spPr>
+          <a:xfrm>
+            <a:off x="2318340" y="3023147"/>
+            <a:ext cx="2118167" cy="523220"/>
+          </a:xfrm>
+          <a:prstGeom prst="rect">
+            <a:avLst/>
+          </a:prstGeom>
+          <a:noFill/>
+        </p:spPr>
+        <p:txBody>
+          <a:bodyPr wrap="square">
+            <a:spAutoFit/>
+          </a:bodyPr>
+          <a:lstStyle/>
+          <a:p>
+            <a:r>
+              <a:rPr lang="fr-FR" sz="1400" dirty="0"/>
+              <a:t>attr7_ - Q15 – Importance of </a:t>
+            </a:r>
+            <a:r>
+              <a:rPr lang="fr-FR" sz="1400" dirty="0" err="1"/>
+              <a:t>attr</a:t>
+            </a:r>
+            <a:r>
+              <a:rPr lang="fr-FR" sz="1400" dirty="0"/>
+              <a:t> to the </a:t>
+            </a:r>
+            <a:r>
+              <a:rPr lang="fr-FR" sz="1400" dirty="0" err="1"/>
+              <a:t>decision</a:t>
+            </a:r>
+            <a:endParaRPr lang="fr-FR" sz="1400" dirty="0"/>
+          </a:p>
+        </p:txBody>
+      </p:sp>
+    </p:spTree>
+    <p:extLst>
+      <p:ext uri="{BB962C8B-B14F-4D97-AF65-F5344CB8AC3E}">
+        <p14:creationId xmlns:p14="http://schemas.microsoft.com/office/powerpoint/2010/main" val="2297956533"/>
+      </p:ext>
+    </p:extLst>
+  </p:cSld>
+  <p:clrMapOvr>
+    <a:masterClrMapping/>
+  </p:clrMapOvr>
+</p:sld>
+</file>
+
+<file path=ppt/slides/slide11.xml><?xml version="1.0" encoding="utf-8"?>
+<p:sld xmlns:a="http://schemas.openxmlformats.org/drawingml/2006/main" xmlns:r="http://schemas.openxmlformats.org/officeDocument/2006/relationships" xmlns:p="http://schemas.openxmlformats.org/presentationml/2006/main">
+  <p:cSld>
+    <p:spTree>
+      <p:nvGrpSpPr>
+        <p:cNvPr id="1" name=""/>
+        <p:cNvGrpSpPr/>
+        <p:nvPr/>
+      </p:nvGrpSpPr>
+      <p:grpSpPr>
+        <a:xfrm>
+          <a:off x="0" y="0"/>
+          <a:ext cx="0" cy="0"/>
+          <a:chOff x="0" y="0"/>
+          <a:chExt cx="0" cy="0"/>
+        </a:xfrm>
+      </p:grpSpPr>
+      <p:sp>
+        <p:nvSpPr>
           <p:cNvPr id="2" name="Titre 1">
             <a:extLst>
               <a:ext uri="{FF2B5EF4-FFF2-40B4-BE49-F238E27FC236}">
@@ -10388,6 +15485,870 @@
           <a:chExt cx="0" cy="0"/>
         </a:xfrm>
       </p:grpSpPr>
+      <p:sp>
+        <p:nvSpPr>
+          <p:cNvPr id="2" name="Titre 1">
+            <a:extLst>
+              <a:ext uri="{FF2B5EF4-FFF2-40B4-BE49-F238E27FC236}">
+                <a16:creationId xmlns:a16="http://schemas.microsoft.com/office/drawing/2014/main" id="{A252341B-7A2D-75F7-2C2D-EED801A5D175}"/>
+              </a:ext>
+            </a:extLst>
+          </p:cNvPr>
+          <p:cNvSpPr>
+            <a:spLocks noGrp="1"/>
+          </p:cNvSpPr>
+          <p:nvPr>
+            <p:ph type="title"/>
+          </p:nvPr>
+        </p:nvSpPr>
+        <p:spPr/>
+        <p:txBody>
+          <a:bodyPr/>
+          <a:lstStyle/>
+          <a:p>
+            <a:r>
+              <a:rPr lang="fr-FR" dirty="0" err="1"/>
+              <a:t>Where</a:t>
+            </a:r>
+            <a:r>
+              <a:rPr lang="fr-FR" dirty="0"/>
+              <a:t> are </a:t>
+            </a:r>
+            <a:r>
+              <a:rPr lang="fr-FR" dirty="0" err="1"/>
+              <a:t>we</a:t>
+            </a:r>
+            <a:r>
+              <a:rPr lang="fr-FR" dirty="0"/>
+              <a:t> in </a:t>
+            </a:r>
+            <a:r>
+              <a:rPr lang="fr-FR"/>
+              <a:t>the process</a:t>
+            </a:r>
+            <a:endParaRPr lang="fr-FR" dirty="0"/>
+          </a:p>
+        </p:txBody>
+      </p:sp>
+      <p:graphicFrame>
+        <p:nvGraphicFramePr>
+          <p:cNvPr id="4" name="Diagramme 3">
+            <a:extLst>
+              <a:ext uri="{FF2B5EF4-FFF2-40B4-BE49-F238E27FC236}">
+                <a16:creationId xmlns:a16="http://schemas.microsoft.com/office/drawing/2014/main" id="{93EF82BD-25BA-73B5-101E-C7AF47FEF4D2}"/>
+              </a:ext>
+            </a:extLst>
+          </p:cNvPr>
+          <p:cNvGraphicFramePr/>
+          <p:nvPr>
+            <p:extLst>
+              <p:ext uri="{D42A27DB-BD31-4B8C-83A1-F6EECF244321}">
+                <p14:modId xmlns:p14="http://schemas.microsoft.com/office/powerpoint/2010/main" val="424737625"/>
+              </p:ext>
+            </p:extLst>
+          </p:nvPr>
+        </p:nvGraphicFramePr>
+        <p:xfrm>
+          <a:off x="838200" y="1065646"/>
+          <a:ext cx="11067626" cy="6800427"/>
+        </p:xfrm>
+        <a:graphic>
+          <a:graphicData uri="http://schemas.openxmlformats.org/drawingml/2006/diagram">
+            <dgm:relIds xmlns:dgm="http://schemas.openxmlformats.org/drawingml/2006/diagram" xmlns:r="http://schemas.openxmlformats.org/officeDocument/2006/relationships" r:dm="rId3" r:lo="rId4" r:qs="rId5" r:cs="rId6"/>
+          </a:graphicData>
+        </a:graphic>
+      </p:graphicFrame>
+      <p:pic>
+        <p:nvPicPr>
+          <p:cNvPr id="6" name="Graphique 5" descr="Télécharger du cloud avec un remplissage uni">
+            <a:extLst>
+              <a:ext uri="{FF2B5EF4-FFF2-40B4-BE49-F238E27FC236}">
+                <a16:creationId xmlns:a16="http://schemas.microsoft.com/office/drawing/2014/main" id="{B6E74B60-254A-8FDD-59B9-4840940558C1}"/>
+              </a:ext>
+            </a:extLst>
+          </p:cNvPr>
+          <p:cNvPicPr>
+            <a:picLocks noChangeAspect="1"/>
+          </p:cNvPicPr>
+          <p:nvPr/>
+        </p:nvPicPr>
+        <p:blipFill>
+          <a:blip r:embed="rId8">
+            <a:extLst>
+              <a:ext uri="{28A0092B-C50C-407E-A947-70E740481C1C}">
+                <a14:useLocalDpi xmlns:a14="http://schemas.microsoft.com/office/drawing/2010/main" val="0"/>
+              </a:ext>
+              <a:ext uri="{96DAC541-7B7A-43D3-8B79-37D633B846F1}">
+                <asvg:svgBlip xmlns:asvg="http://schemas.microsoft.com/office/drawing/2016/SVG/main" r:embed="rId9"/>
+              </a:ext>
+            </a:extLst>
+          </a:blip>
+          <a:stretch>
+            <a:fillRect/>
+          </a:stretch>
+        </p:blipFill>
+        <p:spPr>
+          <a:xfrm>
+            <a:off x="398025" y="2341880"/>
+            <a:ext cx="914400" cy="914400"/>
+          </a:xfrm>
+          <a:prstGeom prst="rect">
+            <a:avLst/>
+          </a:prstGeom>
+        </p:spPr>
+      </p:pic>
+      <p:grpSp>
+        <p:nvGrpSpPr>
+          <p:cNvPr id="14" name="Groupe 13">
+            <a:extLst>
+              <a:ext uri="{FF2B5EF4-FFF2-40B4-BE49-F238E27FC236}">
+                <a16:creationId xmlns:a16="http://schemas.microsoft.com/office/drawing/2014/main" id="{750F5C85-4BDA-3BD0-AE8F-33297B726DBC}"/>
+              </a:ext>
+            </a:extLst>
+          </p:cNvPr>
+          <p:cNvGrpSpPr/>
+          <p:nvPr/>
+        </p:nvGrpSpPr>
+        <p:grpSpPr>
+          <a:xfrm>
+            <a:off x="2405628" y="2157215"/>
+            <a:ext cx="917787" cy="1110103"/>
+            <a:chOff x="1899920" y="1425695"/>
+            <a:chExt cx="917787" cy="1110103"/>
+          </a:xfrm>
+        </p:grpSpPr>
+        <p:pic>
+          <p:nvPicPr>
+            <p:cNvPr id="8" name="Graphique 7" descr="Calendrier mensuel avec un remplissage uni">
+              <a:extLst>
+                <a:ext uri="{FF2B5EF4-FFF2-40B4-BE49-F238E27FC236}">
+                  <a16:creationId xmlns:a16="http://schemas.microsoft.com/office/drawing/2014/main" id="{DF429A1D-140D-0107-C3D2-A58022102585}"/>
+                </a:ext>
+              </a:extLst>
+            </p:cNvPr>
+            <p:cNvPicPr>
+              <a:picLocks noChangeAspect="1"/>
+            </p:cNvPicPr>
+            <p:nvPr/>
+          </p:nvPicPr>
+          <p:blipFill>
+            <a:blip r:embed="rId10">
+              <a:extLst>
+                <a:ext uri="{28A0092B-C50C-407E-A947-70E740481C1C}">
+                  <a14:useLocalDpi xmlns:a14="http://schemas.microsoft.com/office/drawing/2010/main" val="0"/>
+                </a:ext>
+                <a:ext uri="{96DAC541-7B7A-43D3-8B79-37D633B846F1}">
+                  <asvg:svgBlip xmlns:asvg="http://schemas.microsoft.com/office/drawing/2016/SVG/main" r:embed="rId11"/>
+                </a:ext>
+              </a:extLst>
+            </a:blip>
+            <a:stretch>
+              <a:fillRect/>
+            </a:stretch>
+          </p:blipFill>
+          <p:spPr>
+            <a:xfrm>
+              <a:off x="1899920" y="1621398"/>
+              <a:ext cx="914400" cy="914400"/>
+            </a:xfrm>
+            <a:prstGeom prst="rect">
+              <a:avLst/>
+            </a:prstGeom>
+          </p:spPr>
+        </p:pic>
+        <p:sp>
+          <p:nvSpPr>
+            <p:cNvPr id="11" name="ZoneTexte 10">
+              <a:extLst>
+                <a:ext uri="{FF2B5EF4-FFF2-40B4-BE49-F238E27FC236}">
+                  <a16:creationId xmlns:a16="http://schemas.microsoft.com/office/drawing/2014/main" id="{CC351882-3B9B-430B-5D2F-E658EC8A546D}"/>
+                </a:ext>
+              </a:extLst>
+            </p:cNvPr>
+            <p:cNvSpPr txBox="1"/>
+            <p:nvPr/>
+          </p:nvSpPr>
+          <p:spPr>
+            <a:xfrm>
+              <a:off x="1936699" y="1425695"/>
+              <a:ext cx="881008" cy="369330"/>
+            </a:xfrm>
+            <a:prstGeom prst="rect">
+              <a:avLst/>
+            </a:prstGeom>
+            <a:noFill/>
+            <a:ln w="12700" cap="flat">
+              <a:noFill/>
+              <a:miter lim="400000"/>
+            </a:ln>
+            <a:effectLst/>
+            <a:sp3d/>
+          </p:spPr>
+          <p:style>
+            <a:lnRef idx="0">
+              <a:scrgbClr r="0" g="0" b="0"/>
+            </a:lnRef>
+            <a:fillRef idx="0">
+              <a:scrgbClr r="0" g="0" b="0"/>
+            </a:fillRef>
+            <a:effectRef idx="0">
+              <a:scrgbClr r="0" g="0" b="0"/>
+            </a:effectRef>
+            <a:fontRef idx="none"/>
+          </p:style>
+          <p:txBody>
+            <a:bodyPr rot="0" spcFirstLastPara="1" vertOverflow="overflow" horzOverflow="overflow" vert="horz" wrap="none" lIns="45719" tIns="45719" rIns="45719" bIns="45719" numCol="1" spcCol="38100" rtlCol="0" anchor="t">
+              <a:spAutoFit/>
+            </a:bodyPr>
+            <a:lstStyle/>
+            <a:p>
+              <a:pPr marL="0" marR="0" indent="0" algn="l" defTabSz="914400" rtl="0" fontAlgn="auto" latinLnBrk="0" hangingPunct="0">
+                <a:lnSpc>
+                  <a:spcPct val="100000"/>
+                </a:lnSpc>
+                <a:spcBef>
+                  <a:spcPts val="0"/>
+                </a:spcBef>
+                <a:spcAft>
+                  <a:spcPts val="0"/>
+                </a:spcAft>
+                <a:buClrTx/>
+                <a:buSzTx/>
+                <a:buFontTx/>
+                <a:buNone/>
+                <a:tabLst/>
+              </a:pPr>
+              <a:r>
+                <a:rPr kumimoji="0" lang="fr-FR" sz="1800" b="0" i="0" u="none" strike="noStrike" cap="none" spc="0" normalizeH="0" baseline="0" dirty="0">
+                  <a:ln>
+                    <a:noFill/>
+                  </a:ln>
+                  <a:solidFill>
+                    <a:srgbClr val="000000"/>
+                  </a:solidFill>
+                  <a:effectLst/>
+                  <a:uFillTx/>
+                  <a:latin typeface="Oswald Regular" panose="020B0604020202020204" charset="0"/>
+                  <a:sym typeface="Calibri"/>
+                </a:rPr>
+                <a:t>Data </a:t>
+              </a:r>
+              <a:r>
+                <a:rPr kumimoji="0" lang="fr-FR" sz="1800" b="0" i="0" u="none" strike="noStrike" cap="none" spc="0" normalizeH="0" baseline="0" dirty="0" err="1">
+                  <a:ln>
+                    <a:noFill/>
+                  </a:ln>
+                  <a:solidFill>
+                    <a:srgbClr val="000000"/>
+                  </a:solidFill>
+                  <a:effectLst/>
+                  <a:uFillTx/>
+                  <a:latin typeface="Oswald Regular" panose="020B0604020202020204" charset="0"/>
+                  <a:sym typeface="Calibri"/>
+                </a:rPr>
+                <a:t>lake</a:t>
+              </a:r>
+              <a:endParaRPr kumimoji="0" lang="fr-FR" sz="1800" b="0" i="0" u="none" strike="noStrike" cap="none" spc="0" normalizeH="0" baseline="0" dirty="0">
+                <a:ln>
+                  <a:noFill/>
+                </a:ln>
+                <a:solidFill>
+                  <a:srgbClr val="000000"/>
+                </a:solidFill>
+                <a:effectLst/>
+                <a:uFillTx/>
+                <a:latin typeface="Oswald Regular" panose="020B0604020202020204" charset="0"/>
+                <a:sym typeface="Calibri"/>
+              </a:endParaRPr>
+            </a:p>
+          </p:txBody>
+        </p:sp>
+      </p:grpSp>
+      <p:grpSp>
+        <p:nvGrpSpPr>
+          <p:cNvPr id="13" name="Groupe 12">
+            <a:extLst>
+              <a:ext uri="{FF2B5EF4-FFF2-40B4-BE49-F238E27FC236}">
+                <a16:creationId xmlns:a16="http://schemas.microsoft.com/office/drawing/2014/main" id="{929D4B47-F956-A3BD-CF7A-B31A89C74FD6}"/>
+              </a:ext>
+            </a:extLst>
+          </p:cNvPr>
+          <p:cNvGrpSpPr/>
+          <p:nvPr/>
+        </p:nvGrpSpPr>
+        <p:grpSpPr>
+          <a:xfrm>
+            <a:off x="4329236" y="2157215"/>
+            <a:ext cx="1424427" cy="1110103"/>
+            <a:chOff x="3848238" y="1425695"/>
+            <a:chExt cx="1424427" cy="1110103"/>
+          </a:xfrm>
+        </p:grpSpPr>
+        <p:pic>
+          <p:nvPicPr>
+            <p:cNvPr id="10" name="Graphique 9" descr="Calendrier journalier contour">
+              <a:extLst>
+                <a:ext uri="{FF2B5EF4-FFF2-40B4-BE49-F238E27FC236}">
+                  <a16:creationId xmlns:a16="http://schemas.microsoft.com/office/drawing/2014/main" id="{246BC430-53E9-77DA-EC0C-A53CFBF2B0C2}"/>
+                </a:ext>
+              </a:extLst>
+            </p:cNvPr>
+            <p:cNvPicPr>
+              <a:picLocks noChangeAspect="1"/>
+            </p:cNvPicPr>
+            <p:nvPr/>
+          </p:nvPicPr>
+          <p:blipFill>
+            <a:blip r:embed="rId12">
+              <a:extLst>
+                <a:ext uri="{28A0092B-C50C-407E-A947-70E740481C1C}">
+                  <a14:useLocalDpi xmlns:a14="http://schemas.microsoft.com/office/drawing/2010/main" val="0"/>
+                </a:ext>
+                <a:ext uri="{96DAC541-7B7A-43D3-8B79-37D633B846F1}">
+                  <asvg:svgBlip xmlns:asvg="http://schemas.microsoft.com/office/drawing/2016/SVG/main" r:embed="rId13"/>
+                </a:ext>
+              </a:extLst>
+            </a:blip>
+            <a:stretch>
+              <a:fillRect/>
+            </a:stretch>
+          </p:blipFill>
+          <p:spPr>
+            <a:xfrm>
+              <a:off x="4122560" y="1621398"/>
+              <a:ext cx="914400" cy="914400"/>
+            </a:xfrm>
+            <a:prstGeom prst="rect">
+              <a:avLst/>
+            </a:prstGeom>
+          </p:spPr>
+        </p:pic>
+        <p:sp>
+          <p:nvSpPr>
+            <p:cNvPr id="12" name="ZoneTexte 11">
+              <a:extLst>
+                <a:ext uri="{FF2B5EF4-FFF2-40B4-BE49-F238E27FC236}">
+                  <a16:creationId xmlns:a16="http://schemas.microsoft.com/office/drawing/2014/main" id="{9EBF4763-CD1C-37E5-0F7F-B6881461FF54}"/>
+                </a:ext>
+              </a:extLst>
+            </p:cNvPr>
+            <p:cNvSpPr txBox="1"/>
+            <p:nvPr/>
+          </p:nvSpPr>
+          <p:spPr>
+            <a:xfrm>
+              <a:off x="3848238" y="1425695"/>
+              <a:ext cx="1424427" cy="369330"/>
+            </a:xfrm>
+            <a:prstGeom prst="rect">
+              <a:avLst/>
+            </a:prstGeom>
+            <a:noFill/>
+            <a:ln w="12700" cap="flat">
+              <a:noFill/>
+              <a:miter lim="400000"/>
+            </a:ln>
+            <a:effectLst/>
+            <a:sp3d/>
+          </p:spPr>
+          <p:style>
+            <a:lnRef idx="0">
+              <a:scrgbClr r="0" g="0" b="0"/>
+            </a:lnRef>
+            <a:fillRef idx="0">
+              <a:scrgbClr r="0" g="0" b="0"/>
+            </a:fillRef>
+            <a:effectRef idx="0">
+              <a:scrgbClr r="0" g="0" b="0"/>
+            </a:effectRef>
+            <a:fontRef idx="none"/>
+          </p:style>
+          <p:txBody>
+            <a:bodyPr rot="0" spcFirstLastPara="1" vertOverflow="overflow" horzOverflow="overflow" vert="horz" wrap="none" lIns="45719" tIns="45719" rIns="45719" bIns="45719" numCol="1" spcCol="38100" rtlCol="0" anchor="t">
+              <a:spAutoFit/>
+            </a:bodyPr>
+            <a:lstStyle/>
+            <a:p>
+              <a:pPr marL="0" marR="0" indent="0" algn="l" defTabSz="914400" rtl="0" fontAlgn="auto" latinLnBrk="0" hangingPunct="0">
+                <a:lnSpc>
+                  <a:spcPct val="100000"/>
+                </a:lnSpc>
+                <a:spcBef>
+                  <a:spcPts val="0"/>
+                </a:spcBef>
+                <a:spcAft>
+                  <a:spcPts val="0"/>
+                </a:spcAft>
+                <a:buClrTx/>
+                <a:buSzTx/>
+                <a:buFontTx/>
+                <a:buNone/>
+                <a:tabLst/>
+              </a:pPr>
+              <a:r>
+                <a:rPr kumimoji="0" lang="fr-FR" sz="1800" b="0" i="0" u="none" strike="noStrike" cap="none" spc="0" normalizeH="0" baseline="0" dirty="0">
+                  <a:ln>
+                    <a:noFill/>
+                  </a:ln>
+                  <a:solidFill>
+                    <a:srgbClr val="000000"/>
+                  </a:solidFill>
+                  <a:effectLst/>
+                  <a:uFillTx/>
+                  <a:latin typeface="Oswald Regular" panose="020B0604020202020204" charset="0"/>
+                  <a:sym typeface="Calibri"/>
+                </a:rPr>
+                <a:t>Data </a:t>
+              </a:r>
+              <a:r>
+                <a:rPr kumimoji="0" lang="fr-FR" sz="1800" b="0" i="0" u="none" strike="noStrike" cap="none" spc="0" normalizeH="0" baseline="0" dirty="0" err="1">
+                  <a:ln>
+                    <a:noFill/>
+                  </a:ln>
+                  <a:solidFill>
+                    <a:srgbClr val="000000"/>
+                  </a:solidFill>
+                  <a:effectLst/>
+                  <a:uFillTx/>
+                  <a:latin typeface="Oswald Regular" panose="020B0604020202020204" charset="0"/>
+                  <a:sym typeface="Calibri"/>
+                </a:rPr>
+                <a:t>warehouse</a:t>
+              </a:r>
+              <a:endParaRPr kumimoji="0" lang="fr-FR" sz="1800" b="0" i="0" u="none" strike="noStrike" cap="none" spc="0" normalizeH="0" baseline="0" dirty="0">
+                <a:ln>
+                  <a:noFill/>
+                </a:ln>
+                <a:solidFill>
+                  <a:srgbClr val="000000"/>
+                </a:solidFill>
+                <a:effectLst/>
+                <a:uFillTx/>
+                <a:latin typeface="Oswald Regular" panose="020B0604020202020204" charset="0"/>
+                <a:sym typeface="Calibri"/>
+              </a:endParaRPr>
+            </a:p>
+          </p:txBody>
+        </p:sp>
+      </p:grpSp>
+      <p:sp>
+        <p:nvSpPr>
+          <p:cNvPr id="15" name="ZoneTexte 14">
+            <a:extLst>
+              <a:ext uri="{FF2B5EF4-FFF2-40B4-BE49-F238E27FC236}">
+                <a16:creationId xmlns:a16="http://schemas.microsoft.com/office/drawing/2014/main" id="{7FBC7647-AEBB-C182-B4C1-F0D59229BC54}"/>
+              </a:ext>
+            </a:extLst>
+          </p:cNvPr>
+          <p:cNvSpPr txBox="1"/>
+          <p:nvPr/>
+        </p:nvSpPr>
+        <p:spPr>
+          <a:xfrm>
+            <a:off x="574525" y="2168253"/>
+            <a:ext cx="461022" cy="369330"/>
+          </a:xfrm>
+          <a:prstGeom prst="rect">
+            <a:avLst/>
+          </a:prstGeom>
+          <a:noFill/>
+          <a:ln w="12700" cap="flat">
+            <a:noFill/>
+            <a:miter lim="400000"/>
+          </a:ln>
+          <a:effectLst/>
+          <a:sp3d/>
+        </p:spPr>
+        <p:style>
+          <a:lnRef idx="0">
+            <a:scrgbClr r="0" g="0" b="0"/>
+          </a:lnRef>
+          <a:fillRef idx="0">
+            <a:scrgbClr r="0" g="0" b="0"/>
+          </a:fillRef>
+          <a:effectRef idx="0">
+            <a:scrgbClr r="0" g="0" b="0"/>
+          </a:effectRef>
+          <a:fontRef idx="none"/>
+        </p:style>
+        <p:txBody>
+          <a:bodyPr rot="0" spcFirstLastPara="1" vertOverflow="overflow" horzOverflow="overflow" vert="horz" wrap="none" lIns="45719" tIns="45719" rIns="45719" bIns="45719" numCol="1" spcCol="38100" rtlCol="0" anchor="t">
+            <a:spAutoFit/>
+          </a:bodyPr>
+          <a:lstStyle/>
+          <a:p>
+            <a:pPr marL="0" marR="0" indent="0" algn="l" defTabSz="914400" rtl="0" fontAlgn="auto" latinLnBrk="0" hangingPunct="0">
+              <a:lnSpc>
+                <a:spcPct val="100000"/>
+              </a:lnSpc>
+              <a:spcBef>
+                <a:spcPts val="0"/>
+              </a:spcBef>
+              <a:spcAft>
+                <a:spcPts val="0"/>
+              </a:spcAft>
+              <a:buClrTx/>
+              <a:buSzTx/>
+              <a:buFontTx/>
+              <a:buNone/>
+              <a:tabLst/>
+            </a:pPr>
+            <a:r>
+              <a:rPr kumimoji="0" lang="fr-FR" sz="1800" b="0" i="0" u="none" strike="noStrike" cap="none" spc="0" normalizeH="0" baseline="0" dirty="0">
+                <a:ln>
+                  <a:noFill/>
+                </a:ln>
+                <a:solidFill>
+                  <a:srgbClr val="000000"/>
+                </a:solidFill>
+                <a:effectLst/>
+                <a:uFillTx/>
+                <a:latin typeface="Oswald Regular" panose="020B0604020202020204" charset="0"/>
+                <a:sym typeface="Calibri"/>
+              </a:rPr>
+              <a:t>Web</a:t>
+            </a:r>
+          </a:p>
+        </p:txBody>
+      </p:sp>
+      <p:grpSp>
+        <p:nvGrpSpPr>
+          <p:cNvPr id="22" name="Groupe 21">
+            <a:extLst>
+              <a:ext uri="{FF2B5EF4-FFF2-40B4-BE49-F238E27FC236}">
+                <a16:creationId xmlns:a16="http://schemas.microsoft.com/office/drawing/2014/main" id="{93F441C8-C321-F6E5-D0C1-3DFADDBE7D35}"/>
+              </a:ext>
+            </a:extLst>
+          </p:cNvPr>
+          <p:cNvGrpSpPr/>
+          <p:nvPr/>
+        </p:nvGrpSpPr>
+        <p:grpSpPr>
+          <a:xfrm>
+            <a:off x="6762874" y="2170363"/>
+            <a:ext cx="1890900" cy="1049277"/>
+            <a:chOff x="6627864" y="1438843"/>
+            <a:chExt cx="1890900" cy="1049277"/>
+          </a:xfrm>
+        </p:grpSpPr>
+        <p:pic>
+          <p:nvPicPr>
+            <p:cNvPr id="20" name="Graphique 19" descr="Papier avec un remplissage uni">
+              <a:extLst>
+                <a:ext uri="{FF2B5EF4-FFF2-40B4-BE49-F238E27FC236}">
+                  <a16:creationId xmlns:a16="http://schemas.microsoft.com/office/drawing/2014/main" id="{AC8F8798-FB95-6A12-AA6E-F4319578F97F}"/>
+                </a:ext>
+              </a:extLst>
+            </p:cNvPr>
+            <p:cNvPicPr>
+              <a:picLocks noChangeAspect="1"/>
+            </p:cNvPicPr>
+            <p:nvPr/>
+          </p:nvPicPr>
+          <p:blipFill>
+            <a:blip r:embed="rId14">
+              <a:extLst>
+                <a:ext uri="{28A0092B-C50C-407E-A947-70E740481C1C}">
+                  <a14:useLocalDpi xmlns:a14="http://schemas.microsoft.com/office/drawing/2010/main" val="0"/>
+                </a:ext>
+                <a:ext uri="{96DAC541-7B7A-43D3-8B79-37D633B846F1}">
+                  <asvg:svgBlip xmlns:asvg="http://schemas.microsoft.com/office/drawing/2016/SVG/main" r:embed="rId15"/>
+                </a:ext>
+              </a:extLst>
+            </a:blip>
+            <a:stretch>
+              <a:fillRect/>
+            </a:stretch>
+          </p:blipFill>
+          <p:spPr>
+            <a:xfrm>
+              <a:off x="6682458" y="1740906"/>
+              <a:ext cx="747214" cy="747214"/>
+            </a:xfrm>
+            <a:prstGeom prst="rect">
+              <a:avLst/>
+            </a:prstGeom>
+          </p:spPr>
+        </p:pic>
+        <p:sp>
+          <p:nvSpPr>
+            <p:cNvPr id="21" name="ZoneTexte 20">
+              <a:extLst>
+                <a:ext uri="{FF2B5EF4-FFF2-40B4-BE49-F238E27FC236}">
+                  <a16:creationId xmlns:a16="http://schemas.microsoft.com/office/drawing/2014/main" id="{61A11F4C-1837-3EE8-9ED9-6A6591CABCBC}"/>
+                </a:ext>
+              </a:extLst>
+            </p:cNvPr>
+            <p:cNvSpPr txBox="1"/>
+            <p:nvPr/>
+          </p:nvSpPr>
+          <p:spPr>
+            <a:xfrm>
+              <a:off x="6627864" y="1438843"/>
+              <a:ext cx="1890900" cy="369330"/>
+            </a:xfrm>
+            <a:prstGeom prst="rect">
+              <a:avLst/>
+            </a:prstGeom>
+            <a:noFill/>
+            <a:ln w="12700" cap="flat">
+              <a:noFill/>
+              <a:miter lim="400000"/>
+            </a:ln>
+            <a:effectLst/>
+            <a:sp3d/>
+          </p:spPr>
+          <p:style>
+            <a:lnRef idx="0">
+              <a:scrgbClr r="0" g="0" b="0"/>
+            </a:lnRef>
+            <a:fillRef idx="0">
+              <a:scrgbClr r="0" g="0" b="0"/>
+            </a:fillRef>
+            <a:effectRef idx="0">
+              <a:scrgbClr r="0" g="0" b="0"/>
+            </a:effectRef>
+            <a:fontRef idx="none"/>
+          </p:style>
+          <p:txBody>
+            <a:bodyPr rot="0" spcFirstLastPara="1" vertOverflow="overflow" horzOverflow="overflow" vert="horz" wrap="none" lIns="45719" tIns="45719" rIns="45719" bIns="45719" numCol="1" spcCol="38100" rtlCol="0" anchor="t">
+              <a:spAutoFit/>
+            </a:bodyPr>
+            <a:lstStyle/>
+            <a:p>
+              <a:pPr marL="0" marR="0" indent="0" algn="l" defTabSz="914400" rtl="0" fontAlgn="auto" latinLnBrk="0" hangingPunct="0">
+                <a:lnSpc>
+                  <a:spcPct val="100000"/>
+                </a:lnSpc>
+                <a:spcBef>
+                  <a:spcPts val="0"/>
+                </a:spcBef>
+                <a:spcAft>
+                  <a:spcPts val="0"/>
+                </a:spcAft>
+                <a:buClrTx/>
+                <a:buSzTx/>
+                <a:buFontTx/>
+                <a:buNone/>
+                <a:tabLst/>
+              </a:pPr>
+              <a:r>
+                <a:rPr kumimoji="0" lang="fr-FR" sz="1800" b="0" i="0" u="none" strike="noStrike" cap="none" spc="0" normalizeH="0" baseline="0" dirty="0">
+                  <a:ln>
+                    <a:noFill/>
+                  </a:ln>
+                  <a:solidFill>
+                    <a:srgbClr val="000000"/>
+                  </a:solidFill>
+                  <a:effectLst/>
+                  <a:uFillTx/>
+                  <a:latin typeface="Oswald Regular" panose="020B0604020202020204" charset="0"/>
+                  <a:sym typeface="Calibri"/>
+                </a:rPr>
+                <a:t>Data for </a:t>
+              </a:r>
+              <a:r>
+                <a:rPr kumimoji="0" lang="fr-FR" sz="1800" b="0" i="0" u="none" strike="noStrike" cap="none" spc="0" normalizeH="0" baseline="0" dirty="0" err="1">
+                  <a:ln>
+                    <a:noFill/>
+                  </a:ln>
+                  <a:solidFill>
+                    <a:srgbClr val="000000"/>
+                  </a:solidFill>
+                  <a:effectLst/>
+                  <a:uFillTx/>
+                  <a:latin typeface="Oswald Regular" panose="020B0604020202020204" charset="0"/>
+                  <a:sym typeface="Calibri"/>
+                </a:rPr>
+                <a:t>modelisation</a:t>
+              </a:r>
+              <a:endParaRPr kumimoji="0" lang="fr-FR" sz="1800" b="0" i="0" u="none" strike="noStrike" cap="none" spc="0" normalizeH="0" baseline="0" dirty="0">
+                <a:ln>
+                  <a:noFill/>
+                </a:ln>
+                <a:solidFill>
+                  <a:srgbClr val="000000"/>
+                </a:solidFill>
+                <a:effectLst/>
+                <a:uFillTx/>
+                <a:latin typeface="Oswald Regular" panose="020B0604020202020204" charset="0"/>
+                <a:sym typeface="Calibri"/>
+              </a:endParaRPr>
+            </a:p>
+          </p:txBody>
+        </p:sp>
+      </p:grpSp>
+      <p:grpSp>
+        <p:nvGrpSpPr>
+          <p:cNvPr id="5" name="Groupe 4">
+            <a:extLst>
+              <a:ext uri="{FF2B5EF4-FFF2-40B4-BE49-F238E27FC236}">
+                <a16:creationId xmlns:a16="http://schemas.microsoft.com/office/drawing/2014/main" id="{0BE0D992-8549-9A8A-AD05-EEA702837F8D}"/>
+              </a:ext>
+            </a:extLst>
+          </p:cNvPr>
+          <p:cNvGrpSpPr/>
+          <p:nvPr/>
+        </p:nvGrpSpPr>
+        <p:grpSpPr>
+          <a:xfrm>
+            <a:off x="10179690" y="2168253"/>
+            <a:ext cx="1065354" cy="1051868"/>
+            <a:chOff x="9828439" y="1436733"/>
+            <a:chExt cx="1065354" cy="1051868"/>
+          </a:xfrm>
+        </p:grpSpPr>
+        <p:pic>
+          <p:nvPicPr>
+            <p:cNvPr id="17" name="Graphique 16" descr="Document avec un remplissage uni">
+              <a:extLst>
+                <a:ext uri="{FF2B5EF4-FFF2-40B4-BE49-F238E27FC236}">
+                  <a16:creationId xmlns:a16="http://schemas.microsoft.com/office/drawing/2014/main" id="{907F218A-8108-179F-A500-4405C1DB5D9A}"/>
+                </a:ext>
+              </a:extLst>
+            </p:cNvPr>
+            <p:cNvPicPr>
+              <a:picLocks noChangeAspect="1"/>
+            </p:cNvPicPr>
+            <p:nvPr/>
+          </p:nvPicPr>
+          <p:blipFill>
+            <a:blip r:embed="rId16">
+              <a:extLst>
+                <a:ext uri="{28A0092B-C50C-407E-A947-70E740481C1C}">
+                  <a14:useLocalDpi xmlns:a14="http://schemas.microsoft.com/office/drawing/2010/main" val="0"/>
+                </a:ext>
+                <a:ext uri="{96DAC541-7B7A-43D3-8B79-37D633B846F1}">
+                  <asvg:svgBlip xmlns:asvg="http://schemas.microsoft.com/office/drawing/2016/SVG/main" r:embed="rId17"/>
+                </a:ext>
+              </a:extLst>
+            </a:blip>
+            <a:stretch>
+              <a:fillRect/>
+            </a:stretch>
+          </p:blipFill>
+          <p:spPr>
+            <a:xfrm>
+              <a:off x="10071926" y="1740907"/>
+              <a:ext cx="747694" cy="747694"/>
+            </a:xfrm>
+            <a:prstGeom prst="rect">
+              <a:avLst/>
+            </a:prstGeom>
+          </p:spPr>
+        </p:pic>
+        <p:sp>
+          <p:nvSpPr>
+            <p:cNvPr id="3" name="ZoneTexte 2">
+              <a:extLst>
+                <a:ext uri="{FF2B5EF4-FFF2-40B4-BE49-F238E27FC236}">
+                  <a16:creationId xmlns:a16="http://schemas.microsoft.com/office/drawing/2014/main" id="{248AD999-4D19-0EDC-F726-3ADCC689077A}"/>
+                </a:ext>
+              </a:extLst>
+            </p:cNvPr>
+            <p:cNvSpPr txBox="1"/>
+            <p:nvPr/>
+          </p:nvSpPr>
+          <p:spPr>
+            <a:xfrm>
+              <a:off x="9828439" y="1436733"/>
+              <a:ext cx="1065354" cy="369330"/>
+            </a:xfrm>
+            <a:prstGeom prst="rect">
+              <a:avLst/>
+            </a:prstGeom>
+            <a:noFill/>
+            <a:ln w="12700" cap="flat">
+              <a:noFill/>
+              <a:miter lim="400000"/>
+            </a:ln>
+            <a:effectLst/>
+            <a:sp3d/>
+          </p:spPr>
+          <p:style>
+            <a:lnRef idx="0">
+              <a:scrgbClr r="0" g="0" b="0"/>
+            </a:lnRef>
+            <a:fillRef idx="0">
+              <a:scrgbClr r="0" g="0" b="0"/>
+            </a:fillRef>
+            <a:effectRef idx="0">
+              <a:scrgbClr r="0" g="0" b="0"/>
+            </a:effectRef>
+            <a:fontRef idx="none"/>
+          </p:style>
+          <p:txBody>
+            <a:bodyPr rot="0" spcFirstLastPara="1" vertOverflow="overflow" horzOverflow="overflow" vert="horz" wrap="none" lIns="45719" tIns="45719" rIns="45719" bIns="45719" numCol="1" spcCol="38100" rtlCol="0" anchor="t">
+              <a:spAutoFit/>
+            </a:bodyPr>
+            <a:lstStyle/>
+            <a:p>
+              <a:pPr marL="0" marR="0" indent="0" algn="l" defTabSz="914400" rtl="0" fontAlgn="auto" latinLnBrk="0" hangingPunct="0">
+                <a:lnSpc>
+                  <a:spcPct val="100000"/>
+                </a:lnSpc>
+                <a:spcBef>
+                  <a:spcPts val="0"/>
+                </a:spcBef>
+                <a:spcAft>
+                  <a:spcPts val="0"/>
+                </a:spcAft>
+                <a:buClrTx/>
+                <a:buSzTx/>
+                <a:buFontTx/>
+                <a:buNone/>
+                <a:tabLst/>
+              </a:pPr>
+              <a:r>
+                <a:rPr kumimoji="0" lang="fr-FR" sz="1800" b="0" i="0" u="none" strike="noStrike" cap="none" spc="0" normalizeH="0" baseline="0" dirty="0">
+                  <a:ln>
+                    <a:noFill/>
+                  </a:ln>
+                  <a:solidFill>
+                    <a:srgbClr val="000000"/>
+                  </a:solidFill>
+                  <a:effectLst/>
+                  <a:uFillTx/>
+                  <a:latin typeface="Oswald Regular" panose="020B0604020202020204" charset="0"/>
+                  <a:sym typeface="Calibri"/>
+                </a:rPr>
+                <a:t>Information</a:t>
+              </a:r>
+            </a:p>
+          </p:txBody>
+        </p:sp>
+      </p:grpSp>
+    </p:spTree>
+    <p:extLst>
+      <p:ext uri="{BB962C8B-B14F-4D97-AF65-F5344CB8AC3E}">
+        <p14:creationId xmlns:p14="http://schemas.microsoft.com/office/powerpoint/2010/main" val="747625521"/>
+      </p:ext>
+    </p:extLst>
+  </p:cSld>
+  <p:clrMapOvr>
+    <a:masterClrMapping/>
+  </p:clrMapOvr>
+  <p:transition spd="med"/>
+</p:sld>
+</file>
+
+<file path=ppt/slides/slide8.xml><?xml version="1.0" encoding="utf-8"?>
+<p:sld xmlns:a="http://schemas.openxmlformats.org/drawingml/2006/main" xmlns:r="http://schemas.openxmlformats.org/officeDocument/2006/relationships" xmlns:p="http://schemas.openxmlformats.org/presentationml/2006/main">
+  <p:cSld>
+    <p:spTree>
+      <p:nvGrpSpPr>
+        <p:cNvPr id="1" name=""/>
+        <p:cNvGrpSpPr/>
+        <p:nvPr/>
+      </p:nvGrpSpPr>
+      <p:grpSpPr>
+        <a:xfrm>
+          <a:off x="0" y="0"/>
+          <a:ext cx="0" cy="0"/>
+          <a:chOff x="0" y="0"/>
+          <a:chExt cx="0" cy="0"/>
+        </a:xfrm>
+      </p:grpSpPr>
       <p:graphicFrame>
         <p:nvGraphicFramePr>
           <p:cNvPr id="5" name="Diagramme 4">
@@ -10847,7 +16808,7 @@
 </p:sld>
 </file>
 
-<file path=ppt/slides/slide8.xml><?xml version="1.0" encoding="utf-8"?>
+<file path=ppt/slides/slide9.xml><?xml version="1.0" encoding="utf-8"?>
 <p:sld xmlns:a="http://schemas.openxmlformats.org/drawingml/2006/main" xmlns:r="http://schemas.openxmlformats.org/officeDocument/2006/relationships" xmlns:p="http://schemas.openxmlformats.org/presentationml/2006/main">
   <p:cSld>
     <p:spTree>
@@ -11505,908 +17466,6 @@
     <p:extLst>
       <p:ext uri="{BB962C8B-B14F-4D97-AF65-F5344CB8AC3E}">
         <p14:creationId xmlns:p14="http://schemas.microsoft.com/office/powerpoint/2010/main" val="3631102099"/>
-      </p:ext>
-    </p:extLst>
-  </p:cSld>
-  <p:clrMapOvr>
-    <a:masterClrMapping/>
-  </p:clrMapOvr>
-</p:sld>
-</file>
-
-<file path=ppt/slides/slide9.xml><?xml version="1.0" encoding="utf-8"?>
-<p:sld xmlns:a="http://schemas.openxmlformats.org/drawingml/2006/main" xmlns:r="http://schemas.openxmlformats.org/officeDocument/2006/relationships" xmlns:p="http://schemas.openxmlformats.org/presentationml/2006/main">
-  <p:cSld>
-    <p:spTree>
-      <p:nvGrpSpPr>
-        <p:cNvPr id="1" name=""/>
-        <p:cNvGrpSpPr/>
-        <p:nvPr/>
-      </p:nvGrpSpPr>
-      <p:grpSpPr>
-        <a:xfrm>
-          <a:off x="0" y="0"/>
-          <a:ext cx="0" cy="0"/>
-          <a:chOff x="0" y="0"/>
-          <a:chExt cx="0" cy="0"/>
-        </a:xfrm>
-      </p:grpSpPr>
-      <p:sp>
-        <p:nvSpPr>
-          <p:cNvPr id="4" name="Titre 3">
-            <a:extLst>
-              <a:ext uri="{FF2B5EF4-FFF2-40B4-BE49-F238E27FC236}">
-                <a16:creationId xmlns:a16="http://schemas.microsoft.com/office/drawing/2014/main" id="{CC2A2999-2A2B-52F7-227C-09A61B8C832C}"/>
-              </a:ext>
-            </a:extLst>
-          </p:cNvPr>
-          <p:cNvSpPr>
-            <a:spLocks noGrp="1"/>
-          </p:cNvSpPr>
-          <p:nvPr>
-            <p:ph type="title"/>
-          </p:nvPr>
-        </p:nvSpPr>
-        <p:spPr/>
-        <p:txBody>
-          <a:bodyPr/>
-          <a:lstStyle/>
-          <a:p>
-            <a:endParaRPr lang="fr-FR" dirty="0"/>
-          </a:p>
-        </p:txBody>
-      </p:sp>
-      <p:pic>
-        <p:nvPicPr>
-          <p:cNvPr id="5" name="Graphique 4" descr="Homme avec un remplissage uni">
-            <a:extLst>
-              <a:ext uri="{FF2B5EF4-FFF2-40B4-BE49-F238E27FC236}">
-                <a16:creationId xmlns:a16="http://schemas.microsoft.com/office/drawing/2014/main" id="{C2D34783-C6E4-301A-7FF1-B841B66054D1}"/>
-              </a:ext>
-            </a:extLst>
-          </p:cNvPr>
-          <p:cNvPicPr>
-            <a:picLocks noChangeAspect="1"/>
-          </p:cNvPicPr>
-          <p:nvPr/>
-        </p:nvPicPr>
-        <p:blipFill>
-          <a:blip r:embed="rId2">
-            <a:extLst>
-              <a:ext uri="{28A0092B-C50C-407E-A947-70E740481C1C}">
-                <a14:useLocalDpi xmlns:a14="http://schemas.microsoft.com/office/drawing/2010/main" val="0"/>
-              </a:ext>
-              <a:ext uri="{96DAC541-7B7A-43D3-8B79-37D633B846F1}">
-                <asvg:svgBlip xmlns:asvg="http://schemas.microsoft.com/office/drawing/2016/SVG/main" r:embed="rId3"/>
-              </a:ext>
-            </a:extLst>
-          </a:blip>
-          <a:stretch>
-            <a:fillRect/>
-          </a:stretch>
-        </p:blipFill>
-        <p:spPr>
-          <a:xfrm>
-            <a:off x="3810668" y="2718816"/>
-            <a:ext cx="1743456" cy="1743456"/>
-          </a:xfrm>
-          <a:prstGeom prst="rect">
-            <a:avLst/>
-          </a:prstGeom>
-        </p:spPr>
-      </p:pic>
-      <p:pic>
-        <p:nvPicPr>
-          <p:cNvPr id="7" name="Graphique 6" descr="Femme avec un remplissage uni">
-            <a:extLst>
-              <a:ext uri="{FF2B5EF4-FFF2-40B4-BE49-F238E27FC236}">
-                <a16:creationId xmlns:a16="http://schemas.microsoft.com/office/drawing/2014/main" id="{30C17F68-E2AA-3F3B-01AA-A173088A0525}"/>
-              </a:ext>
-            </a:extLst>
-          </p:cNvPr>
-          <p:cNvPicPr>
-            <a:picLocks noChangeAspect="1"/>
-          </p:cNvPicPr>
-          <p:nvPr/>
-        </p:nvPicPr>
-        <p:blipFill>
-          <a:blip r:embed="rId4">
-            <a:extLst>
-              <a:ext uri="{28A0092B-C50C-407E-A947-70E740481C1C}">
-                <a14:useLocalDpi xmlns:a14="http://schemas.microsoft.com/office/drawing/2010/main" val="0"/>
-              </a:ext>
-              <a:ext uri="{96DAC541-7B7A-43D3-8B79-37D633B846F1}">
-                <asvg:svgBlip xmlns:asvg="http://schemas.microsoft.com/office/drawing/2016/SVG/main" r:embed="rId5"/>
-              </a:ext>
-            </a:extLst>
-          </a:blip>
-          <a:stretch>
-            <a:fillRect/>
-          </a:stretch>
-        </p:blipFill>
-        <p:spPr>
-          <a:xfrm>
-            <a:off x="10448544" y="2622804"/>
-            <a:ext cx="1743456" cy="1743456"/>
-          </a:xfrm>
-          <a:prstGeom prst="rect">
-            <a:avLst/>
-          </a:prstGeom>
-        </p:spPr>
-      </p:pic>
-      <p:sp>
-        <p:nvSpPr>
-          <p:cNvPr id="8" name="Flèche : droite 7">
-            <a:extLst>
-              <a:ext uri="{FF2B5EF4-FFF2-40B4-BE49-F238E27FC236}">
-                <a16:creationId xmlns:a16="http://schemas.microsoft.com/office/drawing/2014/main" id="{D457F5E4-7C2D-FE4E-6227-42A5982DD0A8}"/>
-              </a:ext>
-            </a:extLst>
-          </p:cNvPr>
-          <p:cNvSpPr/>
-          <p:nvPr/>
-        </p:nvSpPr>
-        <p:spPr>
-          <a:xfrm>
-            <a:off x="5560981" y="2774920"/>
-            <a:ext cx="5040000" cy="720000"/>
-          </a:xfrm>
-          <a:prstGeom prst="rightArrow">
-            <a:avLst/>
-          </a:prstGeom>
-        </p:spPr>
-        <p:style>
-          <a:lnRef idx="2">
-            <a:schemeClr val="accent1">
-              <a:shade val="15000"/>
-            </a:schemeClr>
-          </a:lnRef>
-          <a:fillRef idx="1">
-            <a:schemeClr val="accent1"/>
-          </a:fillRef>
-          <a:effectRef idx="0">
-            <a:schemeClr val="accent1"/>
-          </a:effectRef>
-          <a:fontRef idx="minor">
-            <a:schemeClr val="lt1"/>
-          </a:fontRef>
-        </p:style>
-        <p:txBody>
-          <a:bodyPr rtlCol="0" anchor="ctr"/>
-          <a:lstStyle/>
-          <a:p>
-            <a:pPr algn="ctr"/>
-            <a:r>
-              <a:rPr lang="fr-FR" sz="1400" dirty="0"/>
-              <a:t>attr1_ - Q8 - </a:t>
-            </a:r>
-            <a:r>
-              <a:rPr lang="fr-FR" sz="1400" dirty="0" err="1"/>
-              <a:t>what</a:t>
-            </a:r>
-            <a:r>
-              <a:rPr lang="fr-FR" sz="1400" dirty="0"/>
-              <a:t> </a:t>
-            </a:r>
-            <a:r>
-              <a:rPr lang="fr-FR" sz="1400" dirty="0" err="1"/>
-              <a:t>you</a:t>
-            </a:r>
-            <a:r>
-              <a:rPr lang="fr-FR" sz="1400" dirty="0"/>
-              <a:t> look for in </a:t>
-            </a:r>
-            <a:r>
-              <a:rPr lang="fr-FR" sz="1400" dirty="0" err="1"/>
-              <a:t>opp</a:t>
-            </a:r>
-            <a:r>
-              <a:rPr lang="fr-FR" sz="1400" dirty="0"/>
-              <a:t> </a:t>
-            </a:r>
-            <a:r>
-              <a:rPr lang="fr-FR" sz="1400" dirty="0" err="1"/>
-              <a:t>sex</a:t>
-            </a:r>
-            <a:endParaRPr lang="fr-FR" sz="1400" dirty="0"/>
-          </a:p>
-        </p:txBody>
-      </p:sp>
-      <p:sp>
-        <p:nvSpPr>
-          <p:cNvPr id="9" name="Flèche : gauche 8">
-            <a:extLst>
-              <a:ext uri="{FF2B5EF4-FFF2-40B4-BE49-F238E27FC236}">
-                <a16:creationId xmlns:a16="http://schemas.microsoft.com/office/drawing/2014/main" id="{08527DFB-C326-42D8-3868-92244B861396}"/>
-              </a:ext>
-            </a:extLst>
-          </p:cNvPr>
-          <p:cNvSpPr/>
-          <p:nvPr/>
-        </p:nvSpPr>
-        <p:spPr>
-          <a:xfrm>
-            <a:off x="5547935" y="3439965"/>
-            <a:ext cx="5040000" cy="720000"/>
-          </a:xfrm>
-          <a:prstGeom prst="leftArrow">
-            <a:avLst/>
-          </a:prstGeom>
-        </p:spPr>
-        <p:style>
-          <a:lnRef idx="2">
-            <a:schemeClr val="accent1">
-              <a:shade val="15000"/>
-            </a:schemeClr>
-          </a:lnRef>
-          <a:fillRef idx="1">
-            <a:schemeClr val="accent1"/>
-          </a:fillRef>
-          <a:effectRef idx="0">
-            <a:schemeClr val="accent1"/>
-          </a:effectRef>
-          <a:fontRef idx="minor">
-            <a:schemeClr val="lt1"/>
-          </a:fontRef>
-        </p:style>
-        <p:txBody>
-          <a:bodyPr rtlCol="0" anchor="ctr"/>
-          <a:lstStyle/>
-          <a:p>
-            <a:pPr algn="ctr"/>
-            <a:r>
-              <a:rPr lang="fr-FR" sz="1400" dirty="0"/>
-              <a:t>attr2_ - Q10 - </a:t>
-            </a:r>
-            <a:r>
-              <a:rPr lang="fr-FR" sz="1400" dirty="0" err="1"/>
-              <a:t>what</a:t>
-            </a:r>
-            <a:r>
-              <a:rPr lang="fr-FR" sz="1400" dirty="0"/>
-              <a:t> I </a:t>
-            </a:r>
-            <a:r>
-              <a:rPr lang="fr-FR" sz="1400" dirty="0" err="1"/>
-              <a:t>think</a:t>
-            </a:r>
-            <a:r>
-              <a:rPr lang="fr-FR" sz="1400" dirty="0"/>
-              <a:t> </a:t>
-            </a:r>
-            <a:r>
-              <a:rPr lang="fr-FR" sz="1400" dirty="0" err="1"/>
-              <a:t>they</a:t>
-            </a:r>
-            <a:r>
-              <a:rPr lang="fr-FR" sz="1400" dirty="0"/>
-              <a:t> look for a date</a:t>
-            </a:r>
-          </a:p>
-        </p:txBody>
-      </p:sp>
-      <p:pic>
-        <p:nvPicPr>
-          <p:cNvPr id="11" name="Graphique 10" descr="Nuage contour">
-            <a:extLst>
-              <a:ext uri="{FF2B5EF4-FFF2-40B4-BE49-F238E27FC236}">
-                <a16:creationId xmlns:a16="http://schemas.microsoft.com/office/drawing/2014/main" id="{7CCBDF41-572B-4E3C-C004-9823BB4A4AE3}"/>
-              </a:ext>
-            </a:extLst>
-          </p:cNvPr>
-          <p:cNvPicPr>
-            <a:picLocks noChangeAspect="1"/>
-          </p:cNvPicPr>
-          <p:nvPr/>
-        </p:nvPicPr>
-        <p:blipFill>
-          <a:blip r:embed="rId6">
-            <a:extLst>
-              <a:ext uri="{28A0092B-C50C-407E-A947-70E740481C1C}">
-                <a14:useLocalDpi xmlns:a14="http://schemas.microsoft.com/office/drawing/2010/main" val="0"/>
-              </a:ext>
-              <a:ext uri="{96DAC541-7B7A-43D3-8B79-37D633B846F1}">
-                <asvg:svgBlip xmlns:asvg="http://schemas.microsoft.com/office/drawing/2016/SVG/main" r:embed="rId7"/>
-              </a:ext>
-            </a:extLst>
-          </a:blip>
-          <a:stretch>
-            <a:fillRect/>
-          </a:stretch>
-        </p:blipFill>
-        <p:spPr>
-          <a:xfrm>
-            <a:off x="160689" y="1794532"/>
-            <a:ext cx="1466088" cy="1466088"/>
-          </a:xfrm>
-          <a:prstGeom prst="rect">
-            <a:avLst/>
-          </a:prstGeom>
-        </p:spPr>
-      </p:pic>
-      <p:sp>
-        <p:nvSpPr>
-          <p:cNvPr id="13" name="ZoneTexte 12">
-            <a:extLst>
-              <a:ext uri="{FF2B5EF4-FFF2-40B4-BE49-F238E27FC236}">
-                <a16:creationId xmlns:a16="http://schemas.microsoft.com/office/drawing/2014/main" id="{D2E02F60-7FBB-0954-3EC7-9BF8BB5CB190}"/>
-              </a:ext>
-            </a:extLst>
-          </p:cNvPr>
-          <p:cNvSpPr txBox="1"/>
-          <p:nvPr/>
-        </p:nvSpPr>
-        <p:spPr>
-          <a:xfrm>
-            <a:off x="249081" y="2889031"/>
-            <a:ext cx="2350008" cy="830997"/>
-          </a:xfrm>
-          <a:prstGeom prst="rect">
-            <a:avLst/>
-          </a:prstGeom>
-          <a:noFill/>
-        </p:spPr>
-        <p:txBody>
-          <a:bodyPr wrap="square">
-            <a:spAutoFit/>
-          </a:bodyPr>
-          <a:lstStyle/>
-          <a:p>
-            <a:r>
-              <a:rPr lang="fr-FR" sz="1200" dirty="0"/>
-              <a:t>Q1 - </a:t>
-            </a:r>
-            <a:r>
-              <a:rPr lang="fr-FR" sz="1200" dirty="0" err="1"/>
-              <a:t>primary</a:t>
-            </a:r>
-            <a:r>
-              <a:rPr lang="fr-FR" sz="1200" dirty="0"/>
-              <a:t> goal</a:t>
-            </a:r>
-          </a:p>
-          <a:p>
-            <a:r>
-              <a:rPr lang="fr-FR" sz="1200" dirty="0"/>
-              <a:t>Q4 - </a:t>
-            </a:r>
-            <a:r>
-              <a:rPr lang="fr-FR" sz="1200" dirty="0" err="1"/>
-              <a:t>intended</a:t>
-            </a:r>
-            <a:r>
-              <a:rPr lang="fr-FR" sz="1200" dirty="0"/>
-              <a:t> </a:t>
-            </a:r>
-            <a:r>
-              <a:rPr lang="fr-FR" sz="1200" dirty="0" err="1"/>
-              <a:t>career</a:t>
-            </a:r>
-            <a:endParaRPr lang="fr-FR" sz="1200" dirty="0"/>
-          </a:p>
-          <a:p>
-            <a:r>
-              <a:rPr lang="fr-FR" sz="1200" dirty="0"/>
-              <a:t>Q6 – expectation happy</a:t>
-            </a:r>
-          </a:p>
-          <a:p>
-            <a:r>
-              <a:rPr lang="fr-FR" sz="1200" dirty="0"/>
-              <a:t>Q7 – expectation </a:t>
-            </a:r>
-            <a:r>
-              <a:rPr lang="fr-FR" sz="1200" dirty="0" err="1"/>
-              <a:t>num</a:t>
-            </a:r>
-            <a:endParaRPr lang="fr-FR" sz="1200" dirty="0"/>
-          </a:p>
-        </p:txBody>
-      </p:sp>
-      <p:sp>
-        <p:nvSpPr>
-          <p:cNvPr id="15" name="ZoneTexte 14">
-            <a:extLst>
-              <a:ext uri="{FF2B5EF4-FFF2-40B4-BE49-F238E27FC236}">
-                <a16:creationId xmlns:a16="http://schemas.microsoft.com/office/drawing/2014/main" id="{C7AC9996-9E9A-41A8-EB31-C0F7BA65539C}"/>
-              </a:ext>
-            </a:extLst>
-          </p:cNvPr>
-          <p:cNvSpPr txBox="1"/>
-          <p:nvPr/>
-        </p:nvSpPr>
-        <p:spPr>
-          <a:xfrm>
-            <a:off x="495905" y="4550993"/>
-            <a:ext cx="1743456" cy="1569660"/>
-          </a:xfrm>
-          <a:prstGeom prst="rect">
-            <a:avLst/>
-          </a:prstGeom>
-          <a:noFill/>
-          <a:ln w="38100">
-            <a:solidFill>
-              <a:schemeClr val="tx1"/>
-            </a:solidFill>
-          </a:ln>
-        </p:spPr>
-        <p:txBody>
-          <a:bodyPr wrap="square" rtlCol="0">
-            <a:spAutoFit/>
-          </a:bodyPr>
-          <a:lstStyle/>
-          <a:p>
-            <a:pPr algn="ctr"/>
-            <a:r>
-              <a:rPr lang="fr-FR" sz="1200" dirty="0" err="1"/>
-              <a:t>Attributes</a:t>
-            </a:r>
-            <a:endParaRPr lang="fr-FR" sz="1200" dirty="0"/>
-          </a:p>
-          <a:p>
-            <a:r>
-              <a:rPr lang="fr-FR" sz="1200" dirty="0"/>
-              <a:t>Q2 - How </a:t>
-            </a:r>
-            <a:r>
-              <a:rPr lang="fr-FR" sz="1200" dirty="0" err="1"/>
-              <a:t>often</a:t>
-            </a:r>
-            <a:r>
-              <a:rPr lang="fr-FR" sz="1200" dirty="0"/>
-              <a:t> on date</a:t>
-            </a:r>
-          </a:p>
-          <a:p>
-            <a:r>
-              <a:rPr lang="fr-FR" sz="1200" dirty="0"/>
-              <a:t>Q3 - How </a:t>
-            </a:r>
-            <a:r>
-              <a:rPr lang="fr-FR" sz="1200" dirty="0" err="1"/>
-              <a:t>often</a:t>
-            </a:r>
-            <a:r>
-              <a:rPr lang="fr-FR" sz="1200" dirty="0"/>
-              <a:t> out</a:t>
-            </a:r>
-          </a:p>
-          <a:p>
-            <a:r>
-              <a:rPr lang="fr-FR" sz="1200" dirty="0"/>
-              <a:t>Q5 - </a:t>
-            </a:r>
-            <a:r>
-              <a:rPr lang="fr-FR" sz="1200" dirty="0" err="1"/>
-              <a:t>Activities</a:t>
-            </a:r>
-            <a:endParaRPr lang="fr-FR" sz="1200" dirty="0"/>
-          </a:p>
-          <a:p>
-            <a:r>
-              <a:rPr lang="fr-FR" sz="1200" dirty="0" err="1"/>
-              <a:t>Undergraduate</a:t>
-            </a:r>
-            <a:r>
-              <a:rPr lang="fr-FR" sz="1200" dirty="0"/>
-              <a:t> </a:t>
-            </a:r>
-            <a:r>
-              <a:rPr lang="fr-FR" sz="1200" dirty="0" err="1"/>
-              <a:t>school</a:t>
-            </a:r>
-            <a:endParaRPr lang="fr-FR" sz="1200" dirty="0"/>
-          </a:p>
-          <a:p>
-            <a:r>
-              <a:rPr lang="fr-FR" sz="1200" dirty="0"/>
-              <a:t>Race</a:t>
-            </a:r>
-          </a:p>
-          <a:p>
-            <a:r>
-              <a:rPr lang="fr-FR" sz="1200" dirty="0"/>
-              <a:t>Religion</a:t>
-            </a:r>
-          </a:p>
-          <a:p>
-            <a:r>
-              <a:rPr lang="fr-FR" sz="1200" dirty="0"/>
-              <a:t>Age</a:t>
-            </a:r>
-          </a:p>
-        </p:txBody>
-      </p:sp>
-      <p:sp>
-        <p:nvSpPr>
-          <p:cNvPr id="16" name="Flèche : gauche 15">
-            <a:extLst>
-              <a:ext uri="{FF2B5EF4-FFF2-40B4-BE49-F238E27FC236}">
-                <a16:creationId xmlns:a16="http://schemas.microsoft.com/office/drawing/2014/main" id="{7CEEECCA-816F-C774-7A9B-E096B178AD3F}"/>
-              </a:ext>
-            </a:extLst>
-          </p:cNvPr>
-          <p:cNvSpPr/>
-          <p:nvPr/>
-        </p:nvSpPr>
-        <p:spPr>
-          <a:xfrm>
-            <a:off x="5929976" y="4104696"/>
-            <a:ext cx="5040000" cy="720000"/>
-          </a:xfrm>
-          <a:prstGeom prst="leftArrow">
-            <a:avLst/>
-          </a:prstGeom>
-        </p:spPr>
-        <p:style>
-          <a:lnRef idx="2">
-            <a:schemeClr val="accent1">
-              <a:shade val="15000"/>
-            </a:schemeClr>
-          </a:lnRef>
-          <a:fillRef idx="1">
-            <a:schemeClr val="accent1"/>
-          </a:fillRef>
-          <a:effectRef idx="0">
-            <a:schemeClr val="accent1"/>
-          </a:effectRef>
-          <a:fontRef idx="minor">
-            <a:schemeClr val="lt1"/>
-          </a:fontRef>
-        </p:style>
-        <p:txBody>
-          <a:bodyPr rtlCol="0" anchor="ctr"/>
-          <a:lstStyle/>
-          <a:p>
-            <a:pPr algn="ctr"/>
-            <a:r>
-              <a:rPr lang="fr-FR" sz="1400" dirty="0"/>
-              <a:t>attr4_ - Q9 - </a:t>
-            </a:r>
-            <a:r>
-              <a:rPr lang="fr-FR" sz="1400" dirty="0" err="1"/>
-              <a:t>what</a:t>
-            </a:r>
-            <a:r>
-              <a:rPr lang="fr-FR" sz="1400" dirty="0"/>
-              <a:t> </a:t>
-            </a:r>
-            <a:r>
-              <a:rPr lang="fr-FR" sz="1400" dirty="0" err="1"/>
-              <a:t>they</a:t>
-            </a:r>
-            <a:r>
-              <a:rPr lang="fr-FR" sz="1400" dirty="0"/>
-              <a:t> look for in </a:t>
-            </a:r>
-            <a:r>
-              <a:rPr lang="fr-FR" sz="1400" dirty="0" err="1"/>
-              <a:t>opp</a:t>
-            </a:r>
-            <a:r>
-              <a:rPr lang="fr-FR" sz="1400" dirty="0"/>
-              <a:t> </a:t>
-            </a:r>
-            <a:r>
-              <a:rPr lang="fr-FR" sz="1400" dirty="0" err="1"/>
-              <a:t>sex</a:t>
-            </a:r>
-            <a:endParaRPr lang="fr-FR" sz="1400" dirty="0"/>
-          </a:p>
-        </p:txBody>
-      </p:sp>
-      <p:sp>
-        <p:nvSpPr>
-          <p:cNvPr id="17" name="Flèche : en arc 16">
-            <a:extLst>
-              <a:ext uri="{FF2B5EF4-FFF2-40B4-BE49-F238E27FC236}">
-                <a16:creationId xmlns:a16="http://schemas.microsoft.com/office/drawing/2014/main" id="{1F5D8C2D-3CC9-9372-0A81-F086E089E33C}"/>
-              </a:ext>
-            </a:extLst>
-          </p:cNvPr>
-          <p:cNvSpPr/>
-          <p:nvPr/>
-        </p:nvSpPr>
-        <p:spPr>
-          <a:xfrm>
-            <a:off x="4096084" y="2307336"/>
-            <a:ext cx="1104900" cy="1051465"/>
-          </a:xfrm>
-          <a:prstGeom prst="circularArrow">
-            <a:avLst/>
-          </a:prstGeom>
-        </p:spPr>
-        <p:style>
-          <a:lnRef idx="2">
-            <a:schemeClr val="accent1">
-              <a:shade val="15000"/>
-            </a:schemeClr>
-          </a:lnRef>
-          <a:fillRef idx="1">
-            <a:schemeClr val="accent1"/>
-          </a:fillRef>
-          <a:effectRef idx="0">
-            <a:schemeClr val="accent1"/>
-          </a:effectRef>
-          <a:fontRef idx="minor">
-            <a:schemeClr val="lt1"/>
-          </a:fontRef>
-        </p:style>
-        <p:txBody>
-          <a:bodyPr rtlCol="0" anchor="ctr"/>
-          <a:lstStyle/>
-          <a:p>
-            <a:pPr algn="ctr"/>
-            <a:endParaRPr lang="fr-FR">
-              <a:solidFill>
-                <a:schemeClr val="tx1"/>
-              </a:solidFill>
-            </a:endParaRPr>
-          </a:p>
-        </p:txBody>
-      </p:sp>
-      <p:sp>
-        <p:nvSpPr>
-          <p:cNvPr id="18" name="ZoneTexte 17">
-            <a:extLst>
-              <a:ext uri="{FF2B5EF4-FFF2-40B4-BE49-F238E27FC236}">
-                <a16:creationId xmlns:a16="http://schemas.microsoft.com/office/drawing/2014/main" id="{2179BD8A-7831-07E4-0911-BFBDAF7266DC}"/>
-              </a:ext>
-            </a:extLst>
-          </p:cNvPr>
-          <p:cNvSpPr txBox="1"/>
-          <p:nvPr/>
-        </p:nvSpPr>
-        <p:spPr>
-          <a:xfrm>
-            <a:off x="3417017" y="2063105"/>
-            <a:ext cx="3025893" cy="307777"/>
-          </a:xfrm>
-          <a:prstGeom prst="rect">
-            <a:avLst/>
-          </a:prstGeom>
-          <a:noFill/>
-        </p:spPr>
-        <p:txBody>
-          <a:bodyPr wrap="none" rtlCol="0">
-            <a:spAutoFit/>
-          </a:bodyPr>
-          <a:lstStyle/>
-          <a:p>
-            <a:r>
-              <a:rPr lang="fr-FR" sz="1400" dirty="0"/>
-              <a:t>attr3_ - Q11 - How I </a:t>
-            </a:r>
-            <a:r>
-              <a:rPr lang="fr-FR" sz="1400" dirty="0" err="1"/>
-              <a:t>think</a:t>
-            </a:r>
-            <a:r>
-              <a:rPr lang="fr-FR" sz="1400" dirty="0"/>
-              <a:t> I </a:t>
-            </a:r>
-            <a:r>
-              <a:rPr lang="fr-FR" sz="1400" dirty="0" err="1"/>
-              <a:t>measure</a:t>
-            </a:r>
-            <a:r>
-              <a:rPr lang="fr-FR" sz="1400" dirty="0"/>
-              <a:t> up</a:t>
-            </a:r>
-          </a:p>
-        </p:txBody>
-      </p:sp>
-      <p:sp>
-        <p:nvSpPr>
-          <p:cNvPr id="19" name="ZoneTexte 18">
-            <a:extLst>
-              <a:ext uri="{FF2B5EF4-FFF2-40B4-BE49-F238E27FC236}">
-                <a16:creationId xmlns:a16="http://schemas.microsoft.com/office/drawing/2014/main" id="{35A91468-4A5C-46EF-98C7-F3322B69D755}"/>
-              </a:ext>
-            </a:extLst>
-          </p:cNvPr>
-          <p:cNvSpPr txBox="1"/>
-          <p:nvPr/>
-        </p:nvSpPr>
-        <p:spPr>
-          <a:xfrm>
-            <a:off x="2960215" y="4838836"/>
-            <a:ext cx="3336939" cy="307777"/>
-          </a:xfrm>
-          <a:prstGeom prst="rect">
-            <a:avLst/>
-          </a:prstGeom>
-          <a:noFill/>
-        </p:spPr>
-        <p:txBody>
-          <a:bodyPr wrap="none" rtlCol="0">
-            <a:spAutoFit/>
-          </a:bodyPr>
-          <a:lstStyle/>
-          <a:p>
-            <a:r>
-              <a:rPr lang="fr-FR" sz="1400" dirty="0"/>
-              <a:t>attr5_ - Q12 - How I </a:t>
-            </a:r>
-            <a:r>
-              <a:rPr lang="fr-FR" sz="1400" dirty="0" err="1"/>
-              <a:t>think</a:t>
-            </a:r>
-            <a:r>
-              <a:rPr lang="fr-FR" sz="1400" dirty="0"/>
-              <a:t> </a:t>
-            </a:r>
-            <a:r>
-              <a:rPr lang="fr-FR" sz="1400" dirty="0" err="1"/>
-              <a:t>they</a:t>
-            </a:r>
-            <a:r>
-              <a:rPr lang="fr-FR" sz="1400" dirty="0"/>
-              <a:t> </a:t>
-            </a:r>
-            <a:r>
-              <a:rPr lang="fr-FR" sz="1400" dirty="0" err="1"/>
-              <a:t>perceive</a:t>
-            </a:r>
-            <a:r>
-              <a:rPr lang="fr-FR" sz="1400" dirty="0"/>
-              <a:t> me</a:t>
-            </a:r>
-          </a:p>
-        </p:txBody>
-      </p:sp>
-      <p:sp>
-        <p:nvSpPr>
-          <p:cNvPr id="20" name="Flèche : en arc 19">
-            <a:extLst>
-              <a:ext uri="{FF2B5EF4-FFF2-40B4-BE49-F238E27FC236}">
-                <a16:creationId xmlns:a16="http://schemas.microsoft.com/office/drawing/2014/main" id="{39FD7A89-145B-B9DD-B7A9-927CFBCE35B4}"/>
-              </a:ext>
-            </a:extLst>
-          </p:cNvPr>
-          <p:cNvSpPr/>
-          <p:nvPr/>
-        </p:nvSpPr>
-        <p:spPr>
-          <a:xfrm rot="10800000">
-            <a:off x="4165854" y="3828019"/>
-            <a:ext cx="1104900" cy="1051465"/>
-          </a:xfrm>
-          <a:prstGeom prst="circularArrow">
-            <a:avLst/>
-          </a:prstGeom>
-        </p:spPr>
-        <p:style>
-          <a:lnRef idx="2">
-            <a:schemeClr val="accent1">
-              <a:shade val="15000"/>
-            </a:schemeClr>
-          </a:lnRef>
-          <a:fillRef idx="1">
-            <a:schemeClr val="accent1"/>
-          </a:fillRef>
-          <a:effectRef idx="0">
-            <a:schemeClr val="accent1"/>
-          </a:effectRef>
-          <a:fontRef idx="minor">
-            <a:schemeClr val="lt1"/>
-          </a:fontRef>
-        </p:style>
-        <p:txBody>
-          <a:bodyPr rtlCol="0" anchor="ctr"/>
-          <a:lstStyle/>
-          <a:p>
-            <a:pPr algn="ctr"/>
-            <a:endParaRPr lang="fr-FR">
-              <a:solidFill>
-                <a:schemeClr val="tx1"/>
-              </a:solidFill>
-            </a:endParaRPr>
-          </a:p>
-        </p:txBody>
-      </p:sp>
-      <p:sp>
-        <p:nvSpPr>
-          <p:cNvPr id="21" name="Cercle : creux 20">
-            <a:extLst>
-              <a:ext uri="{FF2B5EF4-FFF2-40B4-BE49-F238E27FC236}">
-                <a16:creationId xmlns:a16="http://schemas.microsoft.com/office/drawing/2014/main" id="{C1F883C3-1957-5A1D-3F88-2890E5ECB526}"/>
-              </a:ext>
-            </a:extLst>
-          </p:cNvPr>
-          <p:cNvSpPr/>
-          <p:nvPr/>
-        </p:nvSpPr>
-        <p:spPr>
-          <a:xfrm>
-            <a:off x="3117623" y="3590544"/>
-            <a:ext cx="764860" cy="722301"/>
-          </a:xfrm>
-          <a:prstGeom prst="donut">
-            <a:avLst/>
-          </a:prstGeom>
-        </p:spPr>
-        <p:style>
-          <a:lnRef idx="2">
-            <a:schemeClr val="accent1">
-              <a:shade val="15000"/>
-            </a:schemeClr>
-          </a:lnRef>
-          <a:fillRef idx="1">
-            <a:schemeClr val="accent1"/>
-          </a:fillRef>
-          <a:effectRef idx="0">
-            <a:schemeClr val="accent1"/>
-          </a:effectRef>
-          <a:fontRef idx="minor">
-            <a:schemeClr val="lt1"/>
-          </a:fontRef>
-        </p:style>
-        <p:txBody>
-          <a:bodyPr rtlCol="0" anchor="ctr"/>
-          <a:lstStyle/>
-          <a:p>
-            <a:pPr algn="ctr"/>
-            <a:endParaRPr lang="fr-FR">
-              <a:solidFill>
-                <a:schemeClr val="tx1"/>
-              </a:solidFill>
-            </a:endParaRPr>
-          </a:p>
-        </p:txBody>
-      </p:sp>
-      <p:sp>
-        <p:nvSpPr>
-          <p:cNvPr id="23" name="ZoneTexte 22">
-            <a:extLst>
-              <a:ext uri="{FF2B5EF4-FFF2-40B4-BE49-F238E27FC236}">
-                <a16:creationId xmlns:a16="http://schemas.microsoft.com/office/drawing/2014/main" id="{4FF3DE83-4CA3-BF0B-9E16-E7C6AF92DA2C}"/>
-              </a:ext>
-            </a:extLst>
-          </p:cNvPr>
-          <p:cNvSpPr txBox="1"/>
-          <p:nvPr/>
-        </p:nvSpPr>
-        <p:spPr>
-          <a:xfrm>
-            <a:off x="2318340" y="3023147"/>
-            <a:ext cx="2118167" cy="523220"/>
-          </a:xfrm>
-          <a:prstGeom prst="rect">
-            <a:avLst/>
-          </a:prstGeom>
-          <a:noFill/>
-        </p:spPr>
-        <p:txBody>
-          <a:bodyPr wrap="square">
-            <a:spAutoFit/>
-          </a:bodyPr>
-          <a:lstStyle/>
-          <a:p>
-            <a:r>
-              <a:rPr lang="fr-FR" sz="1400" dirty="0"/>
-              <a:t>attr7_ - Q15 – Importance of </a:t>
-            </a:r>
-            <a:r>
-              <a:rPr lang="fr-FR" sz="1400" dirty="0" err="1"/>
-              <a:t>attr</a:t>
-            </a:r>
-            <a:r>
-              <a:rPr lang="fr-FR" sz="1400" dirty="0"/>
-              <a:t> to the </a:t>
-            </a:r>
-            <a:r>
-              <a:rPr lang="fr-FR" sz="1400" dirty="0" err="1"/>
-              <a:t>decision</a:t>
-            </a:r>
-            <a:endParaRPr lang="fr-FR" sz="1400" dirty="0"/>
-          </a:p>
-        </p:txBody>
-      </p:sp>
-    </p:spTree>
-    <p:extLst>
-      <p:ext uri="{BB962C8B-B14F-4D97-AF65-F5344CB8AC3E}">
-        <p14:creationId xmlns:p14="http://schemas.microsoft.com/office/powerpoint/2010/main" val="2297956533"/>
       </p:ext>
     </p:extLst>
   </p:cSld>
